--- a/ポートフォリオ資料.pptx
+++ b/ポートフォリオ資料.pptx
@@ -6,6 +6,9 @@
   </p:sldMasterIdLst>
   <p:sldIdLst>
     <p:sldId id="256" r:id="rId2"/>
+    <p:sldId id="257" r:id="rId3"/>
+    <p:sldId id="258" r:id="rId4"/>
+    <p:sldId id="259" r:id="rId5"/>
   </p:sldIdLst>
   <p:sldSz cx="12192000" cy="6858000"/>
   <p:notesSz cx="6858000" cy="9144000"/>
@@ -104,6 +107,11 @@
       </a:defRPr>
     </a:lvl9pPr>
   </p:defaultTextStyle>
+  <p:extLst>
+    <p:ext uri="{EFAFB233-063F-42B5-8137-9DF3F51BA10A}">
+      <p15:sldGuideLst xmlns:p15="http://schemas.microsoft.com/office/powerpoint/2012/main"/>
+    </p:ext>
+  </p:extLst>
 </p:presentation>
 </file>
 
@@ -238,7 +246,7 @@
           <a:p>
             <a:fld id="{4DF2905F-A56B-40B5-936F-879508965375}" type="datetimeFigureOut">
               <a:rPr kumimoji="1" lang="ja-JP" altLang="en-US" smtClean="0"/>
-              <a:t>2026/3/8</a:t>
+              <a:t>2026/3/10</a:t>
             </a:fld>
             <a:endParaRPr kumimoji="1" lang="ja-JP" altLang="en-US"/>
           </a:p>
@@ -440,7 +448,7 @@
           <a:p>
             <a:fld id="{4DF2905F-A56B-40B5-936F-879508965375}" type="datetimeFigureOut">
               <a:rPr kumimoji="1" lang="ja-JP" altLang="en-US" smtClean="0"/>
-              <a:t>2026/3/8</a:t>
+              <a:t>2026/3/10</a:t>
             </a:fld>
             <a:endParaRPr kumimoji="1" lang="ja-JP" altLang="en-US"/>
           </a:p>
@@ -652,7 +660,7 @@
           <a:p>
             <a:fld id="{4DF2905F-A56B-40B5-936F-879508965375}" type="datetimeFigureOut">
               <a:rPr kumimoji="1" lang="ja-JP" altLang="en-US" smtClean="0"/>
-              <a:t>2026/3/8</a:t>
+              <a:t>2026/3/10</a:t>
             </a:fld>
             <a:endParaRPr kumimoji="1" lang="ja-JP" altLang="en-US"/>
           </a:p>
@@ -854,7 +862,7 @@
           <a:p>
             <a:fld id="{4DF2905F-A56B-40B5-936F-879508965375}" type="datetimeFigureOut">
               <a:rPr kumimoji="1" lang="ja-JP" altLang="en-US" smtClean="0"/>
-              <a:t>2026/3/8</a:t>
+              <a:t>2026/3/10</a:t>
             </a:fld>
             <a:endParaRPr kumimoji="1" lang="ja-JP" altLang="en-US"/>
           </a:p>
@@ -1100,7 +1108,7 @@
           <a:p>
             <a:fld id="{4DF2905F-A56B-40B5-936F-879508965375}" type="datetimeFigureOut">
               <a:rPr kumimoji="1" lang="ja-JP" altLang="en-US" smtClean="0"/>
-              <a:t>2026/3/8</a:t>
+              <a:t>2026/3/10</a:t>
             </a:fld>
             <a:endParaRPr kumimoji="1" lang="ja-JP" altLang="en-US"/>
           </a:p>
@@ -1396,7 +1404,7 @@
           <a:p>
             <a:fld id="{4DF2905F-A56B-40B5-936F-879508965375}" type="datetimeFigureOut">
               <a:rPr kumimoji="1" lang="ja-JP" altLang="en-US" smtClean="0"/>
-              <a:t>2026/3/8</a:t>
+              <a:t>2026/3/10</a:t>
             </a:fld>
             <a:endParaRPr kumimoji="1" lang="ja-JP" altLang="en-US"/>
           </a:p>
@@ -1827,7 +1835,7 @@
           <a:p>
             <a:fld id="{4DF2905F-A56B-40B5-936F-879508965375}" type="datetimeFigureOut">
               <a:rPr kumimoji="1" lang="ja-JP" altLang="en-US" smtClean="0"/>
-              <a:t>2026/3/8</a:t>
+              <a:t>2026/3/10</a:t>
             </a:fld>
             <a:endParaRPr kumimoji="1" lang="ja-JP" altLang="en-US"/>
           </a:p>
@@ -1945,7 +1953,7 @@
           <a:p>
             <a:fld id="{4DF2905F-A56B-40B5-936F-879508965375}" type="datetimeFigureOut">
               <a:rPr kumimoji="1" lang="ja-JP" altLang="en-US" smtClean="0"/>
-              <a:t>2026/3/8</a:t>
+              <a:t>2026/3/10</a:t>
             </a:fld>
             <a:endParaRPr kumimoji="1" lang="ja-JP" altLang="en-US"/>
           </a:p>
@@ -2040,7 +2048,7 @@
           <a:p>
             <a:fld id="{4DF2905F-A56B-40B5-936F-879508965375}" type="datetimeFigureOut">
               <a:rPr kumimoji="1" lang="ja-JP" altLang="en-US" smtClean="0"/>
-              <a:t>2026/3/8</a:t>
+              <a:t>2026/3/10</a:t>
             </a:fld>
             <a:endParaRPr kumimoji="1" lang="ja-JP" altLang="en-US"/>
           </a:p>
@@ -2349,7 +2357,7 @@
           <a:p>
             <a:fld id="{4DF2905F-A56B-40B5-936F-879508965375}" type="datetimeFigureOut">
               <a:rPr kumimoji="1" lang="ja-JP" altLang="en-US" smtClean="0"/>
-              <a:t>2026/3/8</a:t>
+              <a:t>2026/3/10</a:t>
             </a:fld>
             <a:endParaRPr kumimoji="1" lang="ja-JP" altLang="en-US"/>
           </a:p>
@@ -2602,7 +2610,7 @@
           <a:p>
             <a:fld id="{4DF2905F-A56B-40B5-936F-879508965375}" type="datetimeFigureOut">
               <a:rPr kumimoji="1" lang="ja-JP" altLang="en-US" smtClean="0"/>
-              <a:t>2026/3/8</a:t>
+              <a:t>2026/3/10</a:t>
             </a:fld>
             <a:endParaRPr kumimoji="1" lang="ja-JP" altLang="en-US"/>
           </a:p>
@@ -2847,7 +2855,7 @@
           <a:p>
             <a:fld id="{4DF2905F-A56B-40B5-936F-879508965375}" type="datetimeFigureOut">
               <a:rPr kumimoji="1" lang="ja-JP" altLang="en-US" smtClean="0"/>
-              <a:t>2026/3/8</a:t>
+              <a:t>2026/3/10</a:t>
             </a:fld>
             <a:endParaRPr kumimoji="1" lang="ja-JP" altLang="en-US"/>
           </a:p>
@@ -5755,6 +5763,3413 @@
 </p:sld>
 </file>
 
+<file path=ppt/slides/slide2.xml><?xml version="1.0" encoding="utf-8"?>
+<p:sld xmlns:a="http://schemas.openxmlformats.org/drawingml/2006/main" xmlns:r="http://schemas.openxmlformats.org/officeDocument/2006/relationships" xmlns:p="http://schemas.openxmlformats.org/presentationml/2006/main">
+  <p:cSld>
+    <p:spTree>
+      <p:nvGrpSpPr>
+        <p:cNvPr id="1" name=""/>
+        <p:cNvGrpSpPr/>
+        <p:nvPr/>
+      </p:nvGrpSpPr>
+      <p:grpSpPr>
+        <a:xfrm>
+          <a:off x="0" y="0"/>
+          <a:ext cx="0" cy="0"/>
+          <a:chOff x="0" y="0"/>
+          <a:chExt cx="0" cy="0"/>
+        </a:xfrm>
+      </p:grpSpPr>
+      <p:sp>
+        <p:nvSpPr>
+          <p:cNvPr id="152" name="角丸四角形 151"/>
+          <p:cNvSpPr/>
+          <p:nvPr/>
+        </p:nvSpPr>
+        <p:spPr>
+          <a:xfrm>
+            <a:off x="1274225" y="1120454"/>
+            <a:ext cx="5537014" cy="5366036"/>
+          </a:xfrm>
+          <a:prstGeom prst="roundRect">
+            <a:avLst/>
+          </a:prstGeom>
+          <a:solidFill>
+            <a:schemeClr val="bg1"/>
+          </a:solidFill>
+          <a:ln w="38100">
+            <a:solidFill>
+              <a:schemeClr val="tx1"/>
+            </a:solidFill>
+          </a:ln>
+        </p:spPr>
+        <p:style>
+          <a:lnRef idx="2">
+            <a:schemeClr val="accent1">
+              <a:shade val="50000"/>
+            </a:schemeClr>
+          </a:lnRef>
+          <a:fillRef idx="1">
+            <a:schemeClr val="accent1"/>
+          </a:fillRef>
+          <a:effectRef idx="0">
+            <a:schemeClr val="accent1"/>
+          </a:effectRef>
+          <a:fontRef idx="minor">
+            <a:schemeClr val="lt1"/>
+          </a:fontRef>
+        </p:style>
+        <p:txBody>
+          <a:bodyPr rtlCol="0" anchor="ctr"/>
+          <a:lstStyle/>
+          <a:p>
+            <a:pPr algn="ctr"/>
+            <a:endParaRPr kumimoji="1" lang="ja-JP" altLang="en-US"/>
+          </a:p>
+        </p:txBody>
+      </p:sp>
+      <p:sp>
+        <p:nvSpPr>
+          <p:cNvPr id="149" name="角丸四角形 148"/>
+          <p:cNvSpPr/>
+          <p:nvPr/>
+        </p:nvSpPr>
+        <p:spPr>
+          <a:xfrm>
+            <a:off x="1441444" y="910662"/>
+            <a:ext cx="5537014" cy="5366036"/>
+          </a:xfrm>
+          <a:prstGeom prst="roundRect">
+            <a:avLst/>
+          </a:prstGeom>
+          <a:solidFill>
+            <a:schemeClr val="bg1"/>
+          </a:solidFill>
+          <a:ln w="38100">
+            <a:solidFill>
+              <a:schemeClr val="tx1"/>
+            </a:solidFill>
+          </a:ln>
+        </p:spPr>
+        <p:style>
+          <a:lnRef idx="2">
+            <a:schemeClr val="accent1">
+              <a:shade val="50000"/>
+            </a:schemeClr>
+          </a:lnRef>
+          <a:fillRef idx="1">
+            <a:schemeClr val="accent1"/>
+          </a:fillRef>
+          <a:effectRef idx="0">
+            <a:schemeClr val="accent1"/>
+          </a:effectRef>
+          <a:fontRef idx="minor">
+            <a:schemeClr val="lt1"/>
+          </a:fontRef>
+        </p:style>
+        <p:txBody>
+          <a:bodyPr rtlCol="0" anchor="ctr"/>
+          <a:lstStyle/>
+          <a:p>
+            <a:pPr algn="ctr"/>
+            <a:endParaRPr kumimoji="1" lang="ja-JP" altLang="en-US"/>
+          </a:p>
+        </p:txBody>
+      </p:sp>
+      <p:sp>
+        <p:nvSpPr>
+          <p:cNvPr id="151" name="角丸四角形 150"/>
+          <p:cNvSpPr/>
+          <p:nvPr/>
+        </p:nvSpPr>
+        <p:spPr>
+          <a:xfrm>
+            <a:off x="1648714" y="698500"/>
+            <a:ext cx="5537014" cy="5366036"/>
+          </a:xfrm>
+          <a:prstGeom prst="roundRect">
+            <a:avLst/>
+          </a:prstGeom>
+          <a:solidFill>
+            <a:schemeClr val="bg1"/>
+          </a:solidFill>
+          <a:ln w="38100">
+            <a:solidFill>
+              <a:schemeClr val="tx1"/>
+            </a:solidFill>
+          </a:ln>
+        </p:spPr>
+        <p:style>
+          <a:lnRef idx="2">
+            <a:schemeClr val="accent1">
+              <a:shade val="50000"/>
+            </a:schemeClr>
+          </a:lnRef>
+          <a:fillRef idx="1">
+            <a:schemeClr val="accent1"/>
+          </a:fillRef>
+          <a:effectRef idx="0">
+            <a:schemeClr val="accent1"/>
+          </a:effectRef>
+          <a:fontRef idx="minor">
+            <a:schemeClr val="lt1"/>
+          </a:fontRef>
+        </p:style>
+        <p:txBody>
+          <a:bodyPr rtlCol="0" anchor="ctr"/>
+          <a:lstStyle/>
+          <a:p>
+            <a:pPr algn="ctr"/>
+            <a:endParaRPr kumimoji="1" lang="ja-JP" altLang="en-US"/>
+          </a:p>
+        </p:txBody>
+      </p:sp>
+      <p:sp>
+        <p:nvSpPr>
+          <p:cNvPr id="127" name="角丸四角形 126"/>
+          <p:cNvSpPr/>
+          <p:nvPr/>
+        </p:nvSpPr>
+        <p:spPr>
+          <a:xfrm>
+            <a:off x="2295074" y="1248266"/>
+            <a:ext cx="3730727" cy="1805344"/>
+          </a:xfrm>
+          <a:prstGeom prst="roundRect">
+            <a:avLst/>
+          </a:prstGeom>
+          <a:solidFill>
+            <a:schemeClr val="bg1">
+              <a:lumMod val="95000"/>
+              <a:alpha val="37000"/>
+            </a:schemeClr>
+          </a:solidFill>
+          <a:ln w="38100">
+            <a:solidFill>
+              <a:schemeClr val="tx1"/>
+            </a:solidFill>
+          </a:ln>
+        </p:spPr>
+        <p:style>
+          <a:lnRef idx="2">
+            <a:schemeClr val="accent1">
+              <a:shade val="50000"/>
+            </a:schemeClr>
+          </a:lnRef>
+          <a:fillRef idx="1">
+            <a:schemeClr val="accent1"/>
+          </a:fillRef>
+          <a:effectRef idx="0">
+            <a:schemeClr val="accent1"/>
+          </a:effectRef>
+          <a:fontRef idx="minor">
+            <a:schemeClr val="lt1"/>
+          </a:fontRef>
+        </p:style>
+        <p:txBody>
+          <a:bodyPr rtlCol="0" anchor="ctr"/>
+          <a:lstStyle/>
+          <a:p>
+            <a:pPr algn="ctr"/>
+            <a:endParaRPr kumimoji="1" lang="ja-JP" altLang="en-US"/>
+          </a:p>
+        </p:txBody>
+      </p:sp>
+      <p:grpSp>
+        <p:nvGrpSpPr>
+          <p:cNvPr id="5" name="グループ化 4"/>
+          <p:cNvGrpSpPr/>
+          <p:nvPr/>
+        </p:nvGrpSpPr>
+        <p:grpSpPr>
+          <a:xfrm>
+            <a:off x="2463538" y="1953197"/>
+            <a:ext cx="821553" cy="821552"/>
+            <a:chOff x="2463538" y="1953197"/>
+            <a:chExt cx="821553" cy="821552"/>
+          </a:xfrm>
+        </p:grpSpPr>
+        <p:sp>
+          <p:nvSpPr>
+            <p:cNvPr id="3" name="正方形/長方形 2"/>
+            <p:cNvSpPr/>
+            <p:nvPr/>
+          </p:nvSpPr>
+          <p:spPr>
+            <a:xfrm>
+              <a:off x="2621279" y="2270760"/>
+              <a:ext cx="487811" cy="503989"/>
+            </a:xfrm>
+            <a:prstGeom prst="rect">
+              <a:avLst/>
+            </a:prstGeom>
+            <a:solidFill>
+              <a:schemeClr val="accent1">
+                <a:alpha val="59000"/>
+              </a:schemeClr>
+            </a:solidFill>
+            <a:ln>
+              <a:noFill/>
+            </a:ln>
+          </p:spPr>
+          <p:style>
+            <a:lnRef idx="2">
+              <a:schemeClr val="accent1">
+                <a:shade val="50000"/>
+              </a:schemeClr>
+            </a:lnRef>
+            <a:fillRef idx="1">
+              <a:schemeClr val="accent1"/>
+            </a:fillRef>
+            <a:effectRef idx="0">
+              <a:schemeClr val="accent1"/>
+            </a:effectRef>
+            <a:fontRef idx="minor">
+              <a:schemeClr val="lt1"/>
+            </a:fontRef>
+          </p:style>
+          <p:txBody>
+            <a:bodyPr rtlCol="0" anchor="ctr"/>
+            <a:lstStyle/>
+            <a:p>
+              <a:pPr algn="ctr"/>
+              <a:endParaRPr kumimoji="1" lang="ja-JP" altLang="en-US"/>
+            </a:p>
+          </p:txBody>
+        </p:sp>
+        <p:pic>
+          <p:nvPicPr>
+            <p:cNvPr id="102" name="図 101"/>
+            <p:cNvPicPr>
+              <a:picLocks noChangeAspect="1"/>
+            </p:cNvPicPr>
+            <p:nvPr/>
+          </p:nvPicPr>
+          <p:blipFill>
+            <a:blip r:embed="rId2"/>
+            <a:stretch>
+              <a:fillRect/>
+            </a:stretch>
+          </p:blipFill>
+          <p:spPr>
+            <a:xfrm>
+              <a:off x="2463538" y="1953197"/>
+              <a:ext cx="821553" cy="821552"/>
+            </a:xfrm>
+            <a:prstGeom prst="rect">
+              <a:avLst/>
+            </a:prstGeom>
+          </p:spPr>
+        </p:pic>
+      </p:grpSp>
+      <p:sp>
+        <p:nvSpPr>
+          <p:cNvPr id="116" name="テキスト ボックス 115"/>
+          <p:cNvSpPr txBox="1"/>
+          <p:nvPr/>
+        </p:nvSpPr>
+        <p:spPr>
+          <a:xfrm>
+            <a:off x="4449906" y="2133139"/>
+            <a:ext cx="685859" cy="461665"/>
+          </a:xfrm>
+          <a:prstGeom prst="rect">
+            <a:avLst/>
+          </a:prstGeom>
+          <a:noFill/>
+        </p:spPr>
+        <p:txBody>
+          <a:bodyPr wrap="square" rtlCol="0">
+            <a:spAutoFit/>
+          </a:bodyPr>
+          <a:lstStyle/>
+          <a:p>
+            <a:pPr algn="ctr"/>
+            <a:r>
+              <a:rPr lang="ja-JP" altLang="en-US" sz="2400" dirty="0" smtClean="0"/>
+              <a:t>・・・</a:t>
+            </a:r>
+            <a:endParaRPr kumimoji="1" lang="ja-JP" altLang="en-US" sz="2400" dirty="0"/>
+          </a:p>
+        </p:txBody>
+      </p:sp>
+      <p:grpSp>
+        <p:nvGrpSpPr>
+          <p:cNvPr id="118" name="グループ化 117"/>
+          <p:cNvGrpSpPr/>
+          <p:nvPr/>
+        </p:nvGrpSpPr>
+        <p:grpSpPr>
+          <a:xfrm>
+            <a:off x="3087636" y="1953196"/>
+            <a:ext cx="821553" cy="821552"/>
+            <a:chOff x="2463538" y="1953197"/>
+            <a:chExt cx="821553" cy="821552"/>
+          </a:xfrm>
+        </p:grpSpPr>
+        <p:sp>
+          <p:nvSpPr>
+            <p:cNvPr id="119" name="正方形/長方形 118"/>
+            <p:cNvSpPr/>
+            <p:nvPr/>
+          </p:nvSpPr>
+          <p:spPr>
+            <a:xfrm>
+              <a:off x="2621279" y="2270760"/>
+              <a:ext cx="487811" cy="503989"/>
+            </a:xfrm>
+            <a:prstGeom prst="rect">
+              <a:avLst/>
+            </a:prstGeom>
+            <a:solidFill>
+              <a:schemeClr val="accent1">
+                <a:alpha val="59000"/>
+              </a:schemeClr>
+            </a:solidFill>
+            <a:ln>
+              <a:noFill/>
+            </a:ln>
+          </p:spPr>
+          <p:style>
+            <a:lnRef idx="2">
+              <a:schemeClr val="accent1">
+                <a:shade val="50000"/>
+              </a:schemeClr>
+            </a:lnRef>
+            <a:fillRef idx="1">
+              <a:schemeClr val="accent1"/>
+            </a:fillRef>
+            <a:effectRef idx="0">
+              <a:schemeClr val="accent1"/>
+            </a:effectRef>
+            <a:fontRef idx="minor">
+              <a:schemeClr val="lt1"/>
+            </a:fontRef>
+          </p:style>
+          <p:txBody>
+            <a:bodyPr rtlCol="0" anchor="ctr"/>
+            <a:lstStyle/>
+            <a:p>
+              <a:pPr algn="ctr"/>
+              <a:endParaRPr kumimoji="1" lang="ja-JP" altLang="en-US"/>
+            </a:p>
+          </p:txBody>
+        </p:sp>
+        <p:pic>
+          <p:nvPicPr>
+            <p:cNvPr id="120" name="図 119"/>
+            <p:cNvPicPr>
+              <a:picLocks noChangeAspect="1"/>
+            </p:cNvPicPr>
+            <p:nvPr/>
+          </p:nvPicPr>
+          <p:blipFill>
+            <a:blip r:embed="rId2"/>
+            <a:stretch>
+              <a:fillRect/>
+            </a:stretch>
+          </p:blipFill>
+          <p:spPr>
+            <a:xfrm>
+              <a:off x="2463538" y="1953197"/>
+              <a:ext cx="821553" cy="821552"/>
+            </a:xfrm>
+            <a:prstGeom prst="rect">
+              <a:avLst/>
+            </a:prstGeom>
+          </p:spPr>
+        </p:pic>
+      </p:grpSp>
+      <p:grpSp>
+        <p:nvGrpSpPr>
+          <p:cNvPr id="121" name="グループ化 120"/>
+          <p:cNvGrpSpPr/>
+          <p:nvPr/>
+        </p:nvGrpSpPr>
+        <p:grpSpPr>
+          <a:xfrm>
+            <a:off x="3749662" y="1953196"/>
+            <a:ext cx="821553" cy="821552"/>
+            <a:chOff x="2463538" y="1953197"/>
+            <a:chExt cx="821553" cy="821552"/>
+          </a:xfrm>
+        </p:grpSpPr>
+        <p:sp>
+          <p:nvSpPr>
+            <p:cNvPr id="122" name="正方形/長方形 121"/>
+            <p:cNvSpPr/>
+            <p:nvPr/>
+          </p:nvSpPr>
+          <p:spPr>
+            <a:xfrm>
+              <a:off x="2621279" y="2270760"/>
+              <a:ext cx="487811" cy="503989"/>
+            </a:xfrm>
+            <a:prstGeom prst="rect">
+              <a:avLst/>
+            </a:prstGeom>
+            <a:solidFill>
+              <a:schemeClr val="accent1">
+                <a:alpha val="59000"/>
+              </a:schemeClr>
+            </a:solidFill>
+            <a:ln>
+              <a:noFill/>
+            </a:ln>
+          </p:spPr>
+          <p:style>
+            <a:lnRef idx="2">
+              <a:schemeClr val="accent1">
+                <a:shade val="50000"/>
+              </a:schemeClr>
+            </a:lnRef>
+            <a:fillRef idx="1">
+              <a:schemeClr val="accent1"/>
+            </a:fillRef>
+            <a:effectRef idx="0">
+              <a:schemeClr val="accent1"/>
+            </a:effectRef>
+            <a:fontRef idx="minor">
+              <a:schemeClr val="lt1"/>
+            </a:fontRef>
+          </p:style>
+          <p:txBody>
+            <a:bodyPr rtlCol="0" anchor="ctr"/>
+            <a:lstStyle/>
+            <a:p>
+              <a:pPr algn="ctr"/>
+              <a:endParaRPr kumimoji="1" lang="ja-JP" altLang="en-US"/>
+            </a:p>
+          </p:txBody>
+        </p:sp>
+        <p:pic>
+          <p:nvPicPr>
+            <p:cNvPr id="123" name="図 122"/>
+            <p:cNvPicPr>
+              <a:picLocks noChangeAspect="1"/>
+            </p:cNvPicPr>
+            <p:nvPr/>
+          </p:nvPicPr>
+          <p:blipFill>
+            <a:blip r:embed="rId2"/>
+            <a:stretch>
+              <a:fillRect/>
+            </a:stretch>
+          </p:blipFill>
+          <p:spPr>
+            <a:xfrm>
+              <a:off x="2463538" y="1953197"/>
+              <a:ext cx="821553" cy="821552"/>
+            </a:xfrm>
+            <a:prstGeom prst="rect">
+              <a:avLst/>
+            </a:prstGeom>
+          </p:spPr>
+        </p:pic>
+      </p:grpSp>
+      <p:grpSp>
+        <p:nvGrpSpPr>
+          <p:cNvPr id="124" name="グループ化 123"/>
+          <p:cNvGrpSpPr/>
+          <p:nvPr/>
+        </p:nvGrpSpPr>
+        <p:grpSpPr>
+          <a:xfrm>
+            <a:off x="5035786" y="1953196"/>
+            <a:ext cx="821553" cy="821552"/>
+            <a:chOff x="2463538" y="1953197"/>
+            <a:chExt cx="821553" cy="821552"/>
+          </a:xfrm>
+        </p:grpSpPr>
+        <p:sp>
+          <p:nvSpPr>
+            <p:cNvPr id="125" name="正方形/長方形 124"/>
+            <p:cNvSpPr/>
+            <p:nvPr/>
+          </p:nvSpPr>
+          <p:spPr>
+            <a:xfrm>
+              <a:off x="2621279" y="2270760"/>
+              <a:ext cx="487811" cy="503989"/>
+            </a:xfrm>
+            <a:prstGeom prst="rect">
+              <a:avLst/>
+            </a:prstGeom>
+            <a:solidFill>
+              <a:schemeClr val="accent1">
+                <a:alpha val="59000"/>
+              </a:schemeClr>
+            </a:solidFill>
+            <a:ln>
+              <a:noFill/>
+            </a:ln>
+          </p:spPr>
+          <p:style>
+            <a:lnRef idx="2">
+              <a:schemeClr val="accent1">
+                <a:shade val="50000"/>
+              </a:schemeClr>
+            </a:lnRef>
+            <a:fillRef idx="1">
+              <a:schemeClr val="accent1"/>
+            </a:fillRef>
+            <a:effectRef idx="0">
+              <a:schemeClr val="accent1"/>
+            </a:effectRef>
+            <a:fontRef idx="minor">
+              <a:schemeClr val="lt1"/>
+            </a:fontRef>
+          </p:style>
+          <p:txBody>
+            <a:bodyPr rtlCol="0" anchor="ctr"/>
+            <a:lstStyle/>
+            <a:p>
+              <a:pPr algn="ctr"/>
+              <a:endParaRPr kumimoji="1" lang="ja-JP" altLang="en-US"/>
+            </a:p>
+          </p:txBody>
+        </p:sp>
+        <p:pic>
+          <p:nvPicPr>
+            <p:cNvPr id="126" name="図 125"/>
+            <p:cNvPicPr>
+              <a:picLocks noChangeAspect="1"/>
+            </p:cNvPicPr>
+            <p:nvPr/>
+          </p:nvPicPr>
+          <p:blipFill>
+            <a:blip r:embed="rId2"/>
+            <a:stretch>
+              <a:fillRect/>
+            </a:stretch>
+          </p:blipFill>
+          <p:spPr>
+            <a:xfrm>
+              <a:off x="2463538" y="1953197"/>
+              <a:ext cx="821553" cy="821552"/>
+            </a:xfrm>
+            <a:prstGeom prst="rect">
+              <a:avLst/>
+            </a:prstGeom>
+          </p:spPr>
+        </p:pic>
+      </p:grpSp>
+      <p:sp>
+        <p:nvSpPr>
+          <p:cNvPr id="9" name="テキスト ボックス 8"/>
+          <p:cNvSpPr txBox="1"/>
+          <p:nvPr/>
+        </p:nvSpPr>
+        <p:spPr>
+          <a:xfrm>
+            <a:off x="3109090" y="1399198"/>
+            <a:ext cx="2113014" cy="369332"/>
+          </a:xfrm>
+          <a:prstGeom prst="rect">
+            <a:avLst/>
+          </a:prstGeom>
+          <a:noFill/>
+        </p:spPr>
+        <p:txBody>
+          <a:bodyPr wrap="none" rtlCol="0">
+            <a:spAutoFit/>
+          </a:bodyPr>
+          <a:lstStyle/>
+          <a:p>
+            <a:r>
+              <a:rPr lang="en-US" altLang="ja-JP" dirty="0"/>
+              <a:t>CPU usage </a:t>
+            </a:r>
+            <a:r>
+              <a:rPr lang="en-US" altLang="ja-JP" dirty="0" smtClean="0"/>
+              <a:t>rate</a:t>
+            </a:r>
+            <a:r>
+              <a:rPr kumimoji="1" lang="ja-JP" altLang="en-US" dirty="0" smtClean="0"/>
+              <a:t>：</a:t>
+            </a:r>
+            <a:r>
+              <a:rPr kumimoji="1" lang="en-US" altLang="ja-JP" dirty="0" smtClean="0"/>
+              <a:t>80%</a:t>
+            </a:r>
+            <a:endParaRPr kumimoji="1" lang="ja-JP" altLang="en-US" dirty="0"/>
+          </a:p>
+        </p:txBody>
+      </p:sp>
+      <p:sp>
+        <p:nvSpPr>
+          <p:cNvPr id="128" name="テキスト ボックス 127"/>
+          <p:cNvSpPr txBox="1"/>
+          <p:nvPr/>
+        </p:nvSpPr>
+        <p:spPr>
+          <a:xfrm>
+            <a:off x="3628574" y="884805"/>
+            <a:ext cx="1025987" cy="369332"/>
+          </a:xfrm>
+          <a:prstGeom prst="rect">
+            <a:avLst/>
+          </a:prstGeom>
+          <a:noFill/>
+        </p:spPr>
+        <p:txBody>
+          <a:bodyPr wrap="none" rtlCol="0">
+            <a:spAutoFit/>
+          </a:bodyPr>
+          <a:lstStyle/>
+          <a:p>
+            <a:r>
+              <a:rPr lang="en-US" altLang="ja-JP" dirty="0" smtClean="0"/>
+              <a:t>Cluster A</a:t>
+            </a:r>
+            <a:endParaRPr kumimoji="1" lang="ja-JP" altLang="en-US" dirty="0"/>
+          </a:p>
+        </p:txBody>
+      </p:sp>
+      <p:sp>
+        <p:nvSpPr>
+          <p:cNvPr id="129" name="角丸四角形 128"/>
+          <p:cNvSpPr/>
+          <p:nvPr/>
+        </p:nvSpPr>
+        <p:spPr>
+          <a:xfrm>
+            <a:off x="2295074" y="3593680"/>
+            <a:ext cx="3730727" cy="1805344"/>
+          </a:xfrm>
+          <a:prstGeom prst="roundRect">
+            <a:avLst/>
+          </a:prstGeom>
+          <a:solidFill>
+            <a:schemeClr val="bg1">
+              <a:lumMod val="95000"/>
+              <a:alpha val="37000"/>
+            </a:schemeClr>
+          </a:solidFill>
+          <a:ln w="38100">
+            <a:solidFill>
+              <a:schemeClr val="tx1"/>
+            </a:solidFill>
+          </a:ln>
+        </p:spPr>
+        <p:style>
+          <a:lnRef idx="2">
+            <a:schemeClr val="accent1">
+              <a:shade val="50000"/>
+            </a:schemeClr>
+          </a:lnRef>
+          <a:fillRef idx="1">
+            <a:schemeClr val="accent1"/>
+          </a:fillRef>
+          <a:effectRef idx="0">
+            <a:schemeClr val="accent1"/>
+          </a:effectRef>
+          <a:fontRef idx="minor">
+            <a:schemeClr val="lt1"/>
+          </a:fontRef>
+        </p:style>
+        <p:txBody>
+          <a:bodyPr rtlCol="0" anchor="ctr"/>
+          <a:lstStyle/>
+          <a:p>
+            <a:pPr algn="ctr"/>
+            <a:endParaRPr kumimoji="1" lang="ja-JP" altLang="en-US"/>
+          </a:p>
+        </p:txBody>
+      </p:sp>
+      <p:sp>
+        <p:nvSpPr>
+          <p:cNvPr id="131" name="正方形/長方形 130"/>
+          <p:cNvSpPr/>
+          <p:nvPr/>
+        </p:nvSpPr>
+        <p:spPr>
+          <a:xfrm>
+            <a:off x="2621279" y="4864101"/>
+            <a:ext cx="487811" cy="256062"/>
+          </a:xfrm>
+          <a:prstGeom prst="rect">
+            <a:avLst/>
+          </a:prstGeom>
+          <a:solidFill>
+            <a:schemeClr val="accent1">
+              <a:alpha val="59000"/>
+            </a:schemeClr>
+          </a:solidFill>
+          <a:ln>
+            <a:noFill/>
+          </a:ln>
+        </p:spPr>
+        <p:style>
+          <a:lnRef idx="2">
+            <a:schemeClr val="accent1">
+              <a:shade val="50000"/>
+            </a:schemeClr>
+          </a:lnRef>
+          <a:fillRef idx="1">
+            <a:schemeClr val="accent1"/>
+          </a:fillRef>
+          <a:effectRef idx="0">
+            <a:schemeClr val="accent1"/>
+          </a:effectRef>
+          <a:fontRef idx="minor">
+            <a:schemeClr val="lt1"/>
+          </a:fontRef>
+        </p:style>
+        <p:txBody>
+          <a:bodyPr rtlCol="0" anchor="ctr"/>
+          <a:lstStyle/>
+          <a:p>
+            <a:pPr algn="ctr"/>
+            <a:endParaRPr kumimoji="1" lang="ja-JP" altLang="en-US"/>
+          </a:p>
+        </p:txBody>
+      </p:sp>
+      <p:pic>
+        <p:nvPicPr>
+          <p:cNvPr id="132" name="図 131"/>
+          <p:cNvPicPr>
+            <a:picLocks noChangeAspect="1"/>
+          </p:cNvPicPr>
+          <p:nvPr/>
+        </p:nvPicPr>
+        <p:blipFill>
+          <a:blip r:embed="rId2"/>
+          <a:stretch>
+            <a:fillRect/>
+          </a:stretch>
+        </p:blipFill>
+        <p:spPr>
+          <a:xfrm>
+            <a:off x="2463538" y="4298611"/>
+            <a:ext cx="821553" cy="821552"/>
+          </a:xfrm>
+          <a:prstGeom prst="rect">
+            <a:avLst/>
+          </a:prstGeom>
+        </p:spPr>
+      </p:pic>
+      <p:sp>
+        <p:nvSpPr>
+          <p:cNvPr id="133" name="テキスト ボックス 132"/>
+          <p:cNvSpPr txBox="1"/>
+          <p:nvPr/>
+        </p:nvSpPr>
+        <p:spPr>
+          <a:xfrm>
+            <a:off x="4449906" y="4478553"/>
+            <a:ext cx="685859" cy="461665"/>
+          </a:xfrm>
+          <a:prstGeom prst="rect">
+            <a:avLst/>
+          </a:prstGeom>
+          <a:noFill/>
+        </p:spPr>
+        <p:txBody>
+          <a:bodyPr wrap="square" rtlCol="0">
+            <a:spAutoFit/>
+          </a:bodyPr>
+          <a:lstStyle/>
+          <a:p>
+            <a:pPr algn="ctr"/>
+            <a:r>
+              <a:rPr lang="ja-JP" altLang="en-US" sz="2400" dirty="0" smtClean="0"/>
+              <a:t>・・・</a:t>
+            </a:r>
+            <a:endParaRPr kumimoji="1" lang="ja-JP" altLang="en-US" sz="2400" dirty="0"/>
+          </a:p>
+        </p:txBody>
+      </p:sp>
+      <p:sp>
+        <p:nvSpPr>
+          <p:cNvPr id="135" name="正方形/長方形 134"/>
+          <p:cNvSpPr/>
+          <p:nvPr/>
+        </p:nvSpPr>
+        <p:spPr>
+          <a:xfrm>
+            <a:off x="3245377" y="4864100"/>
+            <a:ext cx="487811" cy="256062"/>
+          </a:xfrm>
+          <a:prstGeom prst="rect">
+            <a:avLst/>
+          </a:prstGeom>
+          <a:solidFill>
+            <a:schemeClr val="accent1">
+              <a:alpha val="59000"/>
+            </a:schemeClr>
+          </a:solidFill>
+          <a:ln>
+            <a:noFill/>
+          </a:ln>
+        </p:spPr>
+        <p:style>
+          <a:lnRef idx="2">
+            <a:schemeClr val="accent1">
+              <a:shade val="50000"/>
+            </a:schemeClr>
+          </a:lnRef>
+          <a:fillRef idx="1">
+            <a:schemeClr val="accent1"/>
+          </a:fillRef>
+          <a:effectRef idx="0">
+            <a:schemeClr val="accent1"/>
+          </a:effectRef>
+          <a:fontRef idx="minor">
+            <a:schemeClr val="lt1"/>
+          </a:fontRef>
+        </p:style>
+        <p:txBody>
+          <a:bodyPr rtlCol="0" anchor="ctr"/>
+          <a:lstStyle/>
+          <a:p>
+            <a:pPr algn="ctr"/>
+            <a:endParaRPr kumimoji="1" lang="ja-JP" altLang="en-US"/>
+          </a:p>
+        </p:txBody>
+      </p:sp>
+      <p:pic>
+        <p:nvPicPr>
+          <p:cNvPr id="136" name="図 135"/>
+          <p:cNvPicPr>
+            <a:picLocks noChangeAspect="1"/>
+          </p:cNvPicPr>
+          <p:nvPr/>
+        </p:nvPicPr>
+        <p:blipFill>
+          <a:blip r:embed="rId2"/>
+          <a:stretch>
+            <a:fillRect/>
+          </a:stretch>
+        </p:blipFill>
+        <p:spPr>
+          <a:xfrm>
+            <a:off x="3087636" y="4298610"/>
+            <a:ext cx="821553" cy="821552"/>
+          </a:xfrm>
+          <a:prstGeom prst="rect">
+            <a:avLst/>
+          </a:prstGeom>
+        </p:spPr>
+      </p:pic>
+      <p:sp>
+        <p:nvSpPr>
+          <p:cNvPr id="138" name="正方形/長方形 137"/>
+          <p:cNvSpPr/>
+          <p:nvPr/>
+        </p:nvSpPr>
+        <p:spPr>
+          <a:xfrm>
+            <a:off x="3907403" y="4864100"/>
+            <a:ext cx="487811" cy="256062"/>
+          </a:xfrm>
+          <a:prstGeom prst="rect">
+            <a:avLst/>
+          </a:prstGeom>
+          <a:solidFill>
+            <a:schemeClr val="accent1">
+              <a:alpha val="59000"/>
+            </a:schemeClr>
+          </a:solidFill>
+          <a:ln>
+            <a:noFill/>
+          </a:ln>
+        </p:spPr>
+        <p:style>
+          <a:lnRef idx="2">
+            <a:schemeClr val="accent1">
+              <a:shade val="50000"/>
+            </a:schemeClr>
+          </a:lnRef>
+          <a:fillRef idx="1">
+            <a:schemeClr val="accent1"/>
+          </a:fillRef>
+          <a:effectRef idx="0">
+            <a:schemeClr val="accent1"/>
+          </a:effectRef>
+          <a:fontRef idx="minor">
+            <a:schemeClr val="lt1"/>
+          </a:fontRef>
+        </p:style>
+        <p:txBody>
+          <a:bodyPr rtlCol="0" anchor="ctr"/>
+          <a:lstStyle/>
+          <a:p>
+            <a:pPr algn="ctr"/>
+            <a:endParaRPr kumimoji="1" lang="ja-JP" altLang="en-US"/>
+          </a:p>
+        </p:txBody>
+      </p:sp>
+      <p:pic>
+        <p:nvPicPr>
+          <p:cNvPr id="139" name="図 138"/>
+          <p:cNvPicPr>
+            <a:picLocks noChangeAspect="1"/>
+          </p:cNvPicPr>
+          <p:nvPr/>
+        </p:nvPicPr>
+        <p:blipFill>
+          <a:blip r:embed="rId2"/>
+          <a:stretch>
+            <a:fillRect/>
+          </a:stretch>
+        </p:blipFill>
+        <p:spPr>
+          <a:xfrm>
+            <a:off x="3749662" y="4298610"/>
+            <a:ext cx="821553" cy="821552"/>
+          </a:xfrm>
+          <a:prstGeom prst="rect">
+            <a:avLst/>
+          </a:prstGeom>
+        </p:spPr>
+      </p:pic>
+      <p:sp>
+        <p:nvSpPr>
+          <p:cNvPr id="141" name="正方形/長方形 140"/>
+          <p:cNvSpPr/>
+          <p:nvPr/>
+        </p:nvSpPr>
+        <p:spPr>
+          <a:xfrm>
+            <a:off x="5193527" y="4864100"/>
+            <a:ext cx="487811" cy="256062"/>
+          </a:xfrm>
+          <a:prstGeom prst="rect">
+            <a:avLst/>
+          </a:prstGeom>
+          <a:solidFill>
+            <a:schemeClr val="accent1">
+              <a:alpha val="59000"/>
+            </a:schemeClr>
+          </a:solidFill>
+          <a:ln>
+            <a:noFill/>
+          </a:ln>
+        </p:spPr>
+        <p:style>
+          <a:lnRef idx="2">
+            <a:schemeClr val="accent1">
+              <a:shade val="50000"/>
+            </a:schemeClr>
+          </a:lnRef>
+          <a:fillRef idx="1">
+            <a:schemeClr val="accent1"/>
+          </a:fillRef>
+          <a:effectRef idx="0">
+            <a:schemeClr val="accent1"/>
+          </a:effectRef>
+          <a:fontRef idx="minor">
+            <a:schemeClr val="lt1"/>
+          </a:fontRef>
+        </p:style>
+        <p:txBody>
+          <a:bodyPr rtlCol="0" anchor="ctr"/>
+          <a:lstStyle/>
+          <a:p>
+            <a:pPr algn="ctr"/>
+            <a:endParaRPr kumimoji="1" lang="ja-JP" altLang="en-US"/>
+          </a:p>
+        </p:txBody>
+      </p:sp>
+      <p:pic>
+        <p:nvPicPr>
+          <p:cNvPr id="142" name="図 141"/>
+          <p:cNvPicPr>
+            <a:picLocks noChangeAspect="1"/>
+          </p:cNvPicPr>
+          <p:nvPr/>
+        </p:nvPicPr>
+        <p:blipFill>
+          <a:blip r:embed="rId2"/>
+          <a:stretch>
+            <a:fillRect/>
+          </a:stretch>
+        </p:blipFill>
+        <p:spPr>
+          <a:xfrm>
+            <a:off x="5035786" y="4298610"/>
+            <a:ext cx="821553" cy="821552"/>
+          </a:xfrm>
+          <a:prstGeom prst="rect">
+            <a:avLst/>
+          </a:prstGeom>
+        </p:spPr>
+      </p:pic>
+      <p:sp>
+        <p:nvSpPr>
+          <p:cNvPr id="143" name="テキスト ボックス 142"/>
+          <p:cNvSpPr txBox="1"/>
+          <p:nvPr/>
+        </p:nvSpPr>
+        <p:spPr>
+          <a:xfrm>
+            <a:off x="3109090" y="3744612"/>
+            <a:ext cx="2113014" cy="369332"/>
+          </a:xfrm>
+          <a:prstGeom prst="rect">
+            <a:avLst/>
+          </a:prstGeom>
+          <a:noFill/>
+        </p:spPr>
+        <p:txBody>
+          <a:bodyPr wrap="none" rtlCol="0">
+            <a:spAutoFit/>
+          </a:bodyPr>
+          <a:lstStyle/>
+          <a:p>
+            <a:r>
+              <a:rPr lang="en-US" altLang="ja-JP" dirty="0"/>
+              <a:t>CPU usage </a:t>
+            </a:r>
+            <a:r>
+              <a:rPr lang="en-US" altLang="ja-JP" dirty="0" smtClean="0"/>
+              <a:t>rate</a:t>
+            </a:r>
+            <a:r>
+              <a:rPr kumimoji="1" lang="ja-JP" altLang="en-US" dirty="0" smtClean="0"/>
+              <a:t>：</a:t>
+            </a:r>
+            <a:r>
+              <a:rPr kumimoji="1" lang="en-US" altLang="ja-JP" dirty="0" smtClean="0"/>
+              <a:t>30%</a:t>
+            </a:r>
+            <a:endParaRPr kumimoji="1" lang="ja-JP" altLang="en-US" dirty="0"/>
+          </a:p>
+        </p:txBody>
+      </p:sp>
+      <p:sp>
+        <p:nvSpPr>
+          <p:cNvPr id="144" name="テキスト ボックス 143"/>
+          <p:cNvSpPr txBox="1"/>
+          <p:nvPr/>
+        </p:nvSpPr>
+        <p:spPr>
+          <a:xfrm>
+            <a:off x="3628574" y="3230219"/>
+            <a:ext cx="1025987" cy="369332"/>
+          </a:xfrm>
+          <a:prstGeom prst="rect">
+            <a:avLst/>
+          </a:prstGeom>
+          <a:noFill/>
+        </p:spPr>
+        <p:txBody>
+          <a:bodyPr wrap="none" rtlCol="0">
+            <a:spAutoFit/>
+          </a:bodyPr>
+          <a:lstStyle/>
+          <a:p>
+            <a:r>
+              <a:rPr lang="en-US" altLang="ja-JP" dirty="0" smtClean="0"/>
+              <a:t>Cluster B</a:t>
+            </a:r>
+            <a:endParaRPr kumimoji="1" lang="ja-JP" altLang="en-US" dirty="0"/>
+          </a:p>
+        </p:txBody>
+      </p:sp>
+      <p:pic>
+        <p:nvPicPr>
+          <p:cNvPr id="12" name="図 11"/>
+          <p:cNvPicPr>
+            <a:picLocks noChangeAspect="1"/>
+          </p:cNvPicPr>
+          <p:nvPr/>
+        </p:nvPicPr>
+        <p:blipFill>
+          <a:blip r:embed="rId3" cstate="print">
+            <a:extLst>
+              <a:ext uri="{28A0092B-C50C-407E-A947-70E740481C1C}">
+                <a14:useLocalDpi xmlns:a14="http://schemas.microsoft.com/office/drawing/2010/main" val="0"/>
+              </a:ext>
+            </a:extLst>
+          </a:blip>
+          <a:stretch>
+            <a:fillRect/>
+          </a:stretch>
+        </p:blipFill>
+        <p:spPr>
+          <a:xfrm>
+            <a:off x="9131782" y="1120454"/>
+            <a:ext cx="794905" cy="1296151"/>
+          </a:xfrm>
+          <a:prstGeom prst="rect">
+            <a:avLst/>
+          </a:prstGeom>
+        </p:spPr>
+      </p:pic>
+      <p:grpSp>
+        <p:nvGrpSpPr>
+          <p:cNvPr id="54" name="グループ化 53"/>
+          <p:cNvGrpSpPr/>
+          <p:nvPr/>
+        </p:nvGrpSpPr>
+        <p:grpSpPr>
+          <a:xfrm>
+            <a:off x="7816270" y="3946978"/>
+            <a:ext cx="3730727" cy="770954"/>
+            <a:chOff x="6930708" y="2024660"/>
+            <a:chExt cx="3730727" cy="770954"/>
+          </a:xfrm>
+        </p:grpSpPr>
+        <p:sp>
+          <p:nvSpPr>
+            <p:cNvPr id="146" name="角丸四角形 145"/>
+            <p:cNvSpPr/>
+            <p:nvPr/>
+          </p:nvSpPr>
+          <p:spPr>
+            <a:xfrm>
+              <a:off x="6930708" y="2024660"/>
+              <a:ext cx="3730727" cy="770954"/>
+            </a:xfrm>
+            <a:prstGeom prst="roundRect">
+              <a:avLst/>
+            </a:prstGeom>
+            <a:noFill/>
+            <a:ln w="38100">
+              <a:solidFill>
+                <a:srgbClr val="FFC000"/>
+              </a:solidFill>
+            </a:ln>
+          </p:spPr>
+          <p:style>
+            <a:lnRef idx="2">
+              <a:schemeClr val="accent1">
+                <a:shade val="50000"/>
+              </a:schemeClr>
+            </a:lnRef>
+            <a:fillRef idx="1">
+              <a:schemeClr val="accent1"/>
+            </a:fillRef>
+            <a:effectRef idx="0">
+              <a:schemeClr val="accent1"/>
+            </a:effectRef>
+            <a:fontRef idx="minor">
+              <a:schemeClr val="lt1"/>
+            </a:fontRef>
+          </p:style>
+          <p:txBody>
+            <a:bodyPr rtlCol="0" anchor="ctr"/>
+            <a:lstStyle/>
+            <a:p>
+              <a:pPr algn="ctr"/>
+              <a:endParaRPr kumimoji="1" lang="ja-JP" altLang="en-US"/>
+            </a:p>
+          </p:txBody>
+        </p:sp>
+        <p:grpSp>
+          <p:nvGrpSpPr>
+            <p:cNvPr id="53" name="グループ化 52"/>
+            <p:cNvGrpSpPr/>
+            <p:nvPr/>
+          </p:nvGrpSpPr>
+          <p:grpSpPr>
+            <a:xfrm>
+              <a:off x="7183059" y="2102322"/>
+              <a:ext cx="2797114" cy="615629"/>
+              <a:chOff x="7273486" y="2102323"/>
+              <a:chExt cx="2797114" cy="615629"/>
+            </a:xfrm>
+          </p:grpSpPr>
+          <p:sp>
+            <p:nvSpPr>
+              <p:cNvPr id="145" name="テキスト ボックス 144"/>
+              <p:cNvSpPr txBox="1"/>
+              <p:nvPr/>
+            </p:nvSpPr>
+            <p:spPr>
+              <a:xfrm>
+                <a:off x="8158858" y="2225471"/>
+                <a:ext cx="1911742" cy="369332"/>
+              </a:xfrm>
+              <a:prstGeom prst="rect">
+                <a:avLst/>
+              </a:prstGeom>
+              <a:noFill/>
+            </p:spPr>
+            <p:txBody>
+              <a:bodyPr wrap="none" rtlCol="0">
+                <a:spAutoFit/>
+              </a:bodyPr>
+              <a:lstStyle/>
+              <a:p>
+                <a:r>
+                  <a:rPr lang="en-US" altLang="ja-JP" dirty="0" err="1" smtClean="0"/>
+                  <a:t>ESXi</a:t>
+                </a:r>
+                <a:r>
+                  <a:rPr lang="en-US" altLang="ja-JP" dirty="0" smtClean="0"/>
+                  <a:t> Migration Job</a:t>
+                </a:r>
+                <a:endParaRPr kumimoji="1" lang="ja-JP" altLang="en-US" dirty="0"/>
+              </a:p>
+            </p:txBody>
+          </p:sp>
+          <p:pic>
+            <p:nvPicPr>
+              <p:cNvPr id="51" name="図 50"/>
+              <p:cNvPicPr>
+                <a:picLocks noChangeAspect="1"/>
+              </p:cNvPicPr>
+              <p:nvPr/>
+            </p:nvPicPr>
+            <p:blipFill>
+              <a:blip r:embed="rId4"/>
+              <a:stretch>
+                <a:fillRect/>
+              </a:stretch>
+            </p:blipFill>
+            <p:spPr>
+              <a:xfrm>
+                <a:off x="7273486" y="2102323"/>
+                <a:ext cx="615629" cy="615629"/>
+              </a:xfrm>
+              <a:prstGeom prst="rect">
+                <a:avLst/>
+              </a:prstGeom>
+            </p:spPr>
+          </p:pic>
+        </p:grpSp>
+      </p:grpSp>
+      <p:cxnSp>
+        <p:nvCxnSpPr>
+          <p:cNvPr id="147" name="直線矢印コネクタ 146"/>
+          <p:cNvCxnSpPr>
+            <a:stCxn id="154" idx="1"/>
+            <a:endCxn id="129" idx="3"/>
+          </p:cNvCxnSpPr>
+          <p:nvPr/>
+        </p:nvCxnSpPr>
+        <p:spPr>
+          <a:xfrm flipH="1">
+            <a:off x="6025801" y="3176024"/>
+            <a:ext cx="1790469" cy="1320328"/>
+          </a:xfrm>
+          <a:prstGeom prst="straightConnector1">
+            <a:avLst/>
+          </a:prstGeom>
+          <a:ln w="76200">
+            <a:solidFill>
+              <a:schemeClr val="accent6"/>
+            </a:solidFill>
+            <a:tailEnd type="triangle"/>
+          </a:ln>
+        </p:spPr>
+        <p:style>
+          <a:lnRef idx="1">
+            <a:schemeClr val="accent1"/>
+          </a:lnRef>
+          <a:fillRef idx="0">
+            <a:schemeClr val="accent1"/>
+          </a:fillRef>
+          <a:effectRef idx="0">
+            <a:schemeClr val="accent1"/>
+          </a:effectRef>
+          <a:fontRef idx="minor">
+            <a:schemeClr val="tx1"/>
+          </a:fontRef>
+        </p:style>
+      </p:cxnSp>
+      <p:cxnSp>
+        <p:nvCxnSpPr>
+          <p:cNvPr id="148" name="直線矢印コネクタ 147"/>
+          <p:cNvCxnSpPr>
+            <a:stCxn id="154" idx="1"/>
+            <a:endCxn id="127" idx="3"/>
+          </p:cNvCxnSpPr>
+          <p:nvPr/>
+        </p:nvCxnSpPr>
+        <p:spPr>
+          <a:xfrm flipH="1" flipV="1">
+            <a:off x="6025801" y="2150938"/>
+            <a:ext cx="1790469" cy="1025086"/>
+          </a:xfrm>
+          <a:prstGeom prst="straightConnector1">
+            <a:avLst/>
+          </a:prstGeom>
+          <a:ln w="76200">
+            <a:solidFill>
+              <a:schemeClr val="accent6"/>
+            </a:solidFill>
+            <a:tailEnd type="triangle"/>
+          </a:ln>
+        </p:spPr>
+        <p:style>
+          <a:lnRef idx="1">
+            <a:schemeClr val="accent1"/>
+          </a:lnRef>
+          <a:fillRef idx="0">
+            <a:schemeClr val="accent1"/>
+          </a:fillRef>
+          <a:effectRef idx="0">
+            <a:schemeClr val="accent1"/>
+          </a:effectRef>
+          <a:fontRef idx="minor">
+            <a:schemeClr val="tx1"/>
+          </a:fontRef>
+        </p:style>
+      </p:cxnSp>
+      <p:sp>
+        <p:nvSpPr>
+          <p:cNvPr id="150" name="テキスト ボックス 149"/>
+          <p:cNvSpPr txBox="1"/>
+          <p:nvPr/>
+        </p:nvSpPr>
+        <p:spPr>
+          <a:xfrm>
+            <a:off x="3932407" y="270997"/>
+            <a:ext cx="1103379" cy="369332"/>
+          </a:xfrm>
+          <a:prstGeom prst="rect">
+            <a:avLst/>
+          </a:prstGeom>
+          <a:noFill/>
+        </p:spPr>
+        <p:txBody>
+          <a:bodyPr wrap="none" rtlCol="0">
+            <a:spAutoFit/>
+          </a:bodyPr>
+          <a:lstStyle/>
+          <a:p>
+            <a:r>
+              <a:rPr lang="en-US" altLang="ja-JP" dirty="0" err="1" smtClean="0"/>
+              <a:t>vCenter</a:t>
+            </a:r>
+            <a:r>
+              <a:rPr lang="en-US" altLang="ja-JP" dirty="0" smtClean="0"/>
+              <a:t> A</a:t>
+            </a:r>
+            <a:endParaRPr kumimoji="1" lang="ja-JP" altLang="en-US" dirty="0"/>
+          </a:p>
+        </p:txBody>
+      </p:sp>
+      <p:grpSp>
+        <p:nvGrpSpPr>
+          <p:cNvPr id="153" name="グループ化 152"/>
+          <p:cNvGrpSpPr/>
+          <p:nvPr/>
+        </p:nvGrpSpPr>
+        <p:grpSpPr>
+          <a:xfrm>
+            <a:off x="7816270" y="2790547"/>
+            <a:ext cx="3730727" cy="770954"/>
+            <a:chOff x="6930708" y="2024660"/>
+            <a:chExt cx="3730727" cy="770954"/>
+          </a:xfrm>
+        </p:grpSpPr>
+        <p:sp>
+          <p:nvSpPr>
+            <p:cNvPr id="154" name="角丸四角形 153"/>
+            <p:cNvSpPr/>
+            <p:nvPr/>
+          </p:nvSpPr>
+          <p:spPr>
+            <a:xfrm>
+              <a:off x="6930708" y="2024660"/>
+              <a:ext cx="3730727" cy="770954"/>
+            </a:xfrm>
+            <a:prstGeom prst="roundRect">
+              <a:avLst/>
+            </a:prstGeom>
+            <a:noFill/>
+            <a:ln w="38100">
+              <a:solidFill>
+                <a:schemeClr val="accent6"/>
+              </a:solidFill>
+            </a:ln>
+          </p:spPr>
+          <p:style>
+            <a:lnRef idx="2">
+              <a:schemeClr val="accent1">
+                <a:shade val="50000"/>
+              </a:schemeClr>
+            </a:lnRef>
+            <a:fillRef idx="1">
+              <a:schemeClr val="accent1"/>
+            </a:fillRef>
+            <a:effectRef idx="0">
+              <a:schemeClr val="accent1"/>
+            </a:effectRef>
+            <a:fontRef idx="minor">
+              <a:schemeClr val="lt1"/>
+            </a:fontRef>
+          </p:style>
+          <p:txBody>
+            <a:bodyPr rtlCol="0" anchor="ctr"/>
+            <a:lstStyle/>
+            <a:p>
+              <a:pPr algn="ctr"/>
+              <a:endParaRPr kumimoji="1" lang="ja-JP" altLang="en-US"/>
+            </a:p>
+          </p:txBody>
+        </p:sp>
+        <p:grpSp>
+          <p:nvGrpSpPr>
+            <p:cNvPr id="155" name="グループ化 154"/>
+            <p:cNvGrpSpPr/>
+            <p:nvPr/>
+          </p:nvGrpSpPr>
+          <p:grpSpPr>
+            <a:xfrm>
+              <a:off x="7183059" y="2102322"/>
+              <a:ext cx="3226024" cy="615629"/>
+              <a:chOff x="7273486" y="2102323"/>
+              <a:chExt cx="3226024" cy="615629"/>
+            </a:xfrm>
+          </p:grpSpPr>
+          <p:sp>
+            <p:nvSpPr>
+              <p:cNvPr id="156" name="テキスト ボックス 155"/>
+              <p:cNvSpPr txBox="1"/>
+              <p:nvPr/>
+            </p:nvSpPr>
+            <p:spPr>
+              <a:xfrm>
+                <a:off x="7889115" y="2225472"/>
+                <a:ext cx="2610395" cy="369332"/>
+              </a:xfrm>
+              <a:prstGeom prst="rect">
+                <a:avLst/>
+              </a:prstGeom>
+              <a:noFill/>
+            </p:spPr>
+            <p:txBody>
+              <a:bodyPr wrap="none" rtlCol="0">
+                <a:spAutoFit/>
+              </a:bodyPr>
+              <a:lstStyle/>
+              <a:p>
+                <a:r>
+                  <a:rPr lang="en-US" altLang="ja-JP" dirty="0" smtClean="0"/>
+                  <a:t>Resource Monitoring Job</a:t>
+                </a:r>
+                <a:endParaRPr kumimoji="1" lang="ja-JP" altLang="en-US" dirty="0"/>
+              </a:p>
+            </p:txBody>
+          </p:sp>
+          <p:pic>
+            <p:nvPicPr>
+              <p:cNvPr id="157" name="図 156"/>
+              <p:cNvPicPr>
+                <a:picLocks noChangeAspect="1"/>
+              </p:cNvPicPr>
+              <p:nvPr/>
+            </p:nvPicPr>
+            <p:blipFill>
+              <a:blip r:embed="rId4"/>
+              <a:stretch>
+                <a:fillRect/>
+              </a:stretch>
+            </p:blipFill>
+            <p:spPr>
+              <a:xfrm>
+                <a:off x="7273486" y="2102323"/>
+                <a:ext cx="615629" cy="615629"/>
+              </a:xfrm>
+              <a:prstGeom prst="rect">
+                <a:avLst/>
+              </a:prstGeom>
+            </p:spPr>
+          </p:pic>
+        </p:grpSp>
+      </p:grpSp>
+      <p:sp>
+        <p:nvSpPr>
+          <p:cNvPr id="163" name="上矢印 162"/>
+          <p:cNvSpPr/>
+          <p:nvPr/>
+        </p:nvSpPr>
+        <p:spPr>
+          <a:xfrm>
+            <a:off x="5191009" y="2868209"/>
+            <a:ext cx="459234" cy="1245735"/>
+          </a:xfrm>
+          <a:prstGeom prst="upArrow">
+            <a:avLst/>
+          </a:prstGeom>
+          <a:solidFill>
+            <a:srgbClr val="FFC000"/>
+          </a:solidFill>
+          <a:ln w="38100">
+            <a:solidFill>
+              <a:schemeClr val="tx1"/>
+            </a:solidFill>
+          </a:ln>
+        </p:spPr>
+        <p:style>
+          <a:lnRef idx="2">
+            <a:schemeClr val="accent1">
+              <a:shade val="50000"/>
+            </a:schemeClr>
+          </a:lnRef>
+          <a:fillRef idx="1">
+            <a:schemeClr val="accent1"/>
+          </a:fillRef>
+          <a:effectRef idx="0">
+            <a:schemeClr val="accent1"/>
+          </a:effectRef>
+          <a:fontRef idx="minor">
+            <a:schemeClr val="lt1"/>
+          </a:fontRef>
+        </p:style>
+        <p:txBody>
+          <a:bodyPr rtlCol="0" anchor="ctr"/>
+          <a:lstStyle/>
+          <a:p>
+            <a:pPr algn="ctr"/>
+            <a:endParaRPr kumimoji="1" lang="ja-JP" altLang="en-US"/>
+          </a:p>
+        </p:txBody>
+      </p:sp>
+    </p:spTree>
+    <p:extLst>
+      <p:ext uri="{BB962C8B-B14F-4D97-AF65-F5344CB8AC3E}">
+        <p14:creationId xmlns:p14="http://schemas.microsoft.com/office/powerpoint/2010/main" val="2619329333"/>
+      </p:ext>
+    </p:extLst>
+  </p:cSld>
+  <p:clrMapOvr>
+    <a:masterClrMapping/>
+  </p:clrMapOvr>
+</p:sld>
+</file>
+
+<file path=ppt/slides/slide3.xml><?xml version="1.0" encoding="utf-8"?>
+<p:sld xmlns:a="http://schemas.openxmlformats.org/drawingml/2006/main" xmlns:r="http://schemas.openxmlformats.org/officeDocument/2006/relationships" xmlns:p="http://schemas.openxmlformats.org/presentationml/2006/main">
+  <p:cSld>
+    <p:spTree>
+      <p:nvGrpSpPr>
+        <p:cNvPr id="1" name=""/>
+        <p:cNvGrpSpPr/>
+        <p:nvPr/>
+      </p:nvGrpSpPr>
+      <p:grpSpPr>
+        <a:xfrm>
+          <a:off x="0" y="0"/>
+          <a:ext cx="0" cy="0"/>
+          <a:chOff x="0" y="0"/>
+          <a:chExt cx="0" cy="0"/>
+        </a:xfrm>
+      </p:grpSpPr>
+      <p:grpSp>
+        <p:nvGrpSpPr>
+          <p:cNvPr id="39" name="グループ化 38"/>
+          <p:cNvGrpSpPr/>
+          <p:nvPr/>
+        </p:nvGrpSpPr>
+        <p:grpSpPr>
+          <a:xfrm>
+            <a:off x="1586382" y="-1196234"/>
+            <a:ext cx="3407921" cy="3245548"/>
+            <a:chOff x="1511516" y="-1258286"/>
+            <a:chExt cx="3407921" cy="3245548"/>
+          </a:xfrm>
+        </p:grpSpPr>
+        <p:pic>
+          <p:nvPicPr>
+            <p:cNvPr id="13" name="図 12"/>
+            <p:cNvPicPr>
+              <a:picLocks noChangeAspect="1"/>
+            </p:cNvPicPr>
+            <p:nvPr/>
+          </p:nvPicPr>
+          <p:blipFill>
+            <a:blip r:embed="rId2">
+              <a:extLst>
+                <a:ext uri="{28A0092B-C50C-407E-A947-70E740481C1C}">
+                  <a14:useLocalDpi xmlns:a14="http://schemas.microsoft.com/office/drawing/2010/main" val="0"/>
+                </a:ext>
+              </a:extLst>
+            </a:blip>
+            <a:stretch>
+              <a:fillRect/>
+            </a:stretch>
+          </p:blipFill>
+          <p:spPr>
+            <a:xfrm>
+              <a:off x="1833847" y="-1258286"/>
+              <a:ext cx="2763257" cy="2763257"/>
+            </a:xfrm>
+            <a:prstGeom prst="rect">
+              <a:avLst/>
+            </a:prstGeom>
+          </p:spPr>
+        </p:pic>
+        <p:sp>
+          <p:nvSpPr>
+            <p:cNvPr id="16" name="テキスト ボックス 15"/>
+            <p:cNvSpPr txBox="1"/>
+            <p:nvPr/>
+          </p:nvSpPr>
+          <p:spPr>
+            <a:xfrm>
+              <a:off x="1511516" y="1340931"/>
+              <a:ext cx="3407921" cy="646331"/>
+            </a:xfrm>
+            <a:prstGeom prst="rect">
+              <a:avLst/>
+            </a:prstGeom>
+            <a:noFill/>
+          </p:spPr>
+          <p:txBody>
+            <a:bodyPr wrap="none" rtlCol="0">
+              <a:spAutoFit/>
+            </a:bodyPr>
+            <a:lstStyle/>
+            <a:p>
+              <a:r>
+                <a:rPr lang="en-US" altLang="ja-JP" sz="3600" dirty="0" smtClean="0"/>
+                <a:t>Test cases × 100</a:t>
+              </a:r>
+              <a:endParaRPr kumimoji="1" lang="ja-JP" altLang="en-US" sz="3600" dirty="0"/>
+            </a:p>
+          </p:txBody>
+        </p:sp>
+      </p:grpSp>
+      <p:pic>
+        <p:nvPicPr>
+          <p:cNvPr id="17" name="図 16"/>
+          <p:cNvPicPr>
+            <a:picLocks noChangeAspect="1"/>
+          </p:cNvPicPr>
+          <p:nvPr/>
+        </p:nvPicPr>
+        <p:blipFill>
+          <a:blip r:embed="rId3"/>
+          <a:stretch>
+            <a:fillRect/>
+          </a:stretch>
+        </p:blipFill>
+        <p:spPr>
+          <a:xfrm>
+            <a:off x="6088121" y="2931954"/>
+            <a:ext cx="1163849" cy="1163849"/>
+          </a:xfrm>
+          <a:prstGeom prst="rect">
+            <a:avLst/>
+          </a:prstGeom>
+        </p:spPr>
+      </p:pic>
+      <p:sp>
+        <p:nvSpPr>
+          <p:cNvPr id="27" name="テキスト ボックス 26"/>
+          <p:cNvSpPr txBox="1"/>
+          <p:nvPr/>
+        </p:nvSpPr>
+        <p:spPr>
+          <a:xfrm>
+            <a:off x="6066166" y="-1285506"/>
+            <a:ext cx="5470408" cy="3416320"/>
+          </a:xfrm>
+          <a:prstGeom prst="rect">
+            <a:avLst/>
+          </a:prstGeom>
+          <a:noFill/>
+        </p:spPr>
+        <p:txBody>
+          <a:bodyPr wrap="none" rtlCol="0">
+            <a:spAutoFit/>
+          </a:bodyPr>
+          <a:lstStyle/>
+          <a:p>
+            <a:r>
+              <a:rPr lang="en-US" altLang="ja-JP" sz="3600" dirty="0"/>
+              <a:t>• Functional Validation</a:t>
+            </a:r>
+            <a:br>
+              <a:rPr lang="en-US" altLang="ja-JP" sz="3600" dirty="0"/>
+            </a:br>
+            <a:r>
+              <a:rPr lang="en-US" altLang="ja-JP" sz="3600" dirty="0"/>
+              <a:t>• Performance Validation</a:t>
+            </a:r>
+            <a:br>
+              <a:rPr lang="en-US" altLang="ja-JP" sz="3600" dirty="0"/>
+            </a:br>
+            <a:r>
+              <a:rPr lang="en-US" altLang="ja-JP" sz="3600" dirty="0"/>
+              <a:t>• Failure Scenario Testing</a:t>
+            </a:r>
+            <a:br>
+              <a:rPr lang="en-US" altLang="ja-JP" sz="3600" dirty="0"/>
+            </a:br>
+            <a:r>
+              <a:rPr lang="en-US" altLang="ja-JP" sz="3600" dirty="0"/>
+              <a:t>• Exception Scenario Testing</a:t>
+            </a:r>
+            <a:br>
+              <a:rPr lang="en-US" altLang="ja-JP" sz="3600" dirty="0"/>
+            </a:br>
+            <a:r>
+              <a:rPr lang="en-US" altLang="ja-JP" sz="3600" dirty="0"/>
+              <a:t>• Deployment Validation</a:t>
+            </a:r>
+            <a:br>
+              <a:rPr lang="en-US" altLang="ja-JP" sz="3600" dirty="0"/>
+            </a:br>
+            <a:r>
+              <a:rPr lang="en-US" altLang="ja-JP" sz="3600" dirty="0"/>
+              <a:t>• Upgrade Validation</a:t>
+            </a:r>
+            <a:endParaRPr kumimoji="1" lang="ja-JP" altLang="en-US" sz="3600" dirty="0"/>
+          </a:p>
+        </p:txBody>
+      </p:sp>
+      <p:sp>
+        <p:nvSpPr>
+          <p:cNvPr id="28" name="右中かっこ 27"/>
+          <p:cNvSpPr/>
+          <p:nvPr/>
+        </p:nvSpPr>
+        <p:spPr>
+          <a:xfrm rot="5400000">
+            <a:off x="6349063" y="-2948457"/>
+            <a:ext cx="641967" cy="10637511"/>
+          </a:xfrm>
+          <a:prstGeom prst="rightBrace">
+            <a:avLst>
+              <a:gd name="adj1" fmla="val 202771"/>
+              <a:gd name="adj2" fmla="val 50000"/>
+            </a:avLst>
+          </a:prstGeom>
+          <a:ln w="38100">
+            <a:solidFill>
+              <a:schemeClr val="tx1"/>
+            </a:solidFill>
+          </a:ln>
+        </p:spPr>
+        <p:style>
+          <a:lnRef idx="1">
+            <a:schemeClr val="accent1"/>
+          </a:lnRef>
+          <a:fillRef idx="0">
+            <a:schemeClr val="accent1"/>
+          </a:fillRef>
+          <a:effectRef idx="0">
+            <a:schemeClr val="accent1"/>
+          </a:effectRef>
+          <a:fontRef idx="minor">
+            <a:schemeClr val="tx1"/>
+          </a:fontRef>
+        </p:style>
+        <p:txBody>
+          <a:bodyPr rtlCol="0" anchor="ctr"/>
+          <a:lstStyle/>
+          <a:p>
+            <a:pPr algn="ctr"/>
+            <a:endParaRPr kumimoji="1" lang="ja-JP" altLang="en-US"/>
+          </a:p>
+        </p:txBody>
+      </p:sp>
+      <p:grpSp>
+        <p:nvGrpSpPr>
+          <p:cNvPr id="38" name="グループ化 37"/>
+          <p:cNvGrpSpPr/>
+          <p:nvPr/>
+        </p:nvGrpSpPr>
+        <p:grpSpPr>
+          <a:xfrm>
+            <a:off x="3113921" y="3998266"/>
+            <a:ext cx="7112247" cy="1807156"/>
+            <a:chOff x="3073743" y="3200901"/>
+            <a:chExt cx="7112247" cy="1807156"/>
+          </a:xfrm>
+        </p:grpSpPr>
+        <p:grpSp>
+          <p:nvGrpSpPr>
+            <p:cNvPr id="32" name="グループ化 31"/>
+            <p:cNvGrpSpPr>
+              <a:grpSpLocks noChangeAspect="1"/>
+            </p:cNvGrpSpPr>
+            <p:nvPr/>
+          </p:nvGrpSpPr>
+          <p:grpSpPr>
+            <a:xfrm>
+              <a:off x="3073743" y="3200901"/>
+              <a:ext cx="1807156" cy="1807156"/>
+              <a:chOff x="2164658" y="3393494"/>
+              <a:chExt cx="2722867" cy="2722867"/>
+            </a:xfrm>
+          </p:grpSpPr>
+          <p:pic>
+            <p:nvPicPr>
+              <p:cNvPr id="31" name="図 30"/>
+              <p:cNvPicPr>
+                <a:picLocks noChangeAspect="1"/>
+              </p:cNvPicPr>
+              <p:nvPr/>
+            </p:nvPicPr>
+            <p:blipFill>
+              <a:blip r:embed="rId4" cstate="print">
+                <a:extLst>
+                  <a:ext uri="{28A0092B-C50C-407E-A947-70E740481C1C}">
+                    <a14:useLocalDpi xmlns:a14="http://schemas.microsoft.com/office/drawing/2010/main" val="0"/>
+                  </a:ext>
+                </a:extLst>
+              </a:blip>
+              <a:stretch>
+                <a:fillRect/>
+              </a:stretch>
+            </p:blipFill>
+            <p:spPr>
+              <a:xfrm>
+                <a:off x="2164658" y="3393494"/>
+                <a:ext cx="2722867" cy="2722867"/>
+              </a:xfrm>
+              <a:prstGeom prst="rect">
+                <a:avLst/>
+              </a:prstGeom>
+            </p:spPr>
+          </p:pic>
+          <p:pic>
+            <p:nvPicPr>
+              <p:cNvPr id="29" name="図 28"/>
+              <p:cNvPicPr>
+                <a:picLocks noChangeAspect="1"/>
+              </p:cNvPicPr>
+              <p:nvPr/>
+            </p:nvPicPr>
+            <p:blipFill>
+              <a:blip r:embed="rId5"/>
+              <a:stretch>
+                <a:fillRect/>
+              </a:stretch>
+            </p:blipFill>
+            <p:spPr>
+              <a:xfrm>
+                <a:off x="2710566" y="3943350"/>
+                <a:ext cx="1616614" cy="1616614"/>
+              </a:xfrm>
+              <a:prstGeom prst="rect">
+                <a:avLst/>
+              </a:prstGeom>
+            </p:spPr>
+          </p:pic>
+        </p:grpSp>
+        <p:pic>
+          <p:nvPicPr>
+            <p:cNvPr id="34" name="図 33"/>
+            <p:cNvPicPr>
+              <a:picLocks noChangeAspect="1"/>
+            </p:cNvPicPr>
+            <p:nvPr/>
+          </p:nvPicPr>
+          <p:blipFill>
+            <a:blip r:embed="rId6"/>
+            <a:stretch>
+              <a:fillRect/>
+            </a:stretch>
+          </p:blipFill>
+          <p:spPr>
+            <a:xfrm>
+              <a:off x="6108849" y="3457609"/>
+              <a:ext cx="1279008" cy="1279008"/>
+            </a:xfrm>
+            <a:prstGeom prst="rect">
+              <a:avLst/>
+            </a:prstGeom>
+          </p:spPr>
+        </p:pic>
+        <p:pic>
+          <p:nvPicPr>
+            <p:cNvPr id="35" name="図 34"/>
+            <p:cNvPicPr>
+              <a:picLocks noChangeAspect="1"/>
+            </p:cNvPicPr>
+            <p:nvPr/>
+          </p:nvPicPr>
+          <p:blipFill>
+            <a:blip r:embed="rId7"/>
+            <a:stretch>
+              <a:fillRect/>
+            </a:stretch>
+          </p:blipFill>
+          <p:spPr>
+            <a:xfrm>
+              <a:off x="8892251" y="3450244"/>
+              <a:ext cx="1293739" cy="1293739"/>
+            </a:xfrm>
+            <a:prstGeom prst="rect">
+              <a:avLst/>
+            </a:prstGeom>
+          </p:spPr>
+        </p:pic>
+        <p:sp>
+          <p:nvSpPr>
+            <p:cNvPr id="36" name="右矢印 35"/>
+            <p:cNvSpPr/>
+            <p:nvPr/>
+          </p:nvSpPr>
+          <p:spPr>
+            <a:xfrm>
+              <a:off x="5169462" y="3817400"/>
+              <a:ext cx="650824" cy="574158"/>
+            </a:xfrm>
+            <a:prstGeom prst="rightArrow">
+              <a:avLst/>
+            </a:prstGeom>
+            <a:solidFill>
+              <a:schemeClr val="bg1">
+                <a:lumMod val="95000"/>
+              </a:schemeClr>
+            </a:solidFill>
+            <a:ln w="38100">
+              <a:solidFill>
+                <a:schemeClr val="tx1"/>
+              </a:solidFill>
+            </a:ln>
+          </p:spPr>
+          <p:style>
+            <a:lnRef idx="2">
+              <a:schemeClr val="accent1">
+                <a:shade val="50000"/>
+              </a:schemeClr>
+            </a:lnRef>
+            <a:fillRef idx="1">
+              <a:schemeClr val="accent1"/>
+            </a:fillRef>
+            <a:effectRef idx="0">
+              <a:schemeClr val="accent1"/>
+            </a:effectRef>
+            <a:fontRef idx="minor">
+              <a:schemeClr val="lt1"/>
+            </a:fontRef>
+          </p:style>
+          <p:txBody>
+            <a:bodyPr rtlCol="0" anchor="ctr"/>
+            <a:lstStyle/>
+            <a:p>
+              <a:pPr algn="ctr"/>
+              <a:endParaRPr kumimoji="1" lang="ja-JP" altLang="en-US"/>
+            </a:p>
+          </p:txBody>
+        </p:sp>
+        <p:sp>
+          <p:nvSpPr>
+            <p:cNvPr id="37" name="右矢印 36"/>
+            <p:cNvSpPr/>
+            <p:nvPr/>
+          </p:nvSpPr>
+          <p:spPr>
+            <a:xfrm>
+              <a:off x="7814642" y="3817400"/>
+              <a:ext cx="650824" cy="574158"/>
+            </a:xfrm>
+            <a:prstGeom prst="rightArrow">
+              <a:avLst/>
+            </a:prstGeom>
+            <a:solidFill>
+              <a:schemeClr val="bg1">
+                <a:lumMod val="95000"/>
+              </a:schemeClr>
+            </a:solidFill>
+            <a:ln w="38100">
+              <a:solidFill>
+                <a:schemeClr val="tx1"/>
+              </a:solidFill>
+            </a:ln>
+          </p:spPr>
+          <p:style>
+            <a:lnRef idx="2">
+              <a:schemeClr val="accent1">
+                <a:shade val="50000"/>
+              </a:schemeClr>
+            </a:lnRef>
+            <a:fillRef idx="1">
+              <a:schemeClr val="accent1"/>
+            </a:fillRef>
+            <a:effectRef idx="0">
+              <a:schemeClr val="accent1"/>
+            </a:effectRef>
+            <a:fontRef idx="minor">
+              <a:schemeClr val="lt1"/>
+            </a:fontRef>
+          </p:style>
+          <p:txBody>
+            <a:bodyPr rtlCol="0" anchor="ctr"/>
+            <a:lstStyle/>
+            <a:p>
+              <a:pPr algn="ctr"/>
+              <a:endParaRPr kumimoji="1" lang="ja-JP" altLang="en-US"/>
+            </a:p>
+          </p:txBody>
+        </p:sp>
+      </p:grpSp>
+    </p:spTree>
+    <p:extLst>
+      <p:ext uri="{BB962C8B-B14F-4D97-AF65-F5344CB8AC3E}">
+        <p14:creationId xmlns:p14="http://schemas.microsoft.com/office/powerpoint/2010/main" val="649431885"/>
+      </p:ext>
+    </p:extLst>
+  </p:cSld>
+  <p:clrMapOvr>
+    <a:masterClrMapping/>
+  </p:clrMapOvr>
+</p:sld>
+</file>
+
+<file path=ppt/slides/slide4.xml><?xml version="1.0" encoding="utf-8"?>
+<p:sld xmlns:a="http://schemas.openxmlformats.org/drawingml/2006/main" xmlns:r="http://schemas.openxmlformats.org/officeDocument/2006/relationships" xmlns:p="http://schemas.openxmlformats.org/presentationml/2006/main">
+  <p:cSld>
+    <p:spTree>
+      <p:nvGrpSpPr>
+        <p:cNvPr id="1" name=""/>
+        <p:cNvGrpSpPr/>
+        <p:nvPr/>
+      </p:nvGrpSpPr>
+      <p:grpSpPr>
+        <a:xfrm>
+          <a:off x="0" y="0"/>
+          <a:ext cx="0" cy="0"/>
+          <a:chOff x="0" y="0"/>
+          <a:chExt cx="0" cy="0"/>
+        </a:xfrm>
+      </p:grpSpPr>
+      <p:sp>
+        <p:nvSpPr>
+          <p:cNvPr id="48" name="角丸四角形 47"/>
+          <p:cNvSpPr/>
+          <p:nvPr/>
+        </p:nvSpPr>
+        <p:spPr>
+          <a:xfrm>
+            <a:off x="0" y="391533"/>
+            <a:ext cx="13667843" cy="5953024"/>
+          </a:xfrm>
+          <a:prstGeom prst="roundRect">
+            <a:avLst>
+              <a:gd name="adj" fmla="val 8383"/>
+            </a:avLst>
+          </a:prstGeom>
+          <a:solidFill>
+            <a:schemeClr val="bg1"/>
+          </a:solidFill>
+          <a:ln w="38100">
+            <a:solidFill>
+              <a:schemeClr val="tx1"/>
+            </a:solidFill>
+          </a:ln>
+        </p:spPr>
+        <p:style>
+          <a:lnRef idx="2">
+            <a:schemeClr val="accent1">
+              <a:shade val="50000"/>
+            </a:schemeClr>
+          </a:lnRef>
+          <a:fillRef idx="1">
+            <a:schemeClr val="accent1"/>
+          </a:fillRef>
+          <a:effectRef idx="0">
+            <a:schemeClr val="accent1"/>
+          </a:effectRef>
+          <a:fontRef idx="minor">
+            <a:schemeClr val="lt1"/>
+          </a:fontRef>
+        </p:style>
+        <p:txBody>
+          <a:bodyPr rtlCol="0" anchor="ctr"/>
+          <a:lstStyle/>
+          <a:p>
+            <a:pPr algn="ctr"/>
+            <a:endParaRPr kumimoji="1" lang="ja-JP" altLang="en-US"/>
+          </a:p>
+        </p:txBody>
+      </p:sp>
+      <p:pic>
+        <p:nvPicPr>
+          <p:cNvPr id="4" name="図 3"/>
+          <p:cNvPicPr>
+            <a:picLocks noChangeAspect="1"/>
+          </p:cNvPicPr>
+          <p:nvPr/>
+        </p:nvPicPr>
+        <p:blipFill>
+          <a:blip r:embed="rId2" cstate="print">
+            <a:extLst>
+              <a:ext uri="{28A0092B-C50C-407E-A947-70E740481C1C}">
+                <a14:useLocalDpi xmlns:a14="http://schemas.microsoft.com/office/drawing/2010/main" val="0"/>
+              </a:ext>
+            </a:extLst>
+          </a:blip>
+          <a:stretch>
+            <a:fillRect/>
+          </a:stretch>
+        </p:blipFill>
+        <p:spPr>
+          <a:xfrm>
+            <a:off x="6256860" y="-722262"/>
+            <a:ext cx="1154125" cy="1881886"/>
+          </a:xfrm>
+          <a:prstGeom prst="rect">
+            <a:avLst/>
+          </a:prstGeom>
+        </p:spPr>
+      </p:pic>
+      <p:pic>
+        <p:nvPicPr>
+          <p:cNvPr id="6" name="図 5"/>
+          <p:cNvPicPr>
+            <a:picLocks noChangeAspect="1"/>
+          </p:cNvPicPr>
+          <p:nvPr/>
+        </p:nvPicPr>
+        <p:blipFill>
+          <a:blip r:embed="rId3"/>
+          <a:stretch>
+            <a:fillRect/>
+          </a:stretch>
+        </p:blipFill>
+        <p:spPr>
+          <a:xfrm>
+            <a:off x="0" y="-935964"/>
+            <a:ext cx="1227093" cy="1227092"/>
+          </a:xfrm>
+          <a:prstGeom prst="rect">
+            <a:avLst/>
+          </a:prstGeom>
+        </p:spPr>
+      </p:pic>
+      <p:grpSp>
+        <p:nvGrpSpPr>
+          <p:cNvPr id="36" name="グループ化 35"/>
+          <p:cNvGrpSpPr/>
+          <p:nvPr/>
+        </p:nvGrpSpPr>
+        <p:grpSpPr>
+          <a:xfrm>
+            <a:off x="7374146" y="2817267"/>
+            <a:ext cx="3947441" cy="1200912"/>
+            <a:chOff x="3253232" y="615445"/>
+            <a:chExt cx="3947441" cy="1200912"/>
+          </a:xfrm>
+        </p:grpSpPr>
+        <p:sp>
+          <p:nvSpPr>
+            <p:cNvPr id="37" name="テキスト ボックス 36"/>
+            <p:cNvSpPr txBox="1"/>
+            <p:nvPr/>
+          </p:nvSpPr>
+          <p:spPr>
+            <a:xfrm>
+              <a:off x="3253232" y="615445"/>
+              <a:ext cx="776879" cy="369332"/>
+            </a:xfrm>
+            <a:prstGeom prst="rect">
+              <a:avLst/>
+            </a:prstGeom>
+            <a:noFill/>
+          </p:spPr>
+          <p:txBody>
+            <a:bodyPr wrap="none" rtlCol="0">
+              <a:spAutoFit/>
+            </a:bodyPr>
+            <a:lstStyle/>
+            <a:p>
+              <a:r>
+                <a:rPr lang="en-US" altLang="ja-JP" dirty="0" smtClean="0"/>
+                <a:t>Step.5</a:t>
+              </a:r>
+              <a:endParaRPr kumimoji="1" lang="ja-JP" altLang="en-US" dirty="0"/>
+            </a:p>
+          </p:txBody>
+        </p:sp>
+        <p:grpSp>
+          <p:nvGrpSpPr>
+            <p:cNvPr id="38" name="グループ化 37"/>
+            <p:cNvGrpSpPr/>
+            <p:nvPr/>
+          </p:nvGrpSpPr>
+          <p:grpSpPr>
+            <a:xfrm>
+              <a:off x="3469946" y="1045403"/>
+              <a:ext cx="3730727" cy="770954"/>
+              <a:chOff x="6930708" y="2024660"/>
+              <a:chExt cx="3730727" cy="770954"/>
+            </a:xfrm>
+          </p:grpSpPr>
+          <p:sp>
+            <p:nvSpPr>
+              <p:cNvPr id="39" name="角丸四角形 38"/>
+              <p:cNvSpPr/>
+              <p:nvPr/>
+            </p:nvSpPr>
+            <p:spPr>
+              <a:xfrm>
+                <a:off x="6930708" y="2024660"/>
+                <a:ext cx="3730727" cy="770954"/>
+              </a:xfrm>
+              <a:prstGeom prst="roundRect">
+                <a:avLst/>
+              </a:prstGeom>
+              <a:noFill/>
+              <a:ln w="38100">
+                <a:solidFill>
+                  <a:schemeClr val="tx1"/>
+                </a:solidFill>
+              </a:ln>
+            </p:spPr>
+            <p:style>
+              <a:lnRef idx="2">
+                <a:schemeClr val="accent1">
+                  <a:shade val="50000"/>
+                </a:schemeClr>
+              </a:lnRef>
+              <a:fillRef idx="1">
+                <a:schemeClr val="accent1"/>
+              </a:fillRef>
+              <a:effectRef idx="0">
+                <a:schemeClr val="accent1"/>
+              </a:effectRef>
+              <a:fontRef idx="minor">
+                <a:schemeClr val="lt1"/>
+              </a:fontRef>
+            </p:style>
+            <p:txBody>
+              <a:bodyPr rtlCol="0" anchor="ctr"/>
+              <a:lstStyle/>
+              <a:p>
+                <a:pPr algn="ctr"/>
+                <a:endParaRPr kumimoji="1" lang="ja-JP" altLang="en-US"/>
+              </a:p>
+            </p:txBody>
+          </p:sp>
+          <p:grpSp>
+            <p:nvGrpSpPr>
+              <p:cNvPr id="40" name="グループ化 39"/>
+              <p:cNvGrpSpPr/>
+              <p:nvPr/>
+            </p:nvGrpSpPr>
+            <p:grpSpPr>
+              <a:xfrm>
+                <a:off x="7183059" y="2102322"/>
+                <a:ext cx="2365374" cy="615629"/>
+                <a:chOff x="7273486" y="2102323"/>
+                <a:chExt cx="2365374" cy="615629"/>
+              </a:xfrm>
+            </p:grpSpPr>
+            <p:sp>
+              <p:nvSpPr>
+                <p:cNvPr id="41" name="テキスト ボックス 40"/>
+                <p:cNvSpPr txBox="1"/>
+                <p:nvPr/>
+              </p:nvSpPr>
+              <p:spPr>
+                <a:xfrm>
+                  <a:off x="8150311" y="2225471"/>
+                  <a:ext cx="1488549" cy="369332"/>
+                </a:xfrm>
+                <a:prstGeom prst="rect">
+                  <a:avLst/>
+                </a:prstGeom>
+                <a:noFill/>
+              </p:spPr>
+              <p:txBody>
+                <a:bodyPr wrap="none" rtlCol="0">
+                  <a:spAutoFit/>
+                </a:bodyPr>
+                <a:lstStyle/>
+                <a:p>
+                  <a:r>
+                    <a:rPr lang="en-US" altLang="ja-JP" dirty="0" smtClean="0"/>
+                    <a:t>Host Injection</a:t>
+                  </a:r>
+                  <a:endParaRPr lang="ja-JP" altLang="en-US" dirty="0"/>
+                </a:p>
+              </p:txBody>
+            </p:sp>
+            <p:pic>
+              <p:nvPicPr>
+                <p:cNvPr id="42" name="図 41"/>
+                <p:cNvPicPr>
+                  <a:picLocks noChangeAspect="1"/>
+                </p:cNvPicPr>
+                <p:nvPr/>
+              </p:nvPicPr>
+              <p:blipFill>
+                <a:blip r:embed="rId4"/>
+                <a:stretch>
+                  <a:fillRect/>
+                </a:stretch>
+              </p:blipFill>
+              <p:spPr>
+                <a:xfrm>
+                  <a:off x="7273486" y="2102323"/>
+                  <a:ext cx="615629" cy="615629"/>
+                </a:xfrm>
+                <a:prstGeom prst="rect">
+                  <a:avLst/>
+                </a:prstGeom>
+              </p:spPr>
+            </p:pic>
+          </p:grpSp>
+        </p:grpSp>
+      </p:grpSp>
+      <p:pic>
+        <p:nvPicPr>
+          <p:cNvPr id="43" name="図 42"/>
+          <p:cNvPicPr>
+            <a:picLocks noChangeAspect="1"/>
+          </p:cNvPicPr>
+          <p:nvPr/>
+        </p:nvPicPr>
+        <p:blipFill>
+          <a:blip r:embed="rId5"/>
+          <a:stretch>
+            <a:fillRect/>
+          </a:stretch>
+        </p:blipFill>
+        <p:spPr>
+          <a:xfrm>
+            <a:off x="5564760" y="1752679"/>
+            <a:ext cx="952500" cy="952500"/>
+          </a:xfrm>
+          <a:prstGeom prst="rect">
+            <a:avLst/>
+          </a:prstGeom>
+        </p:spPr>
+      </p:pic>
+      <p:pic>
+        <p:nvPicPr>
+          <p:cNvPr id="44" name="図 43"/>
+          <p:cNvPicPr>
+            <a:picLocks noChangeAspect="1"/>
+          </p:cNvPicPr>
+          <p:nvPr/>
+        </p:nvPicPr>
+        <p:blipFill>
+          <a:blip r:embed="rId6"/>
+          <a:stretch>
+            <a:fillRect/>
+          </a:stretch>
+        </p:blipFill>
+        <p:spPr>
+          <a:xfrm>
+            <a:off x="5564760" y="3156451"/>
+            <a:ext cx="952500" cy="952500"/>
+          </a:xfrm>
+          <a:prstGeom prst="rect">
+            <a:avLst/>
+          </a:prstGeom>
+        </p:spPr>
+      </p:pic>
+      <p:pic>
+        <p:nvPicPr>
+          <p:cNvPr id="45" name="図 44"/>
+          <p:cNvPicPr>
+            <a:picLocks noChangeAspect="1"/>
+          </p:cNvPicPr>
+          <p:nvPr/>
+        </p:nvPicPr>
+        <p:blipFill>
+          <a:blip r:embed="rId7"/>
+          <a:stretch>
+            <a:fillRect/>
+          </a:stretch>
+        </p:blipFill>
+        <p:spPr>
+          <a:xfrm>
+            <a:off x="5563039" y="4588321"/>
+            <a:ext cx="952500" cy="952500"/>
+          </a:xfrm>
+          <a:prstGeom prst="rect">
+            <a:avLst/>
+          </a:prstGeom>
+        </p:spPr>
+      </p:pic>
+      <p:pic>
+        <p:nvPicPr>
+          <p:cNvPr id="46" name="図 45"/>
+          <p:cNvPicPr>
+            <a:picLocks noChangeAspect="1"/>
+          </p:cNvPicPr>
+          <p:nvPr/>
+        </p:nvPicPr>
+        <p:blipFill>
+          <a:blip r:embed="rId8"/>
+          <a:stretch>
+            <a:fillRect/>
+          </a:stretch>
+        </p:blipFill>
+        <p:spPr>
+          <a:xfrm>
+            <a:off x="11798739" y="1748961"/>
+            <a:ext cx="952500" cy="952500"/>
+          </a:xfrm>
+          <a:prstGeom prst="rect">
+            <a:avLst/>
+          </a:prstGeom>
+        </p:spPr>
+      </p:pic>
+      <p:pic>
+        <p:nvPicPr>
+          <p:cNvPr id="47" name="図 46"/>
+          <p:cNvPicPr>
+            <a:picLocks noChangeAspect="1"/>
+          </p:cNvPicPr>
+          <p:nvPr/>
+        </p:nvPicPr>
+        <p:blipFill>
+          <a:blip r:embed="rId9"/>
+          <a:stretch>
+            <a:fillRect/>
+          </a:stretch>
+        </p:blipFill>
+        <p:spPr>
+          <a:xfrm>
+            <a:off x="11798739" y="3156451"/>
+            <a:ext cx="952500" cy="952500"/>
+          </a:xfrm>
+          <a:prstGeom prst="rect">
+            <a:avLst/>
+          </a:prstGeom>
+        </p:spPr>
+      </p:pic>
+      <p:sp>
+        <p:nvSpPr>
+          <p:cNvPr id="49" name="テキスト ボックス 48"/>
+          <p:cNvSpPr txBox="1"/>
+          <p:nvPr/>
+        </p:nvSpPr>
+        <p:spPr>
+          <a:xfrm>
+            <a:off x="1215406" y="-608086"/>
+            <a:ext cx="4576381" cy="523220"/>
+          </a:xfrm>
+          <a:prstGeom prst="rect">
+            <a:avLst/>
+          </a:prstGeom>
+          <a:noFill/>
+        </p:spPr>
+        <p:txBody>
+          <a:bodyPr wrap="none" rtlCol="0">
+            <a:spAutoFit/>
+          </a:bodyPr>
+          <a:lstStyle/>
+          <a:p>
+            <a:r>
+              <a:rPr lang="en-US" altLang="ja-JP" sz="2800" dirty="0"/>
+              <a:t>Automated </a:t>
+            </a:r>
+            <a:r>
+              <a:rPr lang="en-US" altLang="ja-JP" sz="2800" dirty="0" err="1"/>
+              <a:t>ESXi</a:t>
+            </a:r>
+            <a:r>
+              <a:rPr lang="en-US" altLang="ja-JP" sz="2800" dirty="0"/>
+              <a:t> Build Pipeline</a:t>
+            </a:r>
+            <a:endParaRPr kumimoji="1" lang="ja-JP" altLang="en-US" sz="2800" dirty="0"/>
+          </a:p>
+        </p:txBody>
+      </p:sp>
+      <p:sp>
+        <p:nvSpPr>
+          <p:cNvPr id="50" name="下矢印 49"/>
+          <p:cNvSpPr/>
+          <p:nvPr/>
+        </p:nvSpPr>
+        <p:spPr>
+          <a:xfrm>
+            <a:off x="2718440" y="2415645"/>
+            <a:ext cx="1165575" cy="831578"/>
+          </a:xfrm>
+          <a:prstGeom prst="downArrow">
+            <a:avLst/>
+          </a:prstGeom>
+          <a:solidFill>
+            <a:schemeClr val="accent1">
+              <a:alpha val="69000"/>
+            </a:schemeClr>
+          </a:solidFill>
+          <a:ln w="38100"/>
+        </p:spPr>
+        <p:style>
+          <a:lnRef idx="2">
+            <a:schemeClr val="accent1">
+              <a:shade val="50000"/>
+            </a:schemeClr>
+          </a:lnRef>
+          <a:fillRef idx="1">
+            <a:schemeClr val="accent1"/>
+          </a:fillRef>
+          <a:effectRef idx="0">
+            <a:schemeClr val="accent1"/>
+          </a:effectRef>
+          <a:fontRef idx="minor">
+            <a:schemeClr val="lt1"/>
+          </a:fontRef>
+        </p:style>
+        <p:txBody>
+          <a:bodyPr rtlCol="0" anchor="ctr"/>
+          <a:lstStyle/>
+          <a:p>
+            <a:pPr algn="ctr"/>
+            <a:endParaRPr kumimoji="1" lang="ja-JP" altLang="en-US"/>
+          </a:p>
+        </p:txBody>
+      </p:sp>
+      <p:grpSp>
+        <p:nvGrpSpPr>
+          <p:cNvPr id="14" name="グループ化 13"/>
+          <p:cNvGrpSpPr/>
+          <p:nvPr/>
+        </p:nvGrpSpPr>
+        <p:grpSpPr>
+          <a:xfrm>
+            <a:off x="1138446" y="1415545"/>
+            <a:ext cx="3947441" cy="1200912"/>
+            <a:chOff x="3253232" y="615445"/>
+            <a:chExt cx="3947441" cy="1200912"/>
+          </a:xfrm>
+        </p:grpSpPr>
+        <p:sp>
+          <p:nvSpPr>
+            <p:cNvPr id="8" name="テキスト ボックス 7"/>
+            <p:cNvSpPr txBox="1"/>
+            <p:nvPr/>
+          </p:nvSpPr>
+          <p:spPr>
+            <a:xfrm>
+              <a:off x="3253232" y="615445"/>
+              <a:ext cx="776879" cy="369332"/>
+            </a:xfrm>
+            <a:prstGeom prst="rect">
+              <a:avLst/>
+            </a:prstGeom>
+            <a:noFill/>
+          </p:spPr>
+          <p:txBody>
+            <a:bodyPr wrap="none" rtlCol="0">
+              <a:spAutoFit/>
+            </a:bodyPr>
+            <a:lstStyle/>
+            <a:p>
+              <a:r>
+                <a:rPr lang="en-US" altLang="ja-JP" dirty="0" smtClean="0"/>
+                <a:t>Step.1</a:t>
+              </a:r>
+              <a:endParaRPr kumimoji="1" lang="ja-JP" altLang="en-US" dirty="0"/>
+            </a:p>
+          </p:txBody>
+        </p:sp>
+        <p:grpSp>
+          <p:nvGrpSpPr>
+            <p:cNvPr id="9" name="グループ化 8"/>
+            <p:cNvGrpSpPr/>
+            <p:nvPr/>
+          </p:nvGrpSpPr>
+          <p:grpSpPr>
+            <a:xfrm>
+              <a:off x="3469946" y="1045403"/>
+              <a:ext cx="3730727" cy="770954"/>
+              <a:chOff x="6930708" y="2024660"/>
+              <a:chExt cx="3730727" cy="770954"/>
+            </a:xfrm>
+          </p:grpSpPr>
+          <p:sp>
+            <p:nvSpPr>
+              <p:cNvPr id="10" name="角丸四角形 9"/>
+              <p:cNvSpPr/>
+              <p:nvPr/>
+            </p:nvSpPr>
+            <p:spPr>
+              <a:xfrm>
+                <a:off x="6930708" y="2024660"/>
+                <a:ext cx="3730727" cy="770954"/>
+              </a:xfrm>
+              <a:prstGeom prst="roundRect">
+                <a:avLst/>
+              </a:prstGeom>
+              <a:solidFill>
+                <a:schemeClr val="bg1"/>
+              </a:solidFill>
+              <a:ln w="38100">
+                <a:solidFill>
+                  <a:schemeClr val="tx1"/>
+                </a:solidFill>
+              </a:ln>
+            </p:spPr>
+            <p:style>
+              <a:lnRef idx="2">
+                <a:schemeClr val="accent1">
+                  <a:shade val="50000"/>
+                </a:schemeClr>
+              </a:lnRef>
+              <a:fillRef idx="1">
+                <a:schemeClr val="accent1"/>
+              </a:fillRef>
+              <a:effectRef idx="0">
+                <a:schemeClr val="accent1"/>
+              </a:effectRef>
+              <a:fontRef idx="minor">
+                <a:schemeClr val="lt1"/>
+              </a:fontRef>
+            </p:style>
+            <p:txBody>
+              <a:bodyPr rtlCol="0" anchor="ctr"/>
+              <a:lstStyle/>
+              <a:p>
+                <a:pPr algn="ctr"/>
+                <a:endParaRPr kumimoji="1" lang="ja-JP" altLang="en-US"/>
+              </a:p>
+            </p:txBody>
+          </p:sp>
+          <p:grpSp>
+            <p:nvGrpSpPr>
+              <p:cNvPr id="11" name="グループ化 10"/>
+              <p:cNvGrpSpPr/>
+              <p:nvPr/>
+            </p:nvGrpSpPr>
+            <p:grpSpPr>
+              <a:xfrm>
+                <a:off x="7183059" y="2102322"/>
+                <a:ext cx="2429944" cy="615629"/>
+                <a:chOff x="7273486" y="2102323"/>
+                <a:chExt cx="2429944" cy="615629"/>
+              </a:xfrm>
+            </p:grpSpPr>
+            <p:sp>
+              <p:nvSpPr>
+                <p:cNvPr id="12" name="テキスト ボックス 11"/>
+                <p:cNvSpPr txBox="1"/>
+                <p:nvPr/>
+              </p:nvSpPr>
+              <p:spPr>
+                <a:xfrm>
+                  <a:off x="8384415" y="2225471"/>
+                  <a:ext cx="1319015" cy="369332"/>
+                </a:xfrm>
+                <a:prstGeom prst="rect">
+                  <a:avLst/>
+                </a:prstGeom>
+                <a:noFill/>
+              </p:spPr>
+              <p:txBody>
+                <a:bodyPr wrap="none" rtlCol="0">
+                  <a:spAutoFit/>
+                </a:bodyPr>
+                <a:lstStyle/>
+                <a:p>
+                  <a:r>
+                    <a:rPr lang="en-US" altLang="ja-JP" dirty="0"/>
+                    <a:t>Clean Install</a:t>
+                  </a:r>
+                  <a:endParaRPr lang="ja-JP" altLang="en-US" dirty="0"/>
+                </a:p>
+              </p:txBody>
+            </p:sp>
+            <p:pic>
+              <p:nvPicPr>
+                <p:cNvPr id="13" name="図 12"/>
+                <p:cNvPicPr>
+                  <a:picLocks noChangeAspect="1"/>
+                </p:cNvPicPr>
+                <p:nvPr/>
+              </p:nvPicPr>
+              <p:blipFill>
+                <a:blip r:embed="rId4"/>
+                <a:stretch>
+                  <a:fillRect/>
+                </a:stretch>
+              </p:blipFill>
+              <p:spPr>
+                <a:xfrm>
+                  <a:off x="7273486" y="2102323"/>
+                  <a:ext cx="615629" cy="615629"/>
+                </a:xfrm>
+                <a:prstGeom prst="rect">
+                  <a:avLst/>
+                </a:prstGeom>
+              </p:spPr>
+            </p:pic>
+          </p:grpSp>
+        </p:grpSp>
+      </p:grpSp>
+      <p:sp>
+        <p:nvSpPr>
+          <p:cNvPr id="51" name="下矢印 50"/>
+          <p:cNvSpPr/>
+          <p:nvPr/>
+        </p:nvSpPr>
+        <p:spPr>
+          <a:xfrm>
+            <a:off x="2687697" y="4018179"/>
+            <a:ext cx="1165575" cy="630766"/>
+          </a:xfrm>
+          <a:prstGeom prst="downArrow">
+            <a:avLst/>
+          </a:prstGeom>
+          <a:solidFill>
+            <a:schemeClr val="accent1">
+              <a:alpha val="69000"/>
+            </a:schemeClr>
+          </a:solidFill>
+          <a:ln w="38100"/>
+        </p:spPr>
+        <p:style>
+          <a:lnRef idx="2">
+            <a:schemeClr val="accent1">
+              <a:shade val="50000"/>
+            </a:schemeClr>
+          </a:lnRef>
+          <a:fillRef idx="1">
+            <a:schemeClr val="accent1"/>
+          </a:fillRef>
+          <a:effectRef idx="0">
+            <a:schemeClr val="accent1"/>
+          </a:effectRef>
+          <a:fontRef idx="minor">
+            <a:schemeClr val="lt1"/>
+          </a:fontRef>
+        </p:style>
+        <p:txBody>
+          <a:bodyPr rtlCol="0" anchor="ctr"/>
+          <a:lstStyle/>
+          <a:p>
+            <a:pPr algn="ctr"/>
+            <a:endParaRPr kumimoji="1" lang="ja-JP" altLang="en-US"/>
+          </a:p>
+        </p:txBody>
+      </p:sp>
+      <p:grpSp>
+        <p:nvGrpSpPr>
+          <p:cNvPr id="15" name="グループ化 14"/>
+          <p:cNvGrpSpPr/>
+          <p:nvPr/>
+        </p:nvGrpSpPr>
+        <p:grpSpPr>
+          <a:xfrm>
+            <a:off x="1138446" y="2817267"/>
+            <a:ext cx="3947441" cy="1200912"/>
+            <a:chOff x="3253232" y="615445"/>
+            <a:chExt cx="3947441" cy="1200912"/>
+          </a:xfrm>
+        </p:grpSpPr>
+        <p:sp>
+          <p:nvSpPr>
+            <p:cNvPr id="16" name="テキスト ボックス 15"/>
+            <p:cNvSpPr txBox="1"/>
+            <p:nvPr/>
+          </p:nvSpPr>
+          <p:spPr>
+            <a:xfrm>
+              <a:off x="3253232" y="615445"/>
+              <a:ext cx="776879" cy="369332"/>
+            </a:xfrm>
+            <a:prstGeom prst="rect">
+              <a:avLst/>
+            </a:prstGeom>
+            <a:noFill/>
+          </p:spPr>
+          <p:txBody>
+            <a:bodyPr wrap="none" rtlCol="0">
+              <a:spAutoFit/>
+            </a:bodyPr>
+            <a:lstStyle/>
+            <a:p>
+              <a:r>
+                <a:rPr lang="en-US" altLang="ja-JP" dirty="0" smtClean="0"/>
+                <a:t>Step.2</a:t>
+              </a:r>
+              <a:endParaRPr kumimoji="1" lang="ja-JP" altLang="en-US" dirty="0"/>
+            </a:p>
+          </p:txBody>
+        </p:sp>
+        <p:grpSp>
+          <p:nvGrpSpPr>
+            <p:cNvPr id="17" name="グループ化 16"/>
+            <p:cNvGrpSpPr/>
+            <p:nvPr/>
+          </p:nvGrpSpPr>
+          <p:grpSpPr>
+            <a:xfrm>
+              <a:off x="3469946" y="1045403"/>
+              <a:ext cx="3730727" cy="770954"/>
+              <a:chOff x="6930708" y="2024660"/>
+              <a:chExt cx="3730727" cy="770954"/>
+            </a:xfrm>
+          </p:grpSpPr>
+          <p:sp>
+            <p:nvSpPr>
+              <p:cNvPr id="18" name="角丸四角形 17"/>
+              <p:cNvSpPr/>
+              <p:nvPr/>
+            </p:nvSpPr>
+            <p:spPr>
+              <a:xfrm>
+                <a:off x="6930708" y="2024660"/>
+                <a:ext cx="3730727" cy="770954"/>
+              </a:xfrm>
+              <a:prstGeom prst="roundRect">
+                <a:avLst/>
+              </a:prstGeom>
+              <a:noFill/>
+              <a:ln w="38100">
+                <a:solidFill>
+                  <a:schemeClr val="tx1"/>
+                </a:solidFill>
+              </a:ln>
+            </p:spPr>
+            <p:style>
+              <a:lnRef idx="2">
+                <a:schemeClr val="accent1">
+                  <a:shade val="50000"/>
+                </a:schemeClr>
+              </a:lnRef>
+              <a:fillRef idx="1">
+                <a:schemeClr val="accent1"/>
+              </a:fillRef>
+              <a:effectRef idx="0">
+                <a:schemeClr val="accent1"/>
+              </a:effectRef>
+              <a:fontRef idx="minor">
+                <a:schemeClr val="lt1"/>
+              </a:fontRef>
+            </p:style>
+            <p:txBody>
+              <a:bodyPr rtlCol="0" anchor="ctr"/>
+              <a:lstStyle/>
+              <a:p>
+                <a:pPr algn="ctr"/>
+                <a:endParaRPr kumimoji="1" lang="ja-JP" altLang="en-US"/>
+              </a:p>
+            </p:txBody>
+          </p:sp>
+          <p:grpSp>
+            <p:nvGrpSpPr>
+              <p:cNvPr id="19" name="グループ化 18"/>
+              <p:cNvGrpSpPr/>
+              <p:nvPr/>
+            </p:nvGrpSpPr>
+            <p:grpSpPr>
+              <a:xfrm>
+                <a:off x="7183059" y="2102322"/>
+                <a:ext cx="2276504" cy="615629"/>
+                <a:chOff x="7273486" y="2102323"/>
+                <a:chExt cx="2276504" cy="615629"/>
+              </a:xfrm>
+            </p:grpSpPr>
+            <p:sp>
+              <p:nvSpPr>
+                <p:cNvPr id="20" name="テキスト ボックス 19"/>
+                <p:cNvSpPr txBox="1"/>
+                <p:nvPr/>
+              </p:nvSpPr>
+              <p:spPr>
+                <a:xfrm>
+                  <a:off x="8384415" y="2225471"/>
+                  <a:ext cx="1165575" cy="369332"/>
+                </a:xfrm>
+                <a:prstGeom prst="rect">
+                  <a:avLst/>
+                </a:prstGeom>
+                <a:noFill/>
+              </p:spPr>
+              <p:txBody>
+                <a:bodyPr wrap="none" rtlCol="0">
+                  <a:spAutoFit/>
+                </a:bodyPr>
+                <a:lstStyle/>
+                <a:p>
+                  <a:r>
+                    <a:rPr lang="en-US" altLang="ja-JP" dirty="0" err="1" smtClean="0"/>
+                    <a:t>ESXi</a:t>
+                  </a:r>
+                  <a:r>
+                    <a:rPr lang="en-US" altLang="ja-JP" dirty="0" smtClean="0"/>
+                    <a:t> Setup</a:t>
+                  </a:r>
+                  <a:endParaRPr lang="ja-JP" altLang="en-US" dirty="0"/>
+                </a:p>
+              </p:txBody>
+            </p:sp>
+            <p:pic>
+              <p:nvPicPr>
+                <p:cNvPr id="21" name="図 20"/>
+                <p:cNvPicPr>
+                  <a:picLocks noChangeAspect="1"/>
+                </p:cNvPicPr>
+                <p:nvPr/>
+              </p:nvPicPr>
+              <p:blipFill>
+                <a:blip r:embed="rId4"/>
+                <a:stretch>
+                  <a:fillRect/>
+                </a:stretch>
+              </p:blipFill>
+              <p:spPr>
+                <a:xfrm>
+                  <a:off x="7273486" y="2102323"/>
+                  <a:ext cx="615629" cy="615629"/>
+                </a:xfrm>
+                <a:prstGeom prst="rect">
+                  <a:avLst/>
+                </a:prstGeom>
+              </p:spPr>
+            </p:pic>
+          </p:grpSp>
+        </p:grpSp>
+      </p:grpSp>
+      <p:sp>
+        <p:nvSpPr>
+          <p:cNvPr id="52" name="下矢印 51"/>
+          <p:cNvSpPr/>
+          <p:nvPr/>
+        </p:nvSpPr>
+        <p:spPr>
+          <a:xfrm>
+            <a:off x="9007911" y="2612788"/>
+            <a:ext cx="1165575" cy="634435"/>
+          </a:xfrm>
+          <a:prstGeom prst="downArrow">
+            <a:avLst/>
+          </a:prstGeom>
+          <a:solidFill>
+            <a:schemeClr val="accent1">
+              <a:alpha val="69000"/>
+            </a:schemeClr>
+          </a:solidFill>
+          <a:ln w="38100"/>
+        </p:spPr>
+        <p:style>
+          <a:lnRef idx="2">
+            <a:schemeClr val="accent1">
+              <a:shade val="50000"/>
+            </a:schemeClr>
+          </a:lnRef>
+          <a:fillRef idx="1">
+            <a:schemeClr val="accent1"/>
+          </a:fillRef>
+          <a:effectRef idx="0">
+            <a:schemeClr val="accent1"/>
+          </a:effectRef>
+          <a:fontRef idx="minor">
+            <a:schemeClr val="lt1"/>
+          </a:fontRef>
+        </p:style>
+        <p:txBody>
+          <a:bodyPr rtlCol="0" anchor="ctr"/>
+          <a:lstStyle/>
+          <a:p>
+            <a:pPr algn="ctr"/>
+            <a:endParaRPr kumimoji="1" lang="ja-JP" altLang="en-US"/>
+          </a:p>
+        </p:txBody>
+      </p:sp>
+      <p:grpSp>
+        <p:nvGrpSpPr>
+          <p:cNvPr id="29" name="グループ化 28"/>
+          <p:cNvGrpSpPr/>
+          <p:nvPr/>
+        </p:nvGrpSpPr>
+        <p:grpSpPr>
+          <a:xfrm>
+            <a:off x="7374146" y="1415545"/>
+            <a:ext cx="3947441" cy="1200912"/>
+            <a:chOff x="3253232" y="615445"/>
+            <a:chExt cx="3947441" cy="1200912"/>
+          </a:xfrm>
+        </p:grpSpPr>
+        <p:sp>
+          <p:nvSpPr>
+            <p:cNvPr id="30" name="テキスト ボックス 29"/>
+            <p:cNvSpPr txBox="1"/>
+            <p:nvPr/>
+          </p:nvSpPr>
+          <p:spPr>
+            <a:xfrm>
+              <a:off x="3253232" y="615445"/>
+              <a:ext cx="776879" cy="369332"/>
+            </a:xfrm>
+            <a:prstGeom prst="rect">
+              <a:avLst/>
+            </a:prstGeom>
+            <a:noFill/>
+          </p:spPr>
+          <p:txBody>
+            <a:bodyPr wrap="none" rtlCol="0">
+              <a:spAutoFit/>
+            </a:bodyPr>
+            <a:lstStyle/>
+            <a:p>
+              <a:r>
+                <a:rPr lang="en-US" altLang="ja-JP" dirty="0" smtClean="0"/>
+                <a:t>Step.4</a:t>
+              </a:r>
+              <a:endParaRPr kumimoji="1" lang="ja-JP" altLang="en-US" dirty="0"/>
+            </a:p>
+          </p:txBody>
+        </p:sp>
+        <p:grpSp>
+          <p:nvGrpSpPr>
+            <p:cNvPr id="31" name="グループ化 30"/>
+            <p:cNvGrpSpPr/>
+            <p:nvPr/>
+          </p:nvGrpSpPr>
+          <p:grpSpPr>
+            <a:xfrm>
+              <a:off x="3469946" y="1045403"/>
+              <a:ext cx="3730727" cy="770954"/>
+              <a:chOff x="6930708" y="2024660"/>
+              <a:chExt cx="3730727" cy="770954"/>
+            </a:xfrm>
+          </p:grpSpPr>
+          <p:grpSp>
+            <p:nvGrpSpPr>
+              <p:cNvPr id="33" name="グループ化 32"/>
+              <p:cNvGrpSpPr/>
+              <p:nvPr/>
+            </p:nvGrpSpPr>
+            <p:grpSpPr>
+              <a:xfrm>
+                <a:off x="7183059" y="2102322"/>
+                <a:ext cx="2615891" cy="615629"/>
+                <a:chOff x="7273486" y="2102323"/>
+                <a:chExt cx="2615891" cy="615629"/>
+              </a:xfrm>
+            </p:grpSpPr>
+            <p:sp>
+              <p:nvSpPr>
+                <p:cNvPr id="34" name="テキスト ボックス 33"/>
+                <p:cNvSpPr txBox="1"/>
+                <p:nvPr/>
+              </p:nvSpPr>
+              <p:spPr>
+                <a:xfrm>
+                  <a:off x="8150311" y="2225471"/>
+                  <a:ext cx="1739066" cy="369332"/>
+                </a:xfrm>
+                <a:prstGeom prst="rect">
+                  <a:avLst/>
+                </a:prstGeom>
+                <a:noFill/>
+              </p:spPr>
+              <p:txBody>
+                <a:bodyPr wrap="none" rtlCol="0">
+                  <a:spAutoFit/>
+                </a:bodyPr>
+                <a:lstStyle/>
+                <a:p>
+                  <a:r>
+                    <a:rPr lang="en-US" altLang="ja-JP" dirty="0" smtClean="0"/>
+                    <a:t>Validation Check</a:t>
+                  </a:r>
+                  <a:endParaRPr lang="ja-JP" altLang="en-US" dirty="0"/>
+                </a:p>
+              </p:txBody>
+            </p:sp>
+            <p:pic>
+              <p:nvPicPr>
+                <p:cNvPr id="35" name="図 34"/>
+                <p:cNvPicPr>
+                  <a:picLocks noChangeAspect="1"/>
+                </p:cNvPicPr>
+                <p:nvPr/>
+              </p:nvPicPr>
+              <p:blipFill>
+                <a:blip r:embed="rId4"/>
+                <a:stretch>
+                  <a:fillRect/>
+                </a:stretch>
+              </p:blipFill>
+              <p:spPr>
+                <a:xfrm>
+                  <a:off x="7273486" y="2102323"/>
+                  <a:ext cx="615629" cy="615629"/>
+                </a:xfrm>
+                <a:prstGeom prst="rect">
+                  <a:avLst/>
+                </a:prstGeom>
+              </p:spPr>
+            </p:pic>
+          </p:grpSp>
+          <p:sp>
+            <p:nvSpPr>
+              <p:cNvPr id="32" name="角丸四角形 31"/>
+              <p:cNvSpPr/>
+              <p:nvPr/>
+            </p:nvSpPr>
+            <p:spPr>
+              <a:xfrm>
+                <a:off x="6930708" y="2024660"/>
+                <a:ext cx="3730727" cy="770954"/>
+              </a:xfrm>
+              <a:prstGeom prst="roundRect">
+                <a:avLst/>
+              </a:prstGeom>
+              <a:noFill/>
+              <a:ln w="38100">
+                <a:solidFill>
+                  <a:schemeClr val="tx1"/>
+                </a:solidFill>
+              </a:ln>
+            </p:spPr>
+            <p:style>
+              <a:lnRef idx="2">
+                <a:schemeClr val="accent1">
+                  <a:shade val="50000"/>
+                </a:schemeClr>
+              </a:lnRef>
+              <a:fillRef idx="1">
+                <a:schemeClr val="accent1"/>
+              </a:fillRef>
+              <a:effectRef idx="0">
+                <a:schemeClr val="accent1"/>
+              </a:effectRef>
+              <a:fontRef idx="minor">
+                <a:schemeClr val="lt1"/>
+              </a:fontRef>
+            </p:style>
+            <p:txBody>
+              <a:bodyPr rtlCol="0" anchor="ctr"/>
+              <a:lstStyle/>
+              <a:p>
+                <a:pPr algn="ctr"/>
+                <a:endParaRPr kumimoji="1" lang="ja-JP" altLang="en-US"/>
+              </a:p>
+            </p:txBody>
+          </p:sp>
+        </p:grpSp>
+      </p:grpSp>
+      <p:sp>
+        <p:nvSpPr>
+          <p:cNvPr id="56" name="下矢印 55"/>
+          <p:cNvSpPr/>
+          <p:nvPr/>
+        </p:nvSpPr>
+        <p:spPr>
+          <a:xfrm>
+            <a:off x="2687696" y="5419899"/>
+            <a:ext cx="1165575" cy="630766"/>
+          </a:xfrm>
+          <a:prstGeom prst="downArrow">
+            <a:avLst/>
+          </a:prstGeom>
+          <a:solidFill>
+            <a:schemeClr val="accent1">
+              <a:alpha val="69000"/>
+            </a:schemeClr>
+          </a:solidFill>
+          <a:ln w="38100"/>
+        </p:spPr>
+        <p:style>
+          <a:lnRef idx="2">
+            <a:schemeClr val="accent1">
+              <a:shade val="50000"/>
+            </a:schemeClr>
+          </a:lnRef>
+          <a:fillRef idx="1">
+            <a:schemeClr val="accent1"/>
+          </a:fillRef>
+          <a:effectRef idx="0">
+            <a:schemeClr val="accent1"/>
+          </a:effectRef>
+          <a:fontRef idx="minor">
+            <a:schemeClr val="lt1"/>
+          </a:fontRef>
+        </p:style>
+        <p:txBody>
+          <a:bodyPr rtlCol="0" anchor="ctr"/>
+          <a:lstStyle/>
+          <a:p>
+            <a:pPr algn="ctr"/>
+            <a:endParaRPr kumimoji="1" lang="ja-JP" altLang="en-US"/>
+          </a:p>
+        </p:txBody>
+      </p:sp>
+      <p:grpSp>
+        <p:nvGrpSpPr>
+          <p:cNvPr id="22" name="グループ化 21"/>
+          <p:cNvGrpSpPr/>
+          <p:nvPr/>
+        </p:nvGrpSpPr>
+        <p:grpSpPr>
+          <a:xfrm>
+            <a:off x="1138446" y="4218989"/>
+            <a:ext cx="3947441" cy="1200912"/>
+            <a:chOff x="3253232" y="615445"/>
+            <a:chExt cx="3947441" cy="1200912"/>
+          </a:xfrm>
+        </p:grpSpPr>
+        <p:sp>
+          <p:nvSpPr>
+            <p:cNvPr id="23" name="テキスト ボックス 22"/>
+            <p:cNvSpPr txBox="1"/>
+            <p:nvPr/>
+          </p:nvSpPr>
+          <p:spPr>
+            <a:xfrm>
+              <a:off x="3253232" y="615445"/>
+              <a:ext cx="776879" cy="369332"/>
+            </a:xfrm>
+            <a:prstGeom prst="rect">
+              <a:avLst/>
+            </a:prstGeom>
+            <a:noFill/>
+          </p:spPr>
+          <p:txBody>
+            <a:bodyPr wrap="none" rtlCol="0">
+              <a:spAutoFit/>
+            </a:bodyPr>
+            <a:lstStyle/>
+            <a:p>
+              <a:r>
+                <a:rPr lang="en-US" altLang="ja-JP" dirty="0" smtClean="0"/>
+                <a:t>Step.3</a:t>
+              </a:r>
+              <a:endParaRPr kumimoji="1" lang="ja-JP" altLang="en-US" dirty="0"/>
+            </a:p>
+          </p:txBody>
+        </p:sp>
+        <p:grpSp>
+          <p:nvGrpSpPr>
+            <p:cNvPr id="24" name="グループ化 23"/>
+            <p:cNvGrpSpPr/>
+            <p:nvPr/>
+          </p:nvGrpSpPr>
+          <p:grpSpPr>
+            <a:xfrm>
+              <a:off x="3469946" y="1045403"/>
+              <a:ext cx="3730727" cy="770954"/>
+              <a:chOff x="6930708" y="2024660"/>
+              <a:chExt cx="3730727" cy="770954"/>
+            </a:xfrm>
+          </p:grpSpPr>
+          <p:grpSp>
+            <p:nvGrpSpPr>
+              <p:cNvPr id="26" name="グループ化 25"/>
+              <p:cNvGrpSpPr/>
+              <p:nvPr/>
+            </p:nvGrpSpPr>
+            <p:grpSpPr>
+              <a:xfrm>
+                <a:off x="7183059" y="2102322"/>
+                <a:ext cx="2664046" cy="615629"/>
+                <a:chOff x="7273486" y="2102323"/>
+                <a:chExt cx="2664046" cy="615629"/>
+              </a:xfrm>
+            </p:grpSpPr>
+            <p:sp>
+              <p:nvSpPr>
+                <p:cNvPr id="27" name="テキスト ボックス 26"/>
+                <p:cNvSpPr txBox="1"/>
+                <p:nvPr/>
+              </p:nvSpPr>
+              <p:spPr>
+                <a:xfrm>
+                  <a:off x="8150311" y="2225471"/>
+                  <a:ext cx="1787221" cy="369332"/>
+                </a:xfrm>
+                <a:prstGeom prst="rect">
+                  <a:avLst/>
+                </a:prstGeom>
+                <a:noFill/>
+              </p:spPr>
+              <p:txBody>
+                <a:bodyPr wrap="none" rtlCol="0">
+                  <a:spAutoFit/>
+                </a:bodyPr>
+                <a:lstStyle/>
+                <a:p>
+                  <a:r>
+                    <a:rPr lang="en-US" altLang="ja-JP" dirty="0" err="1" smtClean="0"/>
+                    <a:t>Datastore</a:t>
+                  </a:r>
+                  <a:r>
+                    <a:rPr lang="en-US" altLang="ja-JP" dirty="0" smtClean="0"/>
+                    <a:t> Mount</a:t>
+                  </a:r>
+                  <a:endParaRPr lang="ja-JP" altLang="en-US" dirty="0"/>
+                </a:p>
+              </p:txBody>
+            </p:sp>
+            <p:pic>
+              <p:nvPicPr>
+                <p:cNvPr id="28" name="図 27"/>
+                <p:cNvPicPr>
+                  <a:picLocks noChangeAspect="1"/>
+                </p:cNvPicPr>
+                <p:nvPr/>
+              </p:nvPicPr>
+              <p:blipFill>
+                <a:blip r:embed="rId4"/>
+                <a:stretch>
+                  <a:fillRect/>
+                </a:stretch>
+              </p:blipFill>
+              <p:spPr>
+                <a:xfrm>
+                  <a:off x="7273486" y="2102323"/>
+                  <a:ext cx="615629" cy="615629"/>
+                </a:xfrm>
+                <a:prstGeom prst="rect">
+                  <a:avLst/>
+                </a:prstGeom>
+              </p:spPr>
+            </p:pic>
+          </p:grpSp>
+          <p:sp>
+            <p:nvSpPr>
+              <p:cNvPr id="25" name="角丸四角形 24"/>
+              <p:cNvSpPr/>
+              <p:nvPr/>
+            </p:nvSpPr>
+            <p:spPr>
+              <a:xfrm>
+                <a:off x="6930708" y="2024660"/>
+                <a:ext cx="3730727" cy="770954"/>
+              </a:xfrm>
+              <a:prstGeom prst="roundRect">
+                <a:avLst/>
+              </a:prstGeom>
+              <a:noFill/>
+              <a:ln w="38100">
+                <a:solidFill>
+                  <a:schemeClr val="tx1"/>
+                </a:solidFill>
+              </a:ln>
+            </p:spPr>
+            <p:style>
+              <a:lnRef idx="2">
+                <a:schemeClr val="accent1">
+                  <a:shade val="50000"/>
+                </a:schemeClr>
+              </a:lnRef>
+              <a:fillRef idx="1">
+                <a:schemeClr val="accent1"/>
+              </a:fillRef>
+              <a:effectRef idx="0">
+                <a:schemeClr val="accent1"/>
+              </a:effectRef>
+              <a:fontRef idx="minor">
+                <a:schemeClr val="lt1"/>
+              </a:fontRef>
+            </p:style>
+            <p:txBody>
+              <a:bodyPr rtlCol="0" anchor="ctr"/>
+              <a:lstStyle/>
+              <a:p>
+                <a:pPr algn="ctr"/>
+                <a:endParaRPr kumimoji="1" lang="ja-JP" altLang="en-US"/>
+              </a:p>
+            </p:txBody>
+          </p:sp>
+        </p:grpSp>
+      </p:grpSp>
+    </p:spTree>
+    <p:extLst>
+      <p:ext uri="{BB962C8B-B14F-4D97-AF65-F5344CB8AC3E}">
+        <p14:creationId xmlns:p14="http://schemas.microsoft.com/office/powerpoint/2010/main" val="2387010641"/>
+      </p:ext>
+    </p:extLst>
+  </p:cSld>
+  <p:clrMapOvr>
+    <a:masterClrMapping/>
+  </p:clrMapOvr>
+</p:sld>
+</file>
+
 <file path=ppt/theme/theme1.xml><?xml version="1.0" encoding="utf-8"?>
 <a:theme xmlns:a="http://schemas.openxmlformats.org/drawingml/2006/main" name="Office テーマ">
   <a:themeElements>

--- a/ポートフォリオ資料.pptx
+++ b/ポートフォリオ資料.pptx
@@ -9,6 +9,8 @@
     <p:sldId id="257" r:id="rId3"/>
     <p:sldId id="258" r:id="rId4"/>
     <p:sldId id="259" r:id="rId5"/>
+    <p:sldId id="260" r:id="rId6"/>
+    <p:sldId id="261" r:id="rId7"/>
   </p:sldIdLst>
   <p:sldSz cx="12192000" cy="6858000"/>
   <p:notesSz cx="6858000" cy="9144000"/>
@@ -246,7 +248,7 @@
           <a:p>
             <a:fld id="{4DF2905F-A56B-40B5-936F-879508965375}" type="datetimeFigureOut">
               <a:rPr kumimoji="1" lang="ja-JP" altLang="en-US" smtClean="0"/>
-              <a:t>2026/3/10</a:t>
+              <a:t>2026/3/11</a:t>
             </a:fld>
             <a:endParaRPr kumimoji="1" lang="ja-JP" altLang="en-US"/>
           </a:p>
@@ -448,7 +450,7 @@
           <a:p>
             <a:fld id="{4DF2905F-A56B-40B5-936F-879508965375}" type="datetimeFigureOut">
               <a:rPr kumimoji="1" lang="ja-JP" altLang="en-US" smtClean="0"/>
-              <a:t>2026/3/10</a:t>
+              <a:t>2026/3/11</a:t>
             </a:fld>
             <a:endParaRPr kumimoji="1" lang="ja-JP" altLang="en-US"/>
           </a:p>
@@ -660,7 +662,7 @@
           <a:p>
             <a:fld id="{4DF2905F-A56B-40B5-936F-879508965375}" type="datetimeFigureOut">
               <a:rPr kumimoji="1" lang="ja-JP" altLang="en-US" smtClean="0"/>
-              <a:t>2026/3/10</a:t>
+              <a:t>2026/3/11</a:t>
             </a:fld>
             <a:endParaRPr kumimoji="1" lang="ja-JP" altLang="en-US"/>
           </a:p>
@@ -862,7 +864,7 @@
           <a:p>
             <a:fld id="{4DF2905F-A56B-40B5-936F-879508965375}" type="datetimeFigureOut">
               <a:rPr kumimoji="1" lang="ja-JP" altLang="en-US" smtClean="0"/>
-              <a:t>2026/3/10</a:t>
+              <a:t>2026/3/11</a:t>
             </a:fld>
             <a:endParaRPr kumimoji="1" lang="ja-JP" altLang="en-US"/>
           </a:p>
@@ -1108,7 +1110,7 @@
           <a:p>
             <a:fld id="{4DF2905F-A56B-40B5-936F-879508965375}" type="datetimeFigureOut">
               <a:rPr kumimoji="1" lang="ja-JP" altLang="en-US" smtClean="0"/>
-              <a:t>2026/3/10</a:t>
+              <a:t>2026/3/11</a:t>
             </a:fld>
             <a:endParaRPr kumimoji="1" lang="ja-JP" altLang="en-US"/>
           </a:p>
@@ -1404,7 +1406,7 @@
           <a:p>
             <a:fld id="{4DF2905F-A56B-40B5-936F-879508965375}" type="datetimeFigureOut">
               <a:rPr kumimoji="1" lang="ja-JP" altLang="en-US" smtClean="0"/>
-              <a:t>2026/3/10</a:t>
+              <a:t>2026/3/11</a:t>
             </a:fld>
             <a:endParaRPr kumimoji="1" lang="ja-JP" altLang="en-US"/>
           </a:p>
@@ -1835,7 +1837,7 @@
           <a:p>
             <a:fld id="{4DF2905F-A56B-40B5-936F-879508965375}" type="datetimeFigureOut">
               <a:rPr kumimoji="1" lang="ja-JP" altLang="en-US" smtClean="0"/>
-              <a:t>2026/3/10</a:t>
+              <a:t>2026/3/11</a:t>
             </a:fld>
             <a:endParaRPr kumimoji="1" lang="ja-JP" altLang="en-US"/>
           </a:p>
@@ -1953,7 +1955,7 @@
           <a:p>
             <a:fld id="{4DF2905F-A56B-40B5-936F-879508965375}" type="datetimeFigureOut">
               <a:rPr kumimoji="1" lang="ja-JP" altLang="en-US" smtClean="0"/>
-              <a:t>2026/3/10</a:t>
+              <a:t>2026/3/11</a:t>
             </a:fld>
             <a:endParaRPr kumimoji="1" lang="ja-JP" altLang="en-US"/>
           </a:p>
@@ -2048,7 +2050,7 @@
           <a:p>
             <a:fld id="{4DF2905F-A56B-40B5-936F-879508965375}" type="datetimeFigureOut">
               <a:rPr kumimoji="1" lang="ja-JP" altLang="en-US" smtClean="0"/>
-              <a:t>2026/3/10</a:t>
+              <a:t>2026/3/11</a:t>
             </a:fld>
             <a:endParaRPr kumimoji="1" lang="ja-JP" altLang="en-US"/>
           </a:p>
@@ -2357,7 +2359,7 @@
           <a:p>
             <a:fld id="{4DF2905F-A56B-40B5-936F-879508965375}" type="datetimeFigureOut">
               <a:rPr kumimoji="1" lang="ja-JP" altLang="en-US" smtClean="0"/>
-              <a:t>2026/3/10</a:t>
+              <a:t>2026/3/11</a:t>
             </a:fld>
             <a:endParaRPr kumimoji="1" lang="ja-JP" altLang="en-US"/>
           </a:p>
@@ -2610,7 +2612,7 @@
           <a:p>
             <a:fld id="{4DF2905F-A56B-40B5-936F-879508965375}" type="datetimeFigureOut">
               <a:rPr kumimoji="1" lang="ja-JP" altLang="en-US" smtClean="0"/>
-              <a:t>2026/3/10</a:t>
+              <a:t>2026/3/11</a:t>
             </a:fld>
             <a:endParaRPr kumimoji="1" lang="ja-JP" altLang="en-US"/>
           </a:p>
@@ -2855,7 +2857,7 @@
           <a:p>
             <a:fld id="{4DF2905F-A56B-40B5-936F-879508965375}" type="datetimeFigureOut">
               <a:rPr kumimoji="1" lang="ja-JP" altLang="en-US" smtClean="0"/>
-              <a:t>2026/3/10</a:t>
+              <a:t>2026/3/11</a:t>
             </a:fld>
             <a:endParaRPr kumimoji="1" lang="ja-JP" altLang="en-US"/>
           </a:p>
@@ -4432,1010 +4434,149 @@
       </p:sp>
       <p:grpSp>
         <p:nvGrpSpPr>
-          <p:cNvPr id="112" name="グループ化 111"/>
-          <p:cNvGrpSpPr/>
+          <p:cNvPr id="59" name="グループ化 58"/>
+          <p:cNvGrpSpPr>
+            <a:grpSpLocks noChangeAspect="1"/>
+          </p:cNvGrpSpPr>
           <p:nvPr/>
         </p:nvGrpSpPr>
         <p:grpSpPr>
           <a:xfrm>
-            <a:off x="-3156765" y="-433562"/>
-            <a:ext cx="7745423" cy="7291562"/>
-            <a:chOff x="-3156765" y="-433562"/>
-            <a:chExt cx="7745423" cy="7291562"/>
+            <a:off x="21580" y="-433562"/>
+            <a:ext cx="4567078" cy="2371416"/>
+            <a:chOff x="4043522" y="-101911"/>
+            <a:chExt cx="6286500" cy="3264211"/>
           </a:xfrm>
         </p:grpSpPr>
+        <p:sp>
+          <p:nvSpPr>
+            <p:cNvPr id="88" name="角丸四角形 87"/>
+            <p:cNvSpPr/>
+            <p:nvPr/>
+          </p:nvSpPr>
+          <p:spPr>
+            <a:xfrm>
+              <a:off x="4043522" y="446075"/>
+              <a:ext cx="6286500" cy="2716225"/>
+            </a:xfrm>
+            <a:prstGeom prst="roundRect">
+              <a:avLst/>
+            </a:prstGeom>
+            <a:solidFill>
+              <a:schemeClr val="bg1">
+                <a:lumMod val="95000"/>
+                <a:alpha val="37000"/>
+              </a:schemeClr>
+            </a:solidFill>
+            <a:ln w="38100">
+              <a:solidFill>
+                <a:schemeClr val="tx1"/>
+              </a:solidFill>
+            </a:ln>
+          </p:spPr>
+          <p:style>
+            <a:lnRef idx="2">
+              <a:schemeClr val="accent1">
+                <a:shade val="50000"/>
+              </a:schemeClr>
+            </a:lnRef>
+            <a:fillRef idx="1">
+              <a:schemeClr val="accent1"/>
+            </a:fillRef>
+            <a:effectRef idx="0">
+              <a:schemeClr val="accent1"/>
+            </a:effectRef>
+            <a:fontRef idx="minor">
+              <a:schemeClr val="lt1"/>
+            </a:fontRef>
+          </p:style>
+          <p:txBody>
+            <a:bodyPr rtlCol="0" anchor="ctr"/>
+            <a:lstStyle/>
+            <a:p>
+              <a:pPr algn="ctr"/>
+              <a:endParaRPr kumimoji="1" lang="ja-JP" altLang="en-US"/>
+            </a:p>
+          </p:txBody>
+        </p:sp>
+        <p:sp>
+          <p:nvSpPr>
+            <p:cNvPr id="89" name="テキスト ボックス 88"/>
+            <p:cNvSpPr txBox="1"/>
+            <p:nvPr/>
+          </p:nvSpPr>
+          <p:spPr>
+            <a:xfrm>
+              <a:off x="6508387" y="-101911"/>
+              <a:ext cx="1356769" cy="508379"/>
+            </a:xfrm>
+            <a:prstGeom prst="rect">
+              <a:avLst/>
+            </a:prstGeom>
+            <a:noFill/>
+          </p:spPr>
+          <p:txBody>
+            <a:bodyPr wrap="square" rtlCol="0">
+              <a:spAutoFit/>
+            </a:bodyPr>
+            <a:lstStyle/>
+            <a:p>
+              <a:r>
+                <a:rPr lang="en-US" altLang="ja-JP" dirty="0" smtClean="0"/>
+                <a:t>Prod.1</a:t>
+              </a:r>
+              <a:endParaRPr kumimoji="1" lang="ja-JP" altLang="en-US" dirty="0"/>
+            </a:p>
+          </p:txBody>
+        </p:sp>
         <p:grpSp>
           <p:nvGrpSpPr>
-            <p:cNvPr id="59" name="グループ化 58"/>
-            <p:cNvGrpSpPr>
-              <a:grpSpLocks noChangeAspect="1"/>
-            </p:cNvGrpSpPr>
+            <p:cNvPr id="90" name="グループ化 89"/>
+            <p:cNvGrpSpPr/>
             <p:nvPr/>
           </p:nvGrpSpPr>
           <p:grpSpPr>
             <a:xfrm>
-              <a:off x="21580" y="-433562"/>
-              <a:ext cx="4567078" cy="2371416"/>
-              <a:chOff x="4043522" y="-101911"/>
-              <a:chExt cx="6286500" cy="3264211"/>
+              <a:off x="6471141" y="463701"/>
+              <a:ext cx="1293454" cy="1192916"/>
+              <a:chOff x="6661641" y="448781"/>
+              <a:chExt cx="1293454" cy="1192916"/>
             </a:xfrm>
           </p:grpSpPr>
+          <p:pic>
+            <p:nvPicPr>
+              <p:cNvPr id="97" name="図 96"/>
+              <p:cNvPicPr>
+                <a:picLocks noChangeAspect="1"/>
+              </p:cNvPicPr>
+              <p:nvPr/>
+            </p:nvPicPr>
+            <p:blipFill>
+              <a:blip r:embed="rId3"/>
+              <a:stretch>
+                <a:fillRect/>
+              </a:stretch>
+            </p:blipFill>
+            <p:spPr>
+              <a:xfrm>
+                <a:off x="6885286" y="795531"/>
+                <a:ext cx="846166" cy="846166"/>
+              </a:xfrm>
+              <a:prstGeom prst="rect">
+                <a:avLst/>
+              </a:prstGeom>
+            </p:spPr>
+          </p:pic>
           <p:sp>
             <p:nvSpPr>
-              <p:cNvPr id="88" name="角丸四角形 87"/>
-              <p:cNvSpPr/>
-              <p:nvPr/>
-            </p:nvSpPr>
-            <p:spPr>
-              <a:xfrm>
-                <a:off x="4043522" y="446075"/>
-                <a:ext cx="6286500" cy="2716225"/>
-              </a:xfrm>
-              <a:prstGeom prst="roundRect">
-                <a:avLst/>
-              </a:prstGeom>
-              <a:solidFill>
-                <a:schemeClr val="bg1">
-                  <a:lumMod val="95000"/>
-                  <a:alpha val="37000"/>
-                </a:schemeClr>
-              </a:solidFill>
-              <a:ln w="38100">
-                <a:solidFill>
-                  <a:schemeClr val="tx1"/>
-                </a:solidFill>
-              </a:ln>
-            </p:spPr>
-            <p:style>
-              <a:lnRef idx="2">
-                <a:schemeClr val="accent1">
-                  <a:shade val="50000"/>
-                </a:schemeClr>
-              </a:lnRef>
-              <a:fillRef idx="1">
-                <a:schemeClr val="accent1"/>
-              </a:fillRef>
-              <a:effectRef idx="0">
-                <a:schemeClr val="accent1"/>
-              </a:effectRef>
-              <a:fontRef idx="minor">
-                <a:schemeClr val="lt1"/>
-              </a:fontRef>
-            </p:style>
-            <p:txBody>
-              <a:bodyPr rtlCol="0" anchor="ctr"/>
-              <a:lstStyle/>
-              <a:p>
-                <a:pPr algn="ctr"/>
-                <a:endParaRPr kumimoji="1" lang="ja-JP" altLang="en-US"/>
-              </a:p>
-            </p:txBody>
-          </p:sp>
-          <p:sp>
-            <p:nvSpPr>
-              <p:cNvPr id="89" name="テキスト ボックス 88"/>
+              <p:cNvPr id="98" name="テキスト ボックス 97"/>
               <p:cNvSpPr txBox="1"/>
               <p:nvPr/>
             </p:nvSpPr>
             <p:spPr>
               <a:xfrm>
-                <a:off x="6508387" y="-101911"/>
-                <a:ext cx="1356769" cy="508379"/>
-              </a:xfrm>
-              <a:prstGeom prst="rect">
-                <a:avLst/>
-              </a:prstGeom>
-              <a:noFill/>
-            </p:spPr>
-            <p:txBody>
-              <a:bodyPr wrap="square" rtlCol="0">
-                <a:spAutoFit/>
-              </a:bodyPr>
-              <a:lstStyle/>
-              <a:p>
-                <a:r>
-                  <a:rPr lang="en-US" altLang="ja-JP" dirty="0" smtClean="0"/>
-                  <a:t>Prod.1</a:t>
-                </a:r>
-                <a:endParaRPr kumimoji="1" lang="ja-JP" altLang="en-US" dirty="0"/>
-              </a:p>
-            </p:txBody>
-          </p:sp>
-          <p:grpSp>
-            <p:nvGrpSpPr>
-              <p:cNvPr id="90" name="グループ化 89"/>
-              <p:cNvGrpSpPr/>
-              <p:nvPr/>
-            </p:nvGrpSpPr>
-            <p:grpSpPr>
-              <a:xfrm>
-                <a:off x="6471141" y="463701"/>
-                <a:ext cx="1293454" cy="1192916"/>
-                <a:chOff x="6661641" y="448781"/>
-                <a:chExt cx="1293454" cy="1192916"/>
-              </a:xfrm>
-            </p:grpSpPr>
-            <p:pic>
-              <p:nvPicPr>
-                <p:cNvPr id="97" name="図 96"/>
-                <p:cNvPicPr>
-                  <a:picLocks noChangeAspect="1"/>
-                </p:cNvPicPr>
-                <p:nvPr/>
-              </p:nvPicPr>
-              <p:blipFill>
-                <a:blip r:embed="rId3"/>
-                <a:stretch>
-                  <a:fillRect/>
-                </a:stretch>
-              </p:blipFill>
-              <p:spPr>
-                <a:xfrm>
-                  <a:off x="6885286" y="795531"/>
-                  <a:ext cx="846166" cy="846166"/>
-                </a:xfrm>
-                <a:prstGeom prst="rect">
-                  <a:avLst/>
-                </a:prstGeom>
-              </p:spPr>
-            </p:pic>
-            <p:sp>
-              <p:nvSpPr>
-                <p:cNvPr id="98" name="テキスト ボックス 97"/>
-                <p:cNvSpPr txBox="1"/>
-                <p:nvPr/>
-              </p:nvSpPr>
-              <p:spPr>
-                <a:xfrm>
-                  <a:off x="6661641" y="448781"/>
-                  <a:ext cx="1293454" cy="360102"/>
-                </a:xfrm>
-                <a:prstGeom prst="rect">
-                  <a:avLst/>
-                </a:prstGeom>
-                <a:noFill/>
-              </p:spPr>
-              <p:txBody>
-                <a:bodyPr wrap="none" rtlCol="0">
-                  <a:spAutoFit/>
-                </a:bodyPr>
-                <a:lstStyle/>
-                <a:p>
-                  <a:r>
-                    <a:rPr lang="en-US" altLang="ja-JP" sz="1050" dirty="0" smtClean="0"/>
-                    <a:t>Syslog Server</a:t>
-                  </a:r>
-                  <a:endParaRPr kumimoji="1" lang="ja-JP" altLang="en-US" sz="1050" dirty="0"/>
-                </a:p>
-              </p:txBody>
-            </p:sp>
-          </p:grpSp>
-          <p:grpSp>
-            <p:nvGrpSpPr>
-              <p:cNvPr id="91" name="グループ化 90"/>
-              <p:cNvGrpSpPr>
-                <a:grpSpLocks noChangeAspect="1"/>
-              </p:cNvGrpSpPr>
-              <p:nvPr/>
-            </p:nvGrpSpPr>
-            <p:grpSpPr>
-              <a:xfrm>
-                <a:off x="4887523" y="1823913"/>
-                <a:ext cx="4598498" cy="1130852"/>
-                <a:chOff x="4374052" y="1505122"/>
-                <a:chExt cx="6055647" cy="1489191"/>
-              </a:xfrm>
-            </p:grpSpPr>
-            <p:pic>
-              <p:nvPicPr>
-                <p:cNvPr id="92" name="図 91"/>
-                <p:cNvPicPr>
-                  <a:picLocks noChangeAspect="1"/>
-                </p:cNvPicPr>
-                <p:nvPr/>
-              </p:nvPicPr>
-              <p:blipFill>
-                <a:blip r:embed="rId4"/>
-                <a:stretch>
-                  <a:fillRect/>
-                </a:stretch>
-              </p:blipFill>
-              <p:spPr>
-                <a:xfrm>
-                  <a:off x="4374052" y="1505122"/>
-                  <a:ext cx="1489191" cy="1489191"/>
-                </a:xfrm>
-                <a:prstGeom prst="rect">
-                  <a:avLst/>
-                </a:prstGeom>
-              </p:spPr>
-            </p:pic>
-            <p:pic>
-              <p:nvPicPr>
-                <p:cNvPr id="93" name="図 92"/>
-                <p:cNvPicPr>
-                  <a:picLocks noChangeAspect="1"/>
-                </p:cNvPicPr>
-                <p:nvPr/>
-              </p:nvPicPr>
-              <p:blipFill>
-                <a:blip r:embed="rId4"/>
-                <a:stretch>
-                  <a:fillRect/>
-                </a:stretch>
-              </p:blipFill>
-              <p:spPr>
-                <a:xfrm>
-                  <a:off x="5515666" y="1505122"/>
-                  <a:ext cx="1489191" cy="1489191"/>
-                </a:xfrm>
-                <a:prstGeom prst="rect">
-                  <a:avLst/>
-                </a:prstGeom>
-              </p:spPr>
-            </p:pic>
-            <p:pic>
-              <p:nvPicPr>
-                <p:cNvPr id="94" name="図 93"/>
-                <p:cNvPicPr>
-                  <a:picLocks noChangeAspect="1"/>
-                </p:cNvPicPr>
-                <p:nvPr/>
-              </p:nvPicPr>
-              <p:blipFill>
-                <a:blip r:embed="rId4"/>
-                <a:stretch>
-                  <a:fillRect/>
-                </a:stretch>
-              </p:blipFill>
-              <p:spPr>
-                <a:xfrm>
-                  <a:off x="6657280" y="1505122"/>
-                  <a:ext cx="1489191" cy="1489191"/>
-                </a:xfrm>
-                <a:prstGeom prst="rect">
-                  <a:avLst/>
-                </a:prstGeom>
-              </p:spPr>
-            </p:pic>
-            <p:sp>
-              <p:nvSpPr>
-                <p:cNvPr id="95" name="テキスト ボックス 94"/>
-                <p:cNvSpPr txBox="1"/>
-                <p:nvPr/>
-              </p:nvSpPr>
-              <p:spPr>
-                <a:xfrm>
-                  <a:off x="8117921" y="1945739"/>
-                  <a:ext cx="851137" cy="607955"/>
-                </a:xfrm>
-                <a:prstGeom prst="rect">
-                  <a:avLst/>
-                </a:prstGeom>
-                <a:noFill/>
-              </p:spPr>
-              <p:txBody>
-                <a:bodyPr wrap="none" rtlCol="0">
-                  <a:spAutoFit/>
-                </a:bodyPr>
-                <a:lstStyle/>
-                <a:p>
-                  <a:r>
-                    <a:rPr lang="ja-JP" altLang="en-US" sz="2400" dirty="0" smtClean="0"/>
-                    <a:t>・・・</a:t>
-                  </a:r>
-                  <a:endParaRPr kumimoji="1" lang="ja-JP" altLang="en-US" sz="2400" dirty="0"/>
-                </a:p>
-              </p:txBody>
-            </p:sp>
-            <p:pic>
-              <p:nvPicPr>
-                <p:cNvPr id="96" name="図 95"/>
-                <p:cNvPicPr>
-                  <a:picLocks noChangeAspect="1"/>
-                </p:cNvPicPr>
-                <p:nvPr/>
-              </p:nvPicPr>
-              <p:blipFill>
-                <a:blip r:embed="rId4"/>
-                <a:stretch>
-                  <a:fillRect/>
-                </a:stretch>
-              </p:blipFill>
-              <p:spPr>
-                <a:xfrm>
-                  <a:off x="8940508" y="1505122"/>
-                  <a:ext cx="1489191" cy="1489191"/>
-                </a:xfrm>
-                <a:prstGeom prst="rect">
-                  <a:avLst/>
-                </a:prstGeom>
-              </p:spPr>
-            </p:pic>
-          </p:grpSp>
-        </p:grpSp>
-        <p:grpSp>
-          <p:nvGrpSpPr>
-            <p:cNvPr id="60" name="グループ化 59"/>
-            <p:cNvGrpSpPr>
-              <a:grpSpLocks noChangeAspect="1"/>
-            </p:cNvGrpSpPr>
-            <p:nvPr/>
-          </p:nvGrpSpPr>
-          <p:grpSpPr>
-            <a:xfrm>
-              <a:off x="-28479" y="2068090"/>
-              <a:ext cx="4567078" cy="2329837"/>
-              <a:chOff x="4043522" y="-44678"/>
-              <a:chExt cx="6286500" cy="3206978"/>
-            </a:xfrm>
-          </p:grpSpPr>
-          <p:sp>
-            <p:nvSpPr>
-              <p:cNvPr id="77" name="角丸四角形 76"/>
-              <p:cNvSpPr/>
-              <p:nvPr/>
-            </p:nvSpPr>
-            <p:spPr>
-              <a:xfrm>
-                <a:off x="4043522" y="446075"/>
-                <a:ext cx="6286500" cy="2716225"/>
-              </a:xfrm>
-              <a:prstGeom prst="roundRect">
-                <a:avLst/>
-              </a:prstGeom>
-              <a:solidFill>
-                <a:schemeClr val="bg1">
-                  <a:lumMod val="95000"/>
-                  <a:alpha val="37000"/>
-                </a:schemeClr>
-              </a:solidFill>
-              <a:ln w="38100">
-                <a:solidFill>
-                  <a:schemeClr val="tx1"/>
-                </a:solidFill>
-              </a:ln>
-            </p:spPr>
-            <p:style>
-              <a:lnRef idx="2">
-                <a:schemeClr val="accent1">
-                  <a:shade val="50000"/>
-                </a:schemeClr>
-              </a:lnRef>
-              <a:fillRef idx="1">
-                <a:schemeClr val="accent1"/>
-              </a:fillRef>
-              <a:effectRef idx="0">
-                <a:schemeClr val="accent1"/>
-              </a:effectRef>
-              <a:fontRef idx="minor">
-                <a:schemeClr val="lt1"/>
-              </a:fontRef>
-            </p:style>
-            <p:txBody>
-              <a:bodyPr rtlCol="0" anchor="ctr"/>
-              <a:lstStyle/>
-              <a:p>
-                <a:pPr algn="ctr"/>
-                <a:endParaRPr kumimoji="1" lang="ja-JP" altLang="en-US"/>
-              </a:p>
-            </p:txBody>
-          </p:sp>
-          <p:sp>
-            <p:nvSpPr>
-              <p:cNvPr id="78" name="テキスト ボックス 77"/>
-              <p:cNvSpPr txBox="1"/>
-              <p:nvPr/>
-            </p:nvSpPr>
-            <p:spPr>
-              <a:xfrm>
-                <a:off x="6540046" y="-44678"/>
-                <a:ext cx="1356769" cy="508379"/>
-              </a:xfrm>
-              <a:prstGeom prst="rect">
-                <a:avLst/>
-              </a:prstGeom>
-              <a:noFill/>
-            </p:spPr>
-            <p:txBody>
-              <a:bodyPr wrap="square" rtlCol="0">
-                <a:spAutoFit/>
-              </a:bodyPr>
-              <a:lstStyle/>
-              <a:p>
-                <a:r>
-                  <a:rPr lang="en-US" altLang="ja-JP" dirty="0" smtClean="0"/>
-                  <a:t>Prod.2</a:t>
-                </a:r>
-                <a:endParaRPr kumimoji="1" lang="ja-JP" altLang="en-US" dirty="0"/>
-              </a:p>
-            </p:txBody>
-          </p:sp>
-          <p:grpSp>
-            <p:nvGrpSpPr>
-              <p:cNvPr id="79" name="グループ化 78"/>
-              <p:cNvGrpSpPr/>
-              <p:nvPr/>
-            </p:nvGrpSpPr>
-            <p:grpSpPr>
-              <a:xfrm>
-                <a:off x="6471141" y="463701"/>
-                <a:ext cx="1293454" cy="1192916"/>
-                <a:chOff x="6661641" y="448781"/>
-                <a:chExt cx="1293454" cy="1192916"/>
-              </a:xfrm>
-            </p:grpSpPr>
-            <p:pic>
-              <p:nvPicPr>
-                <p:cNvPr id="86" name="図 85"/>
-                <p:cNvPicPr>
-                  <a:picLocks noChangeAspect="1"/>
-                </p:cNvPicPr>
-                <p:nvPr/>
-              </p:nvPicPr>
-              <p:blipFill>
-                <a:blip r:embed="rId3"/>
-                <a:stretch>
-                  <a:fillRect/>
-                </a:stretch>
-              </p:blipFill>
-              <p:spPr>
-                <a:xfrm>
-                  <a:off x="6885286" y="795531"/>
-                  <a:ext cx="846166" cy="846166"/>
-                </a:xfrm>
-                <a:prstGeom prst="rect">
-                  <a:avLst/>
-                </a:prstGeom>
-              </p:spPr>
-            </p:pic>
-            <p:sp>
-              <p:nvSpPr>
-                <p:cNvPr id="87" name="テキスト ボックス 86"/>
-                <p:cNvSpPr txBox="1"/>
-                <p:nvPr/>
-              </p:nvSpPr>
-              <p:spPr>
-                <a:xfrm>
-                  <a:off x="6661641" y="448781"/>
-                  <a:ext cx="1293454" cy="360102"/>
-                </a:xfrm>
-                <a:prstGeom prst="rect">
-                  <a:avLst/>
-                </a:prstGeom>
-                <a:noFill/>
-              </p:spPr>
-              <p:txBody>
-                <a:bodyPr wrap="none" rtlCol="0">
-                  <a:spAutoFit/>
-                </a:bodyPr>
-                <a:lstStyle/>
-                <a:p>
-                  <a:r>
-                    <a:rPr lang="en-US" altLang="ja-JP" sz="1050" dirty="0" smtClean="0"/>
-                    <a:t>Syslog Server</a:t>
-                  </a:r>
-                  <a:endParaRPr kumimoji="1" lang="ja-JP" altLang="en-US" sz="1050" dirty="0"/>
-                </a:p>
-              </p:txBody>
-            </p:sp>
-          </p:grpSp>
-          <p:grpSp>
-            <p:nvGrpSpPr>
-              <p:cNvPr id="80" name="グループ化 79"/>
-              <p:cNvGrpSpPr>
-                <a:grpSpLocks noChangeAspect="1"/>
-              </p:cNvGrpSpPr>
-              <p:nvPr/>
-            </p:nvGrpSpPr>
-            <p:grpSpPr>
-              <a:xfrm>
-                <a:off x="4887523" y="1823913"/>
-                <a:ext cx="4598498" cy="1130852"/>
-                <a:chOff x="4374052" y="1505122"/>
-                <a:chExt cx="6055647" cy="1489191"/>
-              </a:xfrm>
-            </p:grpSpPr>
-            <p:pic>
-              <p:nvPicPr>
-                <p:cNvPr id="81" name="図 80"/>
-                <p:cNvPicPr>
-                  <a:picLocks noChangeAspect="1"/>
-                </p:cNvPicPr>
-                <p:nvPr/>
-              </p:nvPicPr>
-              <p:blipFill>
-                <a:blip r:embed="rId4"/>
-                <a:stretch>
-                  <a:fillRect/>
-                </a:stretch>
-              </p:blipFill>
-              <p:spPr>
-                <a:xfrm>
-                  <a:off x="4374052" y="1505122"/>
-                  <a:ext cx="1489191" cy="1489191"/>
-                </a:xfrm>
-                <a:prstGeom prst="rect">
-                  <a:avLst/>
-                </a:prstGeom>
-              </p:spPr>
-            </p:pic>
-            <p:pic>
-              <p:nvPicPr>
-                <p:cNvPr id="82" name="図 81"/>
-                <p:cNvPicPr>
-                  <a:picLocks noChangeAspect="1"/>
-                </p:cNvPicPr>
-                <p:nvPr/>
-              </p:nvPicPr>
-              <p:blipFill>
-                <a:blip r:embed="rId4"/>
-                <a:stretch>
-                  <a:fillRect/>
-                </a:stretch>
-              </p:blipFill>
-              <p:spPr>
-                <a:xfrm>
-                  <a:off x="5515666" y="1505122"/>
-                  <a:ext cx="1489191" cy="1489191"/>
-                </a:xfrm>
-                <a:prstGeom prst="rect">
-                  <a:avLst/>
-                </a:prstGeom>
-              </p:spPr>
-            </p:pic>
-            <p:pic>
-              <p:nvPicPr>
-                <p:cNvPr id="83" name="図 82"/>
-                <p:cNvPicPr>
-                  <a:picLocks noChangeAspect="1"/>
-                </p:cNvPicPr>
-                <p:nvPr/>
-              </p:nvPicPr>
-              <p:blipFill>
-                <a:blip r:embed="rId4"/>
-                <a:stretch>
-                  <a:fillRect/>
-                </a:stretch>
-              </p:blipFill>
-              <p:spPr>
-                <a:xfrm>
-                  <a:off x="6657280" y="1505122"/>
-                  <a:ext cx="1489191" cy="1489191"/>
-                </a:xfrm>
-                <a:prstGeom prst="rect">
-                  <a:avLst/>
-                </a:prstGeom>
-              </p:spPr>
-            </p:pic>
-            <p:sp>
-              <p:nvSpPr>
-                <p:cNvPr id="84" name="テキスト ボックス 83"/>
-                <p:cNvSpPr txBox="1"/>
-                <p:nvPr/>
-              </p:nvSpPr>
-              <p:spPr>
-                <a:xfrm>
-                  <a:off x="8117921" y="1945739"/>
-                  <a:ext cx="851137" cy="607955"/>
-                </a:xfrm>
-                <a:prstGeom prst="rect">
-                  <a:avLst/>
-                </a:prstGeom>
-                <a:noFill/>
-              </p:spPr>
-              <p:txBody>
-                <a:bodyPr wrap="none" rtlCol="0">
-                  <a:spAutoFit/>
-                </a:bodyPr>
-                <a:lstStyle/>
-                <a:p>
-                  <a:r>
-                    <a:rPr lang="ja-JP" altLang="en-US" sz="2400" dirty="0" smtClean="0"/>
-                    <a:t>・・・</a:t>
-                  </a:r>
-                  <a:endParaRPr kumimoji="1" lang="ja-JP" altLang="en-US" sz="2400" dirty="0"/>
-                </a:p>
-              </p:txBody>
-            </p:sp>
-            <p:pic>
-              <p:nvPicPr>
-                <p:cNvPr id="85" name="図 84"/>
-                <p:cNvPicPr>
-                  <a:picLocks noChangeAspect="1"/>
-                </p:cNvPicPr>
-                <p:nvPr/>
-              </p:nvPicPr>
-              <p:blipFill>
-                <a:blip r:embed="rId4"/>
-                <a:stretch>
-                  <a:fillRect/>
-                </a:stretch>
-              </p:blipFill>
-              <p:spPr>
-                <a:xfrm>
-                  <a:off x="8940508" y="1505122"/>
-                  <a:ext cx="1489191" cy="1489191"/>
-                </a:xfrm>
-                <a:prstGeom prst="rect">
-                  <a:avLst/>
-                </a:prstGeom>
-              </p:spPr>
-            </p:pic>
-          </p:grpSp>
-        </p:grpSp>
-        <p:grpSp>
-          <p:nvGrpSpPr>
-            <p:cNvPr id="61" name="グループ化 60"/>
-            <p:cNvGrpSpPr>
-              <a:grpSpLocks noChangeAspect="1"/>
-            </p:cNvGrpSpPr>
-            <p:nvPr/>
-          </p:nvGrpSpPr>
-          <p:grpSpPr>
-            <a:xfrm>
-              <a:off x="-78538" y="4515358"/>
-              <a:ext cx="4567078" cy="2342642"/>
-              <a:chOff x="4043522" y="-62304"/>
-              <a:chExt cx="6286500" cy="3224604"/>
-            </a:xfrm>
-          </p:grpSpPr>
-          <p:sp>
-            <p:nvSpPr>
-              <p:cNvPr id="66" name="角丸四角形 65"/>
-              <p:cNvSpPr/>
-              <p:nvPr/>
-            </p:nvSpPr>
-            <p:spPr>
-              <a:xfrm>
-                <a:off x="4043522" y="446075"/>
-                <a:ext cx="6286500" cy="2716225"/>
-              </a:xfrm>
-              <a:prstGeom prst="roundRect">
-                <a:avLst/>
-              </a:prstGeom>
-              <a:solidFill>
-                <a:schemeClr val="bg1">
-                  <a:lumMod val="95000"/>
-                  <a:alpha val="37000"/>
-                </a:schemeClr>
-              </a:solidFill>
-              <a:ln w="38100">
-                <a:solidFill>
-                  <a:schemeClr val="tx1"/>
-                </a:solidFill>
-              </a:ln>
-            </p:spPr>
-            <p:style>
-              <a:lnRef idx="2">
-                <a:schemeClr val="accent1">
-                  <a:shade val="50000"/>
-                </a:schemeClr>
-              </a:lnRef>
-              <a:fillRef idx="1">
-                <a:schemeClr val="accent1"/>
-              </a:fillRef>
-              <a:effectRef idx="0">
-                <a:schemeClr val="accent1"/>
-              </a:effectRef>
-              <a:fontRef idx="minor">
-                <a:schemeClr val="lt1"/>
-              </a:fontRef>
-            </p:style>
-            <p:txBody>
-              <a:bodyPr rtlCol="0" anchor="ctr"/>
-              <a:lstStyle/>
-              <a:p>
-                <a:pPr algn="ctr"/>
-                <a:endParaRPr kumimoji="1" lang="ja-JP" altLang="en-US"/>
-              </a:p>
-            </p:txBody>
-          </p:sp>
-          <p:sp>
-            <p:nvSpPr>
-              <p:cNvPr id="67" name="テキスト ボックス 66"/>
-              <p:cNvSpPr txBox="1"/>
-              <p:nvPr/>
-            </p:nvSpPr>
-            <p:spPr>
-              <a:xfrm>
-                <a:off x="6577292" y="-62304"/>
-                <a:ext cx="1356769" cy="508379"/>
-              </a:xfrm>
-              <a:prstGeom prst="rect">
-                <a:avLst/>
-              </a:prstGeom>
-              <a:noFill/>
-            </p:spPr>
-            <p:txBody>
-              <a:bodyPr wrap="square" rtlCol="0">
-                <a:spAutoFit/>
-              </a:bodyPr>
-              <a:lstStyle/>
-              <a:p>
-                <a:r>
-                  <a:rPr lang="en-US" altLang="ja-JP" dirty="0" smtClean="0"/>
-                  <a:t>Prod.3</a:t>
-                </a:r>
-                <a:endParaRPr kumimoji="1" lang="ja-JP" altLang="en-US" dirty="0"/>
-              </a:p>
-            </p:txBody>
-          </p:sp>
-          <p:grpSp>
-            <p:nvGrpSpPr>
-              <p:cNvPr id="68" name="グループ化 67"/>
-              <p:cNvGrpSpPr/>
-              <p:nvPr/>
-            </p:nvGrpSpPr>
-            <p:grpSpPr>
-              <a:xfrm>
-                <a:off x="6471141" y="463701"/>
-                <a:ext cx="1293454" cy="1192916"/>
-                <a:chOff x="6661641" y="448781"/>
-                <a:chExt cx="1293454" cy="1192916"/>
-              </a:xfrm>
-            </p:grpSpPr>
-            <p:pic>
-              <p:nvPicPr>
-                <p:cNvPr id="75" name="図 74"/>
-                <p:cNvPicPr>
-                  <a:picLocks noChangeAspect="1"/>
-                </p:cNvPicPr>
-                <p:nvPr/>
-              </p:nvPicPr>
-              <p:blipFill>
-                <a:blip r:embed="rId3"/>
-                <a:stretch>
-                  <a:fillRect/>
-                </a:stretch>
-              </p:blipFill>
-              <p:spPr>
-                <a:xfrm>
-                  <a:off x="6885286" y="795531"/>
-                  <a:ext cx="846166" cy="846166"/>
-                </a:xfrm>
-                <a:prstGeom prst="rect">
-                  <a:avLst/>
-                </a:prstGeom>
-              </p:spPr>
-            </p:pic>
-            <p:sp>
-              <p:nvSpPr>
-                <p:cNvPr id="76" name="テキスト ボックス 75"/>
-                <p:cNvSpPr txBox="1"/>
-                <p:nvPr/>
-              </p:nvSpPr>
-              <p:spPr>
-                <a:xfrm>
-                  <a:off x="6661641" y="448781"/>
-                  <a:ext cx="1293454" cy="360102"/>
-                </a:xfrm>
-                <a:prstGeom prst="rect">
-                  <a:avLst/>
-                </a:prstGeom>
-                <a:noFill/>
-              </p:spPr>
-              <p:txBody>
-                <a:bodyPr wrap="none" rtlCol="0">
-                  <a:spAutoFit/>
-                </a:bodyPr>
-                <a:lstStyle/>
-                <a:p>
-                  <a:r>
-                    <a:rPr lang="en-US" altLang="ja-JP" sz="1050" dirty="0" smtClean="0"/>
-                    <a:t>Syslog Server</a:t>
-                  </a:r>
-                  <a:endParaRPr kumimoji="1" lang="ja-JP" altLang="en-US" sz="1050" dirty="0"/>
-                </a:p>
-              </p:txBody>
-            </p:sp>
-          </p:grpSp>
-          <p:grpSp>
-            <p:nvGrpSpPr>
-              <p:cNvPr id="69" name="グループ化 68"/>
-              <p:cNvGrpSpPr>
-                <a:grpSpLocks noChangeAspect="1"/>
-              </p:cNvGrpSpPr>
-              <p:nvPr/>
-            </p:nvGrpSpPr>
-            <p:grpSpPr>
-              <a:xfrm>
-                <a:off x="4887523" y="1823913"/>
-                <a:ext cx="4598498" cy="1130852"/>
-                <a:chOff x="4374052" y="1505122"/>
-                <a:chExt cx="6055647" cy="1489191"/>
-              </a:xfrm>
-            </p:grpSpPr>
-            <p:pic>
-              <p:nvPicPr>
-                <p:cNvPr id="70" name="図 69"/>
-                <p:cNvPicPr>
-                  <a:picLocks noChangeAspect="1"/>
-                </p:cNvPicPr>
-                <p:nvPr/>
-              </p:nvPicPr>
-              <p:blipFill>
-                <a:blip r:embed="rId4"/>
-                <a:stretch>
-                  <a:fillRect/>
-                </a:stretch>
-              </p:blipFill>
-              <p:spPr>
-                <a:xfrm>
-                  <a:off x="4374052" y="1505122"/>
-                  <a:ext cx="1489191" cy="1489191"/>
-                </a:xfrm>
-                <a:prstGeom prst="rect">
-                  <a:avLst/>
-                </a:prstGeom>
-              </p:spPr>
-            </p:pic>
-            <p:pic>
-              <p:nvPicPr>
-                <p:cNvPr id="71" name="図 70"/>
-                <p:cNvPicPr>
-                  <a:picLocks noChangeAspect="1"/>
-                </p:cNvPicPr>
-                <p:nvPr/>
-              </p:nvPicPr>
-              <p:blipFill>
-                <a:blip r:embed="rId4"/>
-                <a:stretch>
-                  <a:fillRect/>
-                </a:stretch>
-              </p:blipFill>
-              <p:spPr>
-                <a:xfrm>
-                  <a:off x="5515666" y="1505122"/>
-                  <a:ext cx="1489191" cy="1489191"/>
-                </a:xfrm>
-                <a:prstGeom prst="rect">
-                  <a:avLst/>
-                </a:prstGeom>
-              </p:spPr>
-            </p:pic>
-            <p:pic>
-              <p:nvPicPr>
-                <p:cNvPr id="72" name="図 71"/>
-                <p:cNvPicPr>
-                  <a:picLocks noChangeAspect="1"/>
-                </p:cNvPicPr>
-                <p:nvPr/>
-              </p:nvPicPr>
-              <p:blipFill>
-                <a:blip r:embed="rId4"/>
-                <a:stretch>
-                  <a:fillRect/>
-                </a:stretch>
-              </p:blipFill>
-              <p:spPr>
-                <a:xfrm>
-                  <a:off x="6657280" y="1505122"/>
-                  <a:ext cx="1489191" cy="1489191"/>
-                </a:xfrm>
-                <a:prstGeom prst="rect">
-                  <a:avLst/>
-                </a:prstGeom>
-              </p:spPr>
-            </p:pic>
-            <p:sp>
-              <p:nvSpPr>
-                <p:cNvPr id="73" name="テキスト ボックス 72"/>
-                <p:cNvSpPr txBox="1"/>
-                <p:nvPr/>
-              </p:nvSpPr>
-              <p:spPr>
-                <a:xfrm>
-                  <a:off x="8117921" y="1945739"/>
-                  <a:ext cx="851137" cy="607955"/>
-                </a:xfrm>
-                <a:prstGeom prst="rect">
-                  <a:avLst/>
-                </a:prstGeom>
-                <a:noFill/>
-              </p:spPr>
-              <p:txBody>
-                <a:bodyPr wrap="none" rtlCol="0">
-                  <a:spAutoFit/>
-                </a:bodyPr>
-                <a:lstStyle/>
-                <a:p>
-                  <a:r>
-                    <a:rPr lang="ja-JP" altLang="en-US" sz="2400" dirty="0" smtClean="0"/>
-                    <a:t>・・・</a:t>
-                  </a:r>
-                  <a:endParaRPr kumimoji="1" lang="ja-JP" altLang="en-US" sz="2400" dirty="0"/>
-                </a:p>
-              </p:txBody>
-            </p:sp>
-            <p:pic>
-              <p:nvPicPr>
-                <p:cNvPr id="74" name="図 73"/>
-                <p:cNvPicPr>
-                  <a:picLocks noChangeAspect="1"/>
-                </p:cNvPicPr>
-                <p:nvPr/>
-              </p:nvPicPr>
-              <p:blipFill>
-                <a:blip r:embed="rId4"/>
-                <a:stretch>
-                  <a:fillRect/>
-                </a:stretch>
-              </p:blipFill>
-              <p:spPr>
-                <a:xfrm>
-                  <a:off x="8940508" y="1505122"/>
-                  <a:ext cx="1489191" cy="1489191"/>
-                </a:xfrm>
-                <a:prstGeom prst="rect">
-                  <a:avLst/>
-                </a:prstGeom>
-              </p:spPr>
-            </p:pic>
-          </p:grpSp>
-        </p:grpSp>
-        <p:grpSp>
-          <p:nvGrpSpPr>
-            <p:cNvPr id="103" name="グループ化 102"/>
-            <p:cNvGrpSpPr/>
-            <p:nvPr/>
-          </p:nvGrpSpPr>
-          <p:grpSpPr>
-            <a:xfrm>
-              <a:off x="-3156765" y="29147"/>
-              <a:ext cx="4768499" cy="952500"/>
-              <a:chOff x="-3156765" y="29147"/>
-              <a:chExt cx="4768499" cy="952500"/>
-            </a:xfrm>
-          </p:grpSpPr>
-          <p:cxnSp>
-            <p:nvCxnSpPr>
-              <p:cNvPr id="62" name="直線矢印コネクタ 61"/>
-              <p:cNvCxnSpPr>
-                <a:stCxn id="99" idx="3"/>
-              </p:cNvCxnSpPr>
-              <p:nvPr/>
-            </p:nvCxnSpPr>
-            <p:spPr>
-              <a:xfrm>
-                <a:off x="-2204266" y="505397"/>
-                <a:ext cx="3816000" cy="0"/>
-              </a:xfrm>
-              <a:prstGeom prst="straightConnector1">
-                <a:avLst/>
-              </a:prstGeom>
-              <a:ln w="76200">
-                <a:solidFill>
-                  <a:schemeClr val="tx1"/>
-                </a:solidFill>
-                <a:tailEnd type="triangle"/>
-              </a:ln>
-            </p:spPr>
-            <p:style>
-              <a:lnRef idx="1">
-                <a:schemeClr val="accent1"/>
-              </a:lnRef>
-              <a:fillRef idx="0">
-                <a:schemeClr val="accent1"/>
-              </a:fillRef>
-              <a:effectRef idx="0">
-                <a:schemeClr val="accent1"/>
-              </a:effectRef>
-              <a:fontRef idx="minor">
-                <a:schemeClr val="tx1"/>
-              </a:fontRef>
-            </p:style>
-          </p:cxnSp>
-          <p:sp>
-            <p:nvSpPr>
-              <p:cNvPr id="65" name="テキスト ボックス 64"/>
-              <p:cNvSpPr txBox="1"/>
-              <p:nvPr/>
-            </p:nvSpPr>
-            <p:spPr>
-              <a:xfrm>
-                <a:off x="-2247209" y="88135"/>
-                <a:ext cx="1554721" cy="369332"/>
+                <a:off x="6661641" y="448781"/>
+                <a:ext cx="1293454" cy="360102"/>
               </a:xfrm>
               <a:prstGeom prst="rect">
                 <a:avLst/>
@@ -5449,108 +4590,112 @@
               <a:lstStyle/>
               <a:p>
                 <a:r>
-                  <a:rPr lang="en-US" altLang="ja-JP" dirty="0" smtClean="0"/>
-                  <a:t>Manual </a:t>
+                  <a:rPr lang="en-US" altLang="ja-JP" sz="1050" dirty="0" smtClean="0"/>
+                  <a:t>Syslog Server</a:t>
                 </a:r>
-                <a:r>
-                  <a:rPr lang="en-US" altLang="ja-JP" dirty="0" err="1" smtClean="0"/>
-                  <a:t>Maint</a:t>
-                </a:r>
-                <a:r>
-                  <a:rPr lang="en-US" altLang="ja-JP" dirty="0" smtClean="0"/>
-                  <a:t>.</a:t>
-                </a:r>
-                <a:endParaRPr kumimoji="1" lang="ja-JP" altLang="en-US" dirty="0"/>
+                <a:endParaRPr kumimoji="1" lang="ja-JP" altLang="en-US" sz="1050" dirty="0"/>
               </a:p>
             </p:txBody>
           </p:sp>
+        </p:grpSp>
+        <p:grpSp>
+          <p:nvGrpSpPr>
+            <p:cNvPr id="91" name="グループ化 90"/>
+            <p:cNvGrpSpPr>
+              <a:grpSpLocks noChangeAspect="1"/>
+            </p:cNvGrpSpPr>
+            <p:nvPr/>
+          </p:nvGrpSpPr>
+          <p:grpSpPr>
+            <a:xfrm>
+              <a:off x="4887523" y="1823913"/>
+              <a:ext cx="4598498" cy="1130852"/>
+              <a:chOff x="4374052" y="1505122"/>
+              <a:chExt cx="6055647" cy="1489191"/>
+            </a:xfrm>
+          </p:grpSpPr>
           <p:pic>
             <p:nvPicPr>
-              <p:cNvPr id="99" name="図 98"/>
+              <p:cNvPr id="92" name="図 91"/>
               <p:cNvPicPr>
                 <a:picLocks noChangeAspect="1"/>
               </p:cNvPicPr>
               <p:nvPr/>
             </p:nvPicPr>
             <p:blipFill>
-              <a:blip r:embed="rId5"/>
+              <a:blip r:embed="rId4"/>
               <a:stretch>
                 <a:fillRect/>
               </a:stretch>
             </p:blipFill>
             <p:spPr>
               <a:xfrm>
-                <a:off x="-3156765" y="29147"/>
-                <a:ext cx="952500" cy="952500"/>
+                <a:off x="4374052" y="1505122"/>
+                <a:ext cx="1489191" cy="1489191"/>
               </a:xfrm>
               <a:prstGeom prst="rect">
                 <a:avLst/>
               </a:prstGeom>
             </p:spPr>
           </p:pic>
-        </p:grpSp>
-        <p:grpSp>
-          <p:nvGrpSpPr>
-            <p:cNvPr id="104" name="グループ化 103"/>
-            <p:cNvGrpSpPr/>
-            <p:nvPr/>
-          </p:nvGrpSpPr>
-          <p:grpSpPr>
-            <a:xfrm>
-              <a:off x="-3156765" y="2458772"/>
-              <a:ext cx="4768499" cy="952500"/>
-              <a:chOff x="-3156765" y="29147"/>
-              <a:chExt cx="4768499" cy="952500"/>
-            </a:xfrm>
-          </p:grpSpPr>
-          <p:cxnSp>
-            <p:nvCxnSpPr>
-              <p:cNvPr id="105" name="直線矢印コネクタ 104"/>
-              <p:cNvCxnSpPr>
-                <a:stCxn id="107" idx="3"/>
-              </p:cNvCxnSpPr>
+          <p:pic>
+            <p:nvPicPr>
+              <p:cNvPr id="93" name="図 92"/>
+              <p:cNvPicPr>
+                <a:picLocks noChangeAspect="1"/>
+              </p:cNvPicPr>
               <p:nvPr/>
-            </p:nvCxnSpPr>
+            </p:nvPicPr>
+            <p:blipFill>
+              <a:blip r:embed="rId4"/>
+              <a:stretch>
+                <a:fillRect/>
+              </a:stretch>
+            </p:blipFill>
             <p:spPr>
               <a:xfrm>
-                <a:off x="-2204266" y="505397"/>
-                <a:ext cx="3816000" cy="0"/>
+                <a:off x="5515666" y="1505122"/>
+                <a:ext cx="1489191" cy="1489191"/>
               </a:xfrm>
-              <a:prstGeom prst="straightConnector1">
+              <a:prstGeom prst="rect">
                 <a:avLst/>
               </a:prstGeom>
-              <a:ln w="76200">
-                <a:solidFill>
-                  <a:schemeClr val="tx1"/>
-                </a:solidFill>
-                <a:tailEnd type="triangle"/>
-              </a:ln>
             </p:spPr>
-            <p:style>
-              <a:lnRef idx="1">
-                <a:schemeClr val="accent1"/>
-              </a:lnRef>
-              <a:fillRef idx="0">
-                <a:schemeClr val="accent1"/>
-              </a:fillRef>
-              <a:effectRef idx="0">
-                <a:schemeClr val="accent1"/>
-              </a:effectRef>
-              <a:fontRef idx="minor">
-                <a:schemeClr val="tx1"/>
-              </a:fontRef>
-            </p:style>
-          </p:cxnSp>
+          </p:pic>
+          <p:pic>
+            <p:nvPicPr>
+              <p:cNvPr id="94" name="図 93"/>
+              <p:cNvPicPr>
+                <a:picLocks noChangeAspect="1"/>
+              </p:cNvPicPr>
+              <p:nvPr/>
+            </p:nvPicPr>
+            <p:blipFill>
+              <a:blip r:embed="rId4"/>
+              <a:stretch>
+                <a:fillRect/>
+              </a:stretch>
+            </p:blipFill>
+            <p:spPr>
+              <a:xfrm>
+                <a:off x="6657280" y="1505122"/>
+                <a:ext cx="1489191" cy="1489191"/>
+              </a:xfrm>
+              <a:prstGeom prst="rect">
+                <a:avLst/>
+              </a:prstGeom>
+            </p:spPr>
+          </p:pic>
           <p:sp>
             <p:nvSpPr>
-              <p:cNvPr id="106" name="テキスト ボックス 105"/>
+              <p:cNvPr id="95" name="テキスト ボックス 94"/>
               <p:cNvSpPr txBox="1"/>
               <p:nvPr/>
             </p:nvSpPr>
             <p:spPr>
               <a:xfrm>
-                <a:off x="-2247209" y="88135"/>
-                <a:ext cx="1554721" cy="369332"/>
+                <a:off x="8117921" y="1945739"/>
+                <a:ext cx="851137" cy="607955"/>
               </a:xfrm>
               <a:prstGeom prst="rect">
                 <a:avLst/>
@@ -5564,39 +4709,31 @@
               <a:lstStyle/>
               <a:p>
                 <a:r>
-                  <a:rPr lang="en-US" altLang="ja-JP" dirty="0" smtClean="0"/>
-                  <a:t>Manual </a:t>
+                  <a:rPr lang="ja-JP" altLang="en-US" sz="2400" dirty="0" smtClean="0"/>
+                  <a:t>・・・</a:t>
                 </a:r>
-                <a:r>
-                  <a:rPr lang="en-US" altLang="ja-JP" dirty="0" err="1" smtClean="0"/>
-                  <a:t>Maint</a:t>
-                </a:r>
-                <a:r>
-                  <a:rPr lang="en-US" altLang="ja-JP" dirty="0" smtClean="0"/>
-                  <a:t>.</a:t>
-                </a:r>
-                <a:endParaRPr kumimoji="1" lang="ja-JP" altLang="en-US" dirty="0"/>
+                <a:endParaRPr kumimoji="1" lang="ja-JP" altLang="en-US" sz="2400" dirty="0"/>
               </a:p>
             </p:txBody>
           </p:sp>
           <p:pic>
             <p:nvPicPr>
-              <p:cNvPr id="107" name="図 106"/>
+              <p:cNvPr id="96" name="図 95"/>
               <p:cNvPicPr>
                 <a:picLocks noChangeAspect="1"/>
               </p:cNvPicPr>
               <p:nvPr/>
             </p:nvPicPr>
             <p:blipFill>
-              <a:blip r:embed="rId5"/>
+              <a:blip r:embed="rId4"/>
               <a:stretch>
                 <a:fillRect/>
               </a:stretch>
             </p:blipFill>
             <p:spPr>
               <a:xfrm>
-                <a:off x="-3156765" y="29147"/>
-                <a:ext cx="952500" cy="952500"/>
+                <a:off x="8940508" y="1505122"/>
+                <a:ext cx="1489191" cy="1489191"/>
               </a:xfrm>
               <a:prstGeom prst="rect">
                 <a:avLst/>
@@ -5604,68 +4741,152 @@
             </p:spPr>
           </p:pic>
         </p:grpSp>
+      </p:grpSp>
+      <p:grpSp>
+        <p:nvGrpSpPr>
+          <p:cNvPr id="60" name="グループ化 59"/>
+          <p:cNvGrpSpPr>
+            <a:grpSpLocks noChangeAspect="1"/>
+          </p:cNvGrpSpPr>
+          <p:nvPr/>
+        </p:nvGrpSpPr>
+        <p:grpSpPr>
+          <a:xfrm>
+            <a:off x="-28479" y="2068090"/>
+            <a:ext cx="4567078" cy="2329837"/>
+            <a:chOff x="4043522" y="-44678"/>
+            <a:chExt cx="6286500" cy="3206978"/>
+          </a:xfrm>
+        </p:grpSpPr>
+        <p:sp>
+          <p:nvSpPr>
+            <p:cNvPr id="77" name="角丸四角形 76"/>
+            <p:cNvSpPr/>
+            <p:nvPr/>
+          </p:nvSpPr>
+          <p:spPr>
+            <a:xfrm>
+              <a:off x="4043522" y="446075"/>
+              <a:ext cx="6286500" cy="2716225"/>
+            </a:xfrm>
+            <a:prstGeom prst="roundRect">
+              <a:avLst/>
+            </a:prstGeom>
+            <a:solidFill>
+              <a:schemeClr val="bg1">
+                <a:lumMod val="95000"/>
+                <a:alpha val="37000"/>
+              </a:schemeClr>
+            </a:solidFill>
+            <a:ln w="38100">
+              <a:solidFill>
+                <a:schemeClr val="tx1"/>
+              </a:solidFill>
+            </a:ln>
+          </p:spPr>
+          <p:style>
+            <a:lnRef idx="2">
+              <a:schemeClr val="accent1">
+                <a:shade val="50000"/>
+              </a:schemeClr>
+            </a:lnRef>
+            <a:fillRef idx="1">
+              <a:schemeClr val="accent1"/>
+            </a:fillRef>
+            <a:effectRef idx="0">
+              <a:schemeClr val="accent1"/>
+            </a:effectRef>
+            <a:fontRef idx="minor">
+              <a:schemeClr val="lt1"/>
+            </a:fontRef>
+          </p:style>
+          <p:txBody>
+            <a:bodyPr rtlCol="0" anchor="ctr"/>
+            <a:lstStyle/>
+            <a:p>
+              <a:pPr algn="ctr"/>
+              <a:endParaRPr kumimoji="1" lang="ja-JP" altLang="en-US"/>
+            </a:p>
+          </p:txBody>
+        </p:sp>
+        <p:sp>
+          <p:nvSpPr>
+            <p:cNvPr id="78" name="テキスト ボックス 77"/>
+            <p:cNvSpPr txBox="1"/>
+            <p:nvPr/>
+          </p:nvSpPr>
+          <p:spPr>
+            <a:xfrm>
+              <a:off x="6540046" y="-44678"/>
+              <a:ext cx="1356769" cy="508379"/>
+            </a:xfrm>
+            <a:prstGeom prst="rect">
+              <a:avLst/>
+            </a:prstGeom>
+            <a:noFill/>
+          </p:spPr>
+          <p:txBody>
+            <a:bodyPr wrap="square" rtlCol="0">
+              <a:spAutoFit/>
+            </a:bodyPr>
+            <a:lstStyle/>
+            <a:p>
+              <a:r>
+                <a:rPr lang="en-US" altLang="ja-JP" dirty="0" smtClean="0"/>
+                <a:t>Prod.2</a:t>
+              </a:r>
+              <a:endParaRPr kumimoji="1" lang="ja-JP" altLang="en-US" dirty="0"/>
+            </a:p>
+          </p:txBody>
+        </p:sp>
         <p:grpSp>
           <p:nvGrpSpPr>
-            <p:cNvPr id="108" name="グループ化 107"/>
+            <p:cNvPr id="79" name="グループ化 78"/>
             <p:cNvGrpSpPr/>
             <p:nvPr/>
           </p:nvGrpSpPr>
           <p:grpSpPr>
             <a:xfrm>
-              <a:off x="-3156765" y="4888397"/>
-              <a:ext cx="4768499" cy="952500"/>
-              <a:chOff x="-3156765" y="29147"/>
-              <a:chExt cx="4768499" cy="952500"/>
+              <a:off x="6471141" y="463701"/>
+              <a:ext cx="1293454" cy="1192916"/>
+              <a:chOff x="6661641" y="448781"/>
+              <a:chExt cx="1293454" cy="1192916"/>
             </a:xfrm>
           </p:grpSpPr>
-          <p:cxnSp>
-            <p:nvCxnSpPr>
-              <p:cNvPr id="109" name="直線矢印コネクタ 108"/>
-              <p:cNvCxnSpPr>
-                <a:stCxn id="111" idx="3"/>
-              </p:cNvCxnSpPr>
+          <p:pic>
+            <p:nvPicPr>
+              <p:cNvPr id="86" name="図 85"/>
+              <p:cNvPicPr>
+                <a:picLocks noChangeAspect="1"/>
+              </p:cNvPicPr>
               <p:nvPr/>
-            </p:nvCxnSpPr>
+            </p:nvPicPr>
+            <p:blipFill>
+              <a:blip r:embed="rId3"/>
+              <a:stretch>
+                <a:fillRect/>
+              </a:stretch>
+            </p:blipFill>
             <p:spPr>
               <a:xfrm>
-                <a:off x="-2204266" y="505397"/>
-                <a:ext cx="3816000" cy="0"/>
+                <a:off x="6885286" y="795531"/>
+                <a:ext cx="846166" cy="846166"/>
               </a:xfrm>
-              <a:prstGeom prst="straightConnector1">
+              <a:prstGeom prst="rect">
                 <a:avLst/>
               </a:prstGeom>
-              <a:ln w="76200">
-                <a:solidFill>
-                  <a:schemeClr val="tx1"/>
-                </a:solidFill>
-                <a:tailEnd type="triangle"/>
-              </a:ln>
             </p:spPr>
-            <p:style>
-              <a:lnRef idx="1">
-                <a:schemeClr val="accent1"/>
-              </a:lnRef>
-              <a:fillRef idx="0">
-                <a:schemeClr val="accent1"/>
-              </a:fillRef>
-              <a:effectRef idx="0">
-                <a:schemeClr val="accent1"/>
-              </a:effectRef>
-              <a:fontRef idx="minor">
-                <a:schemeClr val="tx1"/>
-              </a:fontRef>
-            </p:style>
-          </p:cxnSp>
+          </p:pic>
           <p:sp>
             <p:nvSpPr>
-              <p:cNvPr id="110" name="テキスト ボックス 109"/>
+              <p:cNvPr id="87" name="テキスト ボックス 86"/>
               <p:cNvSpPr txBox="1"/>
               <p:nvPr/>
             </p:nvSpPr>
             <p:spPr>
               <a:xfrm>
-                <a:off x="-2247209" y="88135"/>
-                <a:ext cx="1554721" cy="369332"/>
+                <a:off x="6661641" y="448781"/>
+                <a:ext cx="1293454" cy="360102"/>
               </a:xfrm>
               <a:prstGeom prst="rect">
                 <a:avLst/>
@@ -5679,39 +4900,150 @@
               <a:lstStyle/>
               <a:p>
                 <a:r>
-                  <a:rPr lang="en-US" altLang="ja-JP" dirty="0" smtClean="0"/>
-                  <a:t>Manual </a:t>
+                  <a:rPr lang="en-US" altLang="ja-JP" sz="1050" dirty="0" smtClean="0"/>
+                  <a:t>Syslog Server</a:t>
                 </a:r>
-                <a:r>
-                  <a:rPr lang="en-US" altLang="ja-JP" dirty="0" err="1" smtClean="0"/>
-                  <a:t>Maint</a:t>
-                </a:r>
-                <a:r>
-                  <a:rPr lang="en-US" altLang="ja-JP" dirty="0" smtClean="0"/>
-                  <a:t>.</a:t>
-                </a:r>
-                <a:endParaRPr kumimoji="1" lang="ja-JP" altLang="en-US" dirty="0"/>
+                <a:endParaRPr kumimoji="1" lang="ja-JP" altLang="en-US" sz="1050" dirty="0"/>
               </a:p>
             </p:txBody>
           </p:sp>
+        </p:grpSp>
+        <p:grpSp>
+          <p:nvGrpSpPr>
+            <p:cNvPr id="80" name="グループ化 79"/>
+            <p:cNvGrpSpPr>
+              <a:grpSpLocks noChangeAspect="1"/>
+            </p:cNvGrpSpPr>
+            <p:nvPr/>
+          </p:nvGrpSpPr>
+          <p:grpSpPr>
+            <a:xfrm>
+              <a:off x="4887523" y="1823913"/>
+              <a:ext cx="4598498" cy="1130852"/>
+              <a:chOff x="4374052" y="1505122"/>
+              <a:chExt cx="6055647" cy="1489191"/>
+            </a:xfrm>
+          </p:grpSpPr>
           <p:pic>
             <p:nvPicPr>
-              <p:cNvPr id="111" name="図 110"/>
+              <p:cNvPr id="81" name="図 80"/>
               <p:cNvPicPr>
                 <a:picLocks noChangeAspect="1"/>
               </p:cNvPicPr>
               <p:nvPr/>
             </p:nvPicPr>
             <p:blipFill>
-              <a:blip r:embed="rId5"/>
+              <a:blip r:embed="rId4"/>
               <a:stretch>
                 <a:fillRect/>
               </a:stretch>
             </p:blipFill>
             <p:spPr>
               <a:xfrm>
-                <a:off x="-3156765" y="29147"/>
-                <a:ext cx="952500" cy="952500"/>
+                <a:off x="4374052" y="1505122"/>
+                <a:ext cx="1489191" cy="1489191"/>
+              </a:xfrm>
+              <a:prstGeom prst="rect">
+                <a:avLst/>
+              </a:prstGeom>
+            </p:spPr>
+          </p:pic>
+          <p:pic>
+            <p:nvPicPr>
+              <p:cNvPr id="82" name="図 81"/>
+              <p:cNvPicPr>
+                <a:picLocks noChangeAspect="1"/>
+              </p:cNvPicPr>
+              <p:nvPr/>
+            </p:nvPicPr>
+            <p:blipFill>
+              <a:blip r:embed="rId4"/>
+              <a:stretch>
+                <a:fillRect/>
+              </a:stretch>
+            </p:blipFill>
+            <p:spPr>
+              <a:xfrm>
+                <a:off x="5515666" y="1505122"/>
+                <a:ext cx="1489191" cy="1489191"/>
+              </a:xfrm>
+              <a:prstGeom prst="rect">
+                <a:avLst/>
+              </a:prstGeom>
+            </p:spPr>
+          </p:pic>
+          <p:pic>
+            <p:nvPicPr>
+              <p:cNvPr id="83" name="図 82"/>
+              <p:cNvPicPr>
+                <a:picLocks noChangeAspect="1"/>
+              </p:cNvPicPr>
+              <p:nvPr/>
+            </p:nvPicPr>
+            <p:blipFill>
+              <a:blip r:embed="rId4"/>
+              <a:stretch>
+                <a:fillRect/>
+              </a:stretch>
+            </p:blipFill>
+            <p:spPr>
+              <a:xfrm>
+                <a:off x="6657280" y="1505122"/>
+                <a:ext cx="1489191" cy="1489191"/>
+              </a:xfrm>
+              <a:prstGeom prst="rect">
+                <a:avLst/>
+              </a:prstGeom>
+            </p:spPr>
+          </p:pic>
+          <p:sp>
+            <p:nvSpPr>
+              <p:cNvPr id="84" name="テキスト ボックス 83"/>
+              <p:cNvSpPr txBox="1"/>
+              <p:nvPr/>
+            </p:nvSpPr>
+            <p:spPr>
+              <a:xfrm>
+                <a:off x="8117921" y="1945739"/>
+                <a:ext cx="851137" cy="607955"/>
+              </a:xfrm>
+              <a:prstGeom prst="rect">
+                <a:avLst/>
+              </a:prstGeom>
+              <a:noFill/>
+            </p:spPr>
+            <p:txBody>
+              <a:bodyPr wrap="none" rtlCol="0">
+                <a:spAutoFit/>
+              </a:bodyPr>
+              <a:lstStyle/>
+              <a:p>
+                <a:r>
+                  <a:rPr lang="ja-JP" altLang="en-US" sz="2400" dirty="0" smtClean="0"/>
+                  <a:t>・・・</a:t>
+                </a:r>
+                <a:endParaRPr kumimoji="1" lang="ja-JP" altLang="en-US" sz="2400" dirty="0"/>
+              </a:p>
+            </p:txBody>
+          </p:sp>
+          <p:pic>
+            <p:nvPicPr>
+              <p:cNvPr id="85" name="図 84"/>
+              <p:cNvPicPr>
+                <a:picLocks noChangeAspect="1"/>
+              </p:cNvPicPr>
+              <p:nvPr/>
+            </p:nvPicPr>
+            <p:blipFill>
+              <a:blip r:embed="rId4"/>
+              <a:stretch>
+                <a:fillRect/>
+              </a:stretch>
+            </p:blipFill>
+            <p:spPr>
+              <a:xfrm>
+                <a:off x="8940508" y="1505122"/>
+                <a:ext cx="1489191" cy="1489191"/>
               </a:xfrm>
               <a:prstGeom prst="rect">
                 <a:avLst/>
@@ -5719,6 +5051,661 @@
             </p:spPr>
           </p:pic>
         </p:grpSp>
+      </p:grpSp>
+      <p:grpSp>
+        <p:nvGrpSpPr>
+          <p:cNvPr id="61" name="グループ化 60"/>
+          <p:cNvGrpSpPr>
+            <a:grpSpLocks noChangeAspect="1"/>
+          </p:cNvGrpSpPr>
+          <p:nvPr/>
+        </p:nvGrpSpPr>
+        <p:grpSpPr>
+          <a:xfrm>
+            <a:off x="-78538" y="4515358"/>
+            <a:ext cx="4567078" cy="2342642"/>
+            <a:chOff x="4043522" y="-62304"/>
+            <a:chExt cx="6286500" cy="3224604"/>
+          </a:xfrm>
+        </p:grpSpPr>
+        <p:sp>
+          <p:nvSpPr>
+            <p:cNvPr id="66" name="角丸四角形 65"/>
+            <p:cNvSpPr/>
+            <p:nvPr/>
+          </p:nvSpPr>
+          <p:spPr>
+            <a:xfrm>
+              <a:off x="4043522" y="446075"/>
+              <a:ext cx="6286500" cy="2716225"/>
+            </a:xfrm>
+            <a:prstGeom prst="roundRect">
+              <a:avLst/>
+            </a:prstGeom>
+            <a:solidFill>
+              <a:schemeClr val="bg1">
+                <a:lumMod val="95000"/>
+                <a:alpha val="37000"/>
+              </a:schemeClr>
+            </a:solidFill>
+            <a:ln w="38100">
+              <a:solidFill>
+                <a:schemeClr val="tx1"/>
+              </a:solidFill>
+            </a:ln>
+          </p:spPr>
+          <p:style>
+            <a:lnRef idx="2">
+              <a:schemeClr val="accent1">
+                <a:shade val="50000"/>
+              </a:schemeClr>
+            </a:lnRef>
+            <a:fillRef idx="1">
+              <a:schemeClr val="accent1"/>
+            </a:fillRef>
+            <a:effectRef idx="0">
+              <a:schemeClr val="accent1"/>
+            </a:effectRef>
+            <a:fontRef idx="minor">
+              <a:schemeClr val="lt1"/>
+            </a:fontRef>
+          </p:style>
+          <p:txBody>
+            <a:bodyPr rtlCol="0" anchor="ctr"/>
+            <a:lstStyle/>
+            <a:p>
+              <a:pPr algn="ctr"/>
+              <a:endParaRPr kumimoji="1" lang="ja-JP" altLang="en-US"/>
+            </a:p>
+          </p:txBody>
+        </p:sp>
+        <p:sp>
+          <p:nvSpPr>
+            <p:cNvPr id="67" name="テキスト ボックス 66"/>
+            <p:cNvSpPr txBox="1"/>
+            <p:nvPr/>
+          </p:nvSpPr>
+          <p:spPr>
+            <a:xfrm>
+              <a:off x="6577292" y="-62304"/>
+              <a:ext cx="1356769" cy="508379"/>
+            </a:xfrm>
+            <a:prstGeom prst="rect">
+              <a:avLst/>
+            </a:prstGeom>
+            <a:noFill/>
+          </p:spPr>
+          <p:txBody>
+            <a:bodyPr wrap="square" rtlCol="0">
+              <a:spAutoFit/>
+            </a:bodyPr>
+            <a:lstStyle/>
+            <a:p>
+              <a:r>
+                <a:rPr lang="en-US" altLang="ja-JP" dirty="0" smtClean="0"/>
+                <a:t>Prod.3</a:t>
+              </a:r>
+              <a:endParaRPr kumimoji="1" lang="ja-JP" altLang="en-US" dirty="0"/>
+            </a:p>
+          </p:txBody>
+        </p:sp>
+        <p:grpSp>
+          <p:nvGrpSpPr>
+            <p:cNvPr id="68" name="グループ化 67"/>
+            <p:cNvGrpSpPr/>
+            <p:nvPr/>
+          </p:nvGrpSpPr>
+          <p:grpSpPr>
+            <a:xfrm>
+              <a:off x="6471141" y="463701"/>
+              <a:ext cx="1293454" cy="1192916"/>
+              <a:chOff x="6661641" y="448781"/>
+              <a:chExt cx="1293454" cy="1192916"/>
+            </a:xfrm>
+          </p:grpSpPr>
+          <p:pic>
+            <p:nvPicPr>
+              <p:cNvPr id="75" name="図 74"/>
+              <p:cNvPicPr>
+                <a:picLocks noChangeAspect="1"/>
+              </p:cNvPicPr>
+              <p:nvPr/>
+            </p:nvPicPr>
+            <p:blipFill>
+              <a:blip r:embed="rId3"/>
+              <a:stretch>
+                <a:fillRect/>
+              </a:stretch>
+            </p:blipFill>
+            <p:spPr>
+              <a:xfrm>
+                <a:off x="6885286" y="795531"/>
+                <a:ext cx="846166" cy="846166"/>
+              </a:xfrm>
+              <a:prstGeom prst="rect">
+                <a:avLst/>
+              </a:prstGeom>
+            </p:spPr>
+          </p:pic>
+          <p:sp>
+            <p:nvSpPr>
+              <p:cNvPr id="76" name="テキスト ボックス 75"/>
+              <p:cNvSpPr txBox="1"/>
+              <p:nvPr/>
+            </p:nvSpPr>
+            <p:spPr>
+              <a:xfrm>
+                <a:off x="6661641" y="448781"/>
+                <a:ext cx="1293454" cy="360102"/>
+              </a:xfrm>
+              <a:prstGeom prst="rect">
+                <a:avLst/>
+              </a:prstGeom>
+              <a:noFill/>
+            </p:spPr>
+            <p:txBody>
+              <a:bodyPr wrap="none" rtlCol="0">
+                <a:spAutoFit/>
+              </a:bodyPr>
+              <a:lstStyle/>
+              <a:p>
+                <a:r>
+                  <a:rPr lang="en-US" altLang="ja-JP" sz="1050" dirty="0" smtClean="0"/>
+                  <a:t>Syslog Server</a:t>
+                </a:r>
+                <a:endParaRPr kumimoji="1" lang="ja-JP" altLang="en-US" sz="1050" dirty="0"/>
+              </a:p>
+            </p:txBody>
+          </p:sp>
+        </p:grpSp>
+        <p:grpSp>
+          <p:nvGrpSpPr>
+            <p:cNvPr id="69" name="グループ化 68"/>
+            <p:cNvGrpSpPr>
+              <a:grpSpLocks noChangeAspect="1"/>
+            </p:cNvGrpSpPr>
+            <p:nvPr/>
+          </p:nvGrpSpPr>
+          <p:grpSpPr>
+            <a:xfrm>
+              <a:off x="4887523" y="1823913"/>
+              <a:ext cx="4598498" cy="1130852"/>
+              <a:chOff x="4374052" y="1505122"/>
+              <a:chExt cx="6055647" cy="1489191"/>
+            </a:xfrm>
+          </p:grpSpPr>
+          <p:pic>
+            <p:nvPicPr>
+              <p:cNvPr id="70" name="図 69"/>
+              <p:cNvPicPr>
+                <a:picLocks noChangeAspect="1"/>
+              </p:cNvPicPr>
+              <p:nvPr/>
+            </p:nvPicPr>
+            <p:blipFill>
+              <a:blip r:embed="rId4"/>
+              <a:stretch>
+                <a:fillRect/>
+              </a:stretch>
+            </p:blipFill>
+            <p:spPr>
+              <a:xfrm>
+                <a:off x="4374052" y="1505122"/>
+                <a:ext cx="1489191" cy="1489191"/>
+              </a:xfrm>
+              <a:prstGeom prst="rect">
+                <a:avLst/>
+              </a:prstGeom>
+            </p:spPr>
+          </p:pic>
+          <p:pic>
+            <p:nvPicPr>
+              <p:cNvPr id="71" name="図 70"/>
+              <p:cNvPicPr>
+                <a:picLocks noChangeAspect="1"/>
+              </p:cNvPicPr>
+              <p:nvPr/>
+            </p:nvPicPr>
+            <p:blipFill>
+              <a:blip r:embed="rId4"/>
+              <a:stretch>
+                <a:fillRect/>
+              </a:stretch>
+            </p:blipFill>
+            <p:spPr>
+              <a:xfrm>
+                <a:off x="5515666" y="1505122"/>
+                <a:ext cx="1489191" cy="1489191"/>
+              </a:xfrm>
+              <a:prstGeom prst="rect">
+                <a:avLst/>
+              </a:prstGeom>
+            </p:spPr>
+          </p:pic>
+          <p:pic>
+            <p:nvPicPr>
+              <p:cNvPr id="72" name="図 71"/>
+              <p:cNvPicPr>
+                <a:picLocks noChangeAspect="1"/>
+              </p:cNvPicPr>
+              <p:nvPr/>
+            </p:nvPicPr>
+            <p:blipFill>
+              <a:blip r:embed="rId4"/>
+              <a:stretch>
+                <a:fillRect/>
+              </a:stretch>
+            </p:blipFill>
+            <p:spPr>
+              <a:xfrm>
+                <a:off x="6657280" y="1505122"/>
+                <a:ext cx="1489191" cy="1489191"/>
+              </a:xfrm>
+              <a:prstGeom prst="rect">
+                <a:avLst/>
+              </a:prstGeom>
+            </p:spPr>
+          </p:pic>
+          <p:sp>
+            <p:nvSpPr>
+              <p:cNvPr id="73" name="テキスト ボックス 72"/>
+              <p:cNvSpPr txBox="1"/>
+              <p:nvPr/>
+            </p:nvSpPr>
+            <p:spPr>
+              <a:xfrm>
+                <a:off x="8117921" y="1945739"/>
+                <a:ext cx="851137" cy="607955"/>
+              </a:xfrm>
+              <a:prstGeom prst="rect">
+                <a:avLst/>
+              </a:prstGeom>
+              <a:noFill/>
+            </p:spPr>
+            <p:txBody>
+              <a:bodyPr wrap="none" rtlCol="0">
+                <a:spAutoFit/>
+              </a:bodyPr>
+              <a:lstStyle/>
+              <a:p>
+                <a:r>
+                  <a:rPr lang="ja-JP" altLang="en-US" sz="2400" dirty="0" smtClean="0"/>
+                  <a:t>・・・</a:t>
+                </a:r>
+                <a:endParaRPr kumimoji="1" lang="ja-JP" altLang="en-US" sz="2400" dirty="0"/>
+              </a:p>
+            </p:txBody>
+          </p:sp>
+          <p:pic>
+            <p:nvPicPr>
+              <p:cNvPr id="74" name="図 73"/>
+              <p:cNvPicPr>
+                <a:picLocks noChangeAspect="1"/>
+              </p:cNvPicPr>
+              <p:nvPr/>
+            </p:nvPicPr>
+            <p:blipFill>
+              <a:blip r:embed="rId4"/>
+              <a:stretch>
+                <a:fillRect/>
+              </a:stretch>
+            </p:blipFill>
+            <p:spPr>
+              <a:xfrm>
+                <a:off x="8940508" y="1505122"/>
+                <a:ext cx="1489191" cy="1489191"/>
+              </a:xfrm>
+              <a:prstGeom prst="rect">
+                <a:avLst/>
+              </a:prstGeom>
+            </p:spPr>
+          </p:pic>
+        </p:grpSp>
+      </p:grpSp>
+      <p:grpSp>
+        <p:nvGrpSpPr>
+          <p:cNvPr id="103" name="グループ化 102"/>
+          <p:cNvGrpSpPr/>
+          <p:nvPr/>
+        </p:nvGrpSpPr>
+        <p:grpSpPr>
+          <a:xfrm>
+            <a:off x="-3156765" y="29147"/>
+            <a:ext cx="4768499" cy="952500"/>
+            <a:chOff x="-3156765" y="29147"/>
+            <a:chExt cx="4768499" cy="952500"/>
+          </a:xfrm>
+        </p:grpSpPr>
+        <p:cxnSp>
+          <p:nvCxnSpPr>
+            <p:cNvPr id="62" name="直線矢印コネクタ 61"/>
+            <p:cNvCxnSpPr>
+              <a:stCxn id="99" idx="3"/>
+            </p:cNvCxnSpPr>
+            <p:nvPr/>
+          </p:nvCxnSpPr>
+          <p:spPr>
+            <a:xfrm>
+              <a:off x="-2204266" y="505397"/>
+              <a:ext cx="3816000" cy="0"/>
+            </a:xfrm>
+            <a:prstGeom prst="straightConnector1">
+              <a:avLst/>
+            </a:prstGeom>
+            <a:ln w="76200">
+              <a:solidFill>
+                <a:schemeClr val="tx1"/>
+              </a:solidFill>
+              <a:tailEnd type="triangle"/>
+            </a:ln>
+          </p:spPr>
+          <p:style>
+            <a:lnRef idx="1">
+              <a:schemeClr val="accent1"/>
+            </a:lnRef>
+            <a:fillRef idx="0">
+              <a:schemeClr val="accent1"/>
+            </a:fillRef>
+            <a:effectRef idx="0">
+              <a:schemeClr val="accent1"/>
+            </a:effectRef>
+            <a:fontRef idx="minor">
+              <a:schemeClr val="tx1"/>
+            </a:fontRef>
+          </p:style>
+        </p:cxnSp>
+        <p:sp>
+          <p:nvSpPr>
+            <p:cNvPr id="65" name="テキスト ボックス 64"/>
+            <p:cNvSpPr txBox="1"/>
+            <p:nvPr/>
+          </p:nvSpPr>
+          <p:spPr>
+            <a:xfrm>
+              <a:off x="-2247209" y="88135"/>
+              <a:ext cx="1554721" cy="369332"/>
+            </a:xfrm>
+            <a:prstGeom prst="rect">
+              <a:avLst/>
+            </a:prstGeom>
+            <a:noFill/>
+          </p:spPr>
+          <p:txBody>
+            <a:bodyPr wrap="none" rtlCol="0">
+              <a:spAutoFit/>
+            </a:bodyPr>
+            <a:lstStyle/>
+            <a:p>
+              <a:r>
+                <a:rPr lang="en-US" altLang="ja-JP" dirty="0" smtClean="0"/>
+                <a:t>Manual </a:t>
+              </a:r>
+              <a:r>
+                <a:rPr lang="en-US" altLang="ja-JP" dirty="0" err="1" smtClean="0"/>
+                <a:t>Maint</a:t>
+              </a:r>
+              <a:r>
+                <a:rPr lang="en-US" altLang="ja-JP" dirty="0" smtClean="0"/>
+                <a:t>.</a:t>
+              </a:r>
+              <a:endParaRPr kumimoji="1" lang="ja-JP" altLang="en-US" dirty="0"/>
+            </a:p>
+          </p:txBody>
+        </p:sp>
+        <p:pic>
+          <p:nvPicPr>
+            <p:cNvPr id="99" name="図 98"/>
+            <p:cNvPicPr>
+              <a:picLocks noChangeAspect="1"/>
+            </p:cNvPicPr>
+            <p:nvPr/>
+          </p:nvPicPr>
+          <p:blipFill>
+            <a:blip r:embed="rId5"/>
+            <a:stretch>
+              <a:fillRect/>
+            </a:stretch>
+          </p:blipFill>
+          <p:spPr>
+            <a:xfrm>
+              <a:off x="-3156765" y="29147"/>
+              <a:ext cx="952500" cy="952500"/>
+            </a:xfrm>
+            <a:prstGeom prst="rect">
+              <a:avLst/>
+            </a:prstGeom>
+          </p:spPr>
+        </p:pic>
+      </p:grpSp>
+      <p:grpSp>
+        <p:nvGrpSpPr>
+          <p:cNvPr id="104" name="グループ化 103"/>
+          <p:cNvGrpSpPr/>
+          <p:nvPr/>
+        </p:nvGrpSpPr>
+        <p:grpSpPr>
+          <a:xfrm>
+            <a:off x="-3156765" y="2458772"/>
+            <a:ext cx="4768499" cy="952500"/>
+            <a:chOff x="-3156765" y="29147"/>
+            <a:chExt cx="4768499" cy="952500"/>
+          </a:xfrm>
+        </p:grpSpPr>
+        <p:cxnSp>
+          <p:nvCxnSpPr>
+            <p:cNvPr id="105" name="直線矢印コネクタ 104"/>
+            <p:cNvCxnSpPr>
+              <a:stCxn id="107" idx="3"/>
+            </p:cNvCxnSpPr>
+            <p:nvPr/>
+          </p:nvCxnSpPr>
+          <p:spPr>
+            <a:xfrm>
+              <a:off x="-2204266" y="505397"/>
+              <a:ext cx="3816000" cy="0"/>
+            </a:xfrm>
+            <a:prstGeom prst="straightConnector1">
+              <a:avLst/>
+            </a:prstGeom>
+            <a:ln w="76200">
+              <a:solidFill>
+                <a:schemeClr val="tx1"/>
+              </a:solidFill>
+              <a:tailEnd type="triangle"/>
+            </a:ln>
+          </p:spPr>
+          <p:style>
+            <a:lnRef idx="1">
+              <a:schemeClr val="accent1"/>
+            </a:lnRef>
+            <a:fillRef idx="0">
+              <a:schemeClr val="accent1"/>
+            </a:fillRef>
+            <a:effectRef idx="0">
+              <a:schemeClr val="accent1"/>
+            </a:effectRef>
+            <a:fontRef idx="minor">
+              <a:schemeClr val="tx1"/>
+            </a:fontRef>
+          </p:style>
+        </p:cxnSp>
+        <p:sp>
+          <p:nvSpPr>
+            <p:cNvPr id="106" name="テキスト ボックス 105"/>
+            <p:cNvSpPr txBox="1"/>
+            <p:nvPr/>
+          </p:nvSpPr>
+          <p:spPr>
+            <a:xfrm>
+              <a:off x="-2247209" y="88135"/>
+              <a:ext cx="1554721" cy="369332"/>
+            </a:xfrm>
+            <a:prstGeom prst="rect">
+              <a:avLst/>
+            </a:prstGeom>
+            <a:noFill/>
+          </p:spPr>
+          <p:txBody>
+            <a:bodyPr wrap="none" rtlCol="0">
+              <a:spAutoFit/>
+            </a:bodyPr>
+            <a:lstStyle/>
+            <a:p>
+              <a:r>
+                <a:rPr lang="en-US" altLang="ja-JP" dirty="0" smtClean="0"/>
+                <a:t>Manual </a:t>
+              </a:r>
+              <a:r>
+                <a:rPr lang="en-US" altLang="ja-JP" dirty="0" err="1" smtClean="0"/>
+                <a:t>Maint</a:t>
+              </a:r>
+              <a:r>
+                <a:rPr lang="en-US" altLang="ja-JP" dirty="0" smtClean="0"/>
+                <a:t>.</a:t>
+              </a:r>
+              <a:endParaRPr kumimoji="1" lang="ja-JP" altLang="en-US" dirty="0"/>
+            </a:p>
+          </p:txBody>
+        </p:sp>
+        <p:pic>
+          <p:nvPicPr>
+            <p:cNvPr id="107" name="図 106"/>
+            <p:cNvPicPr>
+              <a:picLocks noChangeAspect="1"/>
+            </p:cNvPicPr>
+            <p:nvPr/>
+          </p:nvPicPr>
+          <p:blipFill>
+            <a:blip r:embed="rId5"/>
+            <a:stretch>
+              <a:fillRect/>
+            </a:stretch>
+          </p:blipFill>
+          <p:spPr>
+            <a:xfrm>
+              <a:off x="-3156765" y="29147"/>
+              <a:ext cx="952500" cy="952500"/>
+            </a:xfrm>
+            <a:prstGeom prst="rect">
+              <a:avLst/>
+            </a:prstGeom>
+          </p:spPr>
+        </p:pic>
+      </p:grpSp>
+      <p:grpSp>
+        <p:nvGrpSpPr>
+          <p:cNvPr id="108" name="グループ化 107"/>
+          <p:cNvGrpSpPr/>
+          <p:nvPr/>
+        </p:nvGrpSpPr>
+        <p:grpSpPr>
+          <a:xfrm>
+            <a:off x="-3156765" y="4888397"/>
+            <a:ext cx="4768499" cy="952500"/>
+            <a:chOff x="-3156765" y="29147"/>
+            <a:chExt cx="4768499" cy="952500"/>
+          </a:xfrm>
+        </p:grpSpPr>
+        <p:cxnSp>
+          <p:nvCxnSpPr>
+            <p:cNvPr id="109" name="直線矢印コネクタ 108"/>
+            <p:cNvCxnSpPr>
+              <a:stCxn id="111" idx="3"/>
+            </p:cNvCxnSpPr>
+            <p:nvPr/>
+          </p:nvCxnSpPr>
+          <p:spPr>
+            <a:xfrm>
+              <a:off x="-2204266" y="505397"/>
+              <a:ext cx="3816000" cy="0"/>
+            </a:xfrm>
+            <a:prstGeom prst="straightConnector1">
+              <a:avLst/>
+            </a:prstGeom>
+            <a:ln w="76200">
+              <a:solidFill>
+                <a:schemeClr val="tx1"/>
+              </a:solidFill>
+              <a:tailEnd type="triangle"/>
+            </a:ln>
+          </p:spPr>
+          <p:style>
+            <a:lnRef idx="1">
+              <a:schemeClr val="accent1"/>
+            </a:lnRef>
+            <a:fillRef idx="0">
+              <a:schemeClr val="accent1"/>
+            </a:fillRef>
+            <a:effectRef idx="0">
+              <a:schemeClr val="accent1"/>
+            </a:effectRef>
+            <a:fontRef idx="minor">
+              <a:schemeClr val="tx1"/>
+            </a:fontRef>
+          </p:style>
+        </p:cxnSp>
+        <p:sp>
+          <p:nvSpPr>
+            <p:cNvPr id="110" name="テキスト ボックス 109"/>
+            <p:cNvSpPr txBox="1"/>
+            <p:nvPr/>
+          </p:nvSpPr>
+          <p:spPr>
+            <a:xfrm>
+              <a:off x="-2247209" y="88135"/>
+              <a:ext cx="1554721" cy="369332"/>
+            </a:xfrm>
+            <a:prstGeom prst="rect">
+              <a:avLst/>
+            </a:prstGeom>
+            <a:noFill/>
+          </p:spPr>
+          <p:txBody>
+            <a:bodyPr wrap="none" rtlCol="0">
+              <a:spAutoFit/>
+            </a:bodyPr>
+            <a:lstStyle/>
+            <a:p>
+              <a:r>
+                <a:rPr lang="en-US" altLang="ja-JP" dirty="0" smtClean="0"/>
+                <a:t>Manual </a:t>
+              </a:r>
+              <a:r>
+                <a:rPr lang="en-US" altLang="ja-JP" dirty="0" err="1" smtClean="0"/>
+                <a:t>Maint</a:t>
+              </a:r>
+              <a:r>
+                <a:rPr lang="en-US" altLang="ja-JP" dirty="0" smtClean="0"/>
+                <a:t>.</a:t>
+              </a:r>
+              <a:endParaRPr kumimoji="1" lang="ja-JP" altLang="en-US" dirty="0"/>
+            </a:p>
+          </p:txBody>
+        </p:sp>
+        <p:pic>
+          <p:nvPicPr>
+            <p:cNvPr id="111" name="図 110"/>
+            <p:cNvPicPr>
+              <a:picLocks noChangeAspect="1"/>
+            </p:cNvPicPr>
+            <p:nvPr/>
+          </p:nvPicPr>
+          <p:blipFill>
+            <a:blip r:embed="rId5"/>
+            <a:stretch>
+              <a:fillRect/>
+            </a:stretch>
+          </p:blipFill>
+          <p:spPr>
+            <a:xfrm>
+              <a:off x="-3156765" y="29147"/>
+              <a:ext cx="952500" cy="952500"/>
+            </a:xfrm>
+            <a:prstGeom prst="rect">
+              <a:avLst/>
+            </a:prstGeom>
+          </p:spPr>
+        </p:pic>
       </p:grpSp>
       <p:sp>
         <p:nvSpPr>
@@ -9161,6 +9148,1764 @@
     <p:extLst>
       <p:ext uri="{BB962C8B-B14F-4D97-AF65-F5344CB8AC3E}">
         <p14:creationId xmlns:p14="http://schemas.microsoft.com/office/powerpoint/2010/main" val="2387010641"/>
+      </p:ext>
+    </p:extLst>
+  </p:cSld>
+  <p:clrMapOvr>
+    <a:masterClrMapping/>
+  </p:clrMapOvr>
+</p:sld>
+</file>
+
+<file path=ppt/slides/slide5.xml><?xml version="1.0" encoding="utf-8"?>
+<p:sld xmlns:a="http://schemas.openxmlformats.org/drawingml/2006/main" xmlns:r="http://schemas.openxmlformats.org/officeDocument/2006/relationships" xmlns:p="http://schemas.openxmlformats.org/presentationml/2006/main">
+  <p:cSld>
+    <p:spTree>
+      <p:nvGrpSpPr>
+        <p:cNvPr id="1" name=""/>
+        <p:cNvGrpSpPr/>
+        <p:nvPr/>
+      </p:nvGrpSpPr>
+      <p:grpSpPr>
+        <a:xfrm>
+          <a:off x="0" y="0"/>
+          <a:ext cx="0" cy="0"/>
+          <a:chOff x="0" y="0"/>
+          <a:chExt cx="0" cy="0"/>
+        </a:xfrm>
+      </p:grpSpPr>
+      <p:sp>
+        <p:nvSpPr>
+          <p:cNvPr id="19" name="角丸四角形 18"/>
+          <p:cNvSpPr/>
+          <p:nvPr/>
+        </p:nvSpPr>
+        <p:spPr>
+          <a:xfrm>
+            <a:off x="1894179" y="724743"/>
+            <a:ext cx="9771761" cy="5990382"/>
+          </a:xfrm>
+          <a:prstGeom prst="roundRect">
+            <a:avLst/>
+          </a:prstGeom>
+          <a:solidFill>
+            <a:schemeClr val="bg1"/>
+          </a:solidFill>
+          <a:ln w="38100">
+            <a:solidFill>
+              <a:schemeClr val="tx1"/>
+            </a:solidFill>
+          </a:ln>
+        </p:spPr>
+        <p:style>
+          <a:lnRef idx="2">
+            <a:schemeClr val="accent1">
+              <a:shade val="50000"/>
+            </a:schemeClr>
+          </a:lnRef>
+          <a:fillRef idx="1">
+            <a:schemeClr val="accent1"/>
+          </a:fillRef>
+          <a:effectRef idx="0">
+            <a:schemeClr val="accent1"/>
+          </a:effectRef>
+          <a:fontRef idx="minor">
+            <a:schemeClr val="lt1"/>
+          </a:fontRef>
+        </p:style>
+        <p:txBody>
+          <a:bodyPr rtlCol="0" anchor="ctr"/>
+          <a:lstStyle/>
+          <a:p>
+            <a:pPr algn="ctr"/>
+            <a:endParaRPr kumimoji="1" lang="ja-JP" altLang="en-US"/>
+          </a:p>
+        </p:txBody>
+      </p:sp>
+      <p:sp>
+        <p:nvSpPr>
+          <p:cNvPr id="20" name="角丸四角形 19"/>
+          <p:cNvSpPr/>
+          <p:nvPr/>
+        </p:nvSpPr>
+        <p:spPr>
+          <a:xfrm>
+            <a:off x="2295075" y="1248266"/>
+            <a:ext cx="5088706" cy="2287298"/>
+          </a:xfrm>
+          <a:prstGeom prst="roundRect">
+            <a:avLst/>
+          </a:prstGeom>
+          <a:solidFill>
+            <a:schemeClr val="bg1">
+              <a:lumMod val="95000"/>
+              <a:alpha val="37000"/>
+            </a:schemeClr>
+          </a:solidFill>
+          <a:ln w="38100">
+            <a:solidFill>
+              <a:schemeClr val="tx1"/>
+            </a:solidFill>
+          </a:ln>
+        </p:spPr>
+        <p:style>
+          <a:lnRef idx="2">
+            <a:schemeClr val="accent1">
+              <a:shade val="50000"/>
+            </a:schemeClr>
+          </a:lnRef>
+          <a:fillRef idx="1">
+            <a:schemeClr val="accent1"/>
+          </a:fillRef>
+          <a:effectRef idx="0">
+            <a:schemeClr val="accent1"/>
+          </a:effectRef>
+          <a:fontRef idx="minor">
+            <a:schemeClr val="lt1"/>
+          </a:fontRef>
+        </p:style>
+        <p:txBody>
+          <a:bodyPr rtlCol="0" anchor="ctr"/>
+          <a:lstStyle/>
+          <a:p>
+            <a:pPr algn="ctr"/>
+            <a:endParaRPr kumimoji="1" lang="ja-JP" altLang="en-US"/>
+          </a:p>
+        </p:txBody>
+      </p:sp>
+      <p:pic>
+        <p:nvPicPr>
+          <p:cNvPr id="23" name="図 22"/>
+          <p:cNvPicPr>
+            <a:picLocks noChangeAspect="1"/>
+          </p:cNvPicPr>
+          <p:nvPr/>
+        </p:nvPicPr>
+        <p:blipFill>
+          <a:blip r:embed="rId2"/>
+          <a:stretch>
+            <a:fillRect/>
+          </a:stretch>
+        </p:blipFill>
+        <p:spPr>
+          <a:xfrm>
+            <a:off x="2463538" y="2458022"/>
+            <a:ext cx="821553" cy="821552"/>
+          </a:xfrm>
+          <a:prstGeom prst="rect">
+            <a:avLst/>
+          </a:prstGeom>
+        </p:spPr>
+      </p:pic>
+      <p:sp>
+        <p:nvSpPr>
+          <p:cNvPr id="24" name="テキスト ボックス 23"/>
+          <p:cNvSpPr txBox="1"/>
+          <p:nvPr/>
+        </p:nvSpPr>
+        <p:spPr>
+          <a:xfrm>
+            <a:off x="4449906" y="2637964"/>
+            <a:ext cx="685859" cy="461665"/>
+          </a:xfrm>
+          <a:prstGeom prst="rect">
+            <a:avLst/>
+          </a:prstGeom>
+          <a:noFill/>
+        </p:spPr>
+        <p:txBody>
+          <a:bodyPr wrap="square" rtlCol="0">
+            <a:spAutoFit/>
+          </a:bodyPr>
+          <a:lstStyle/>
+          <a:p>
+            <a:pPr algn="ctr"/>
+            <a:r>
+              <a:rPr lang="ja-JP" altLang="en-US" sz="2400" dirty="0" smtClean="0"/>
+              <a:t>・・・</a:t>
+            </a:r>
+            <a:endParaRPr kumimoji="1" lang="ja-JP" altLang="en-US" sz="2400" dirty="0"/>
+          </a:p>
+        </p:txBody>
+      </p:sp>
+      <p:pic>
+        <p:nvPicPr>
+          <p:cNvPr id="27" name="図 26"/>
+          <p:cNvPicPr>
+            <a:picLocks noChangeAspect="1"/>
+          </p:cNvPicPr>
+          <p:nvPr/>
+        </p:nvPicPr>
+        <p:blipFill>
+          <a:blip r:embed="rId2"/>
+          <a:stretch>
+            <a:fillRect/>
+          </a:stretch>
+        </p:blipFill>
+        <p:spPr>
+          <a:xfrm>
+            <a:off x="3087636" y="2458021"/>
+            <a:ext cx="821553" cy="821552"/>
+          </a:xfrm>
+          <a:prstGeom prst="rect">
+            <a:avLst/>
+          </a:prstGeom>
+        </p:spPr>
+      </p:pic>
+      <p:pic>
+        <p:nvPicPr>
+          <p:cNvPr id="30" name="図 29"/>
+          <p:cNvPicPr>
+            <a:picLocks noChangeAspect="1"/>
+          </p:cNvPicPr>
+          <p:nvPr/>
+        </p:nvPicPr>
+        <p:blipFill>
+          <a:blip r:embed="rId2"/>
+          <a:stretch>
+            <a:fillRect/>
+          </a:stretch>
+        </p:blipFill>
+        <p:spPr>
+          <a:xfrm>
+            <a:off x="3749662" y="2458021"/>
+            <a:ext cx="821553" cy="821552"/>
+          </a:xfrm>
+          <a:prstGeom prst="rect">
+            <a:avLst/>
+          </a:prstGeom>
+        </p:spPr>
+      </p:pic>
+      <p:pic>
+        <p:nvPicPr>
+          <p:cNvPr id="33" name="図 32"/>
+          <p:cNvPicPr>
+            <a:picLocks noChangeAspect="1"/>
+          </p:cNvPicPr>
+          <p:nvPr/>
+        </p:nvPicPr>
+        <p:blipFill>
+          <a:blip r:embed="rId2"/>
+          <a:stretch>
+            <a:fillRect/>
+          </a:stretch>
+        </p:blipFill>
+        <p:spPr>
+          <a:xfrm>
+            <a:off x="5035786" y="2458021"/>
+            <a:ext cx="821553" cy="821552"/>
+          </a:xfrm>
+          <a:prstGeom prst="rect">
+            <a:avLst/>
+          </a:prstGeom>
+        </p:spPr>
+      </p:pic>
+      <p:sp>
+        <p:nvSpPr>
+          <p:cNvPr id="35" name="テキスト ボックス 34"/>
+          <p:cNvSpPr txBox="1"/>
+          <p:nvPr/>
+        </p:nvSpPr>
+        <p:spPr>
+          <a:xfrm>
+            <a:off x="4279841" y="937234"/>
+            <a:ext cx="1025987" cy="369332"/>
+          </a:xfrm>
+          <a:prstGeom prst="rect">
+            <a:avLst/>
+          </a:prstGeom>
+          <a:noFill/>
+        </p:spPr>
+        <p:txBody>
+          <a:bodyPr wrap="none" rtlCol="0">
+            <a:spAutoFit/>
+          </a:bodyPr>
+          <a:lstStyle/>
+          <a:p>
+            <a:r>
+              <a:rPr lang="en-US" altLang="ja-JP" dirty="0" smtClean="0"/>
+              <a:t>Cluster A</a:t>
+            </a:r>
+            <a:endParaRPr kumimoji="1" lang="ja-JP" altLang="en-US" dirty="0"/>
+          </a:p>
+        </p:txBody>
+      </p:sp>
+      <p:sp>
+        <p:nvSpPr>
+          <p:cNvPr id="50" name="テキスト ボックス 49"/>
+          <p:cNvSpPr txBox="1"/>
+          <p:nvPr/>
+        </p:nvSpPr>
+        <p:spPr>
+          <a:xfrm>
+            <a:off x="5972398" y="327499"/>
+            <a:ext cx="1103379" cy="369332"/>
+          </a:xfrm>
+          <a:prstGeom prst="rect">
+            <a:avLst/>
+          </a:prstGeom>
+          <a:noFill/>
+        </p:spPr>
+        <p:txBody>
+          <a:bodyPr wrap="none" rtlCol="0">
+            <a:spAutoFit/>
+          </a:bodyPr>
+          <a:lstStyle/>
+          <a:p>
+            <a:r>
+              <a:rPr lang="en-US" altLang="ja-JP" dirty="0" err="1" smtClean="0"/>
+              <a:t>vCenter</a:t>
+            </a:r>
+            <a:r>
+              <a:rPr lang="en-US" altLang="ja-JP" dirty="0" smtClean="0"/>
+              <a:t> A</a:t>
+            </a:r>
+            <a:endParaRPr kumimoji="1" lang="ja-JP" altLang="en-US" dirty="0"/>
+          </a:p>
+        </p:txBody>
+      </p:sp>
+      <p:pic>
+        <p:nvPicPr>
+          <p:cNvPr id="52" name="図 51"/>
+          <p:cNvPicPr>
+            <a:picLocks noChangeAspect="1"/>
+          </p:cNvPicPr>
+          <p:nvPr/>
+        </p:nvPicPr>
+        <p:blipFill>
+          <a:blip r:embed="rId2"/>
+          <a:stretch>
+            <a:fillRect/>
+          </a:stretch>
+        </p:blipFill>
+        <p:spPr>
+          <a:xfrm>
+            <a:off x="5702535" y="2456838"/>
+            <a:ext cx="821553" cy="821552"/>
+          </a:xfrm>
+          <a:prstGeom prst="rect">
+            <a:avLst/>
+          </a:prstGeom>
+        </p:spPr>
+      </p:pic>
+      <p:pic>
+        <p:nvPicPr>
+          <p:cNvPr id="53" name="図 52"/>
+          <p:cNvPicPr>
+            <a:picLocks noChangeAspect="1"/>
+          </p:cNvPicPr>
+          <p:nvPr/>
+        </p:nvPicPr>
+        <p:blipFill>
+          <a:blip r:embed="rId2"/>
+          <a:stretch>
+            <a:fillRect/>
+          </a:stretch>
+        </p:blipFill>
+        <p:spPr>
+          <a:xfrm>
+            <a:off x="6369284" y="2455655"/>
+            <a:ext cx="821553" cy="821552"/>
+          </a:xfrm>
+          <a:prstGeom prst="rect">
+            <a:avLst/>
+          </a:prstGeom>
+        </p:spPr>
+      </p:pic>
+      <p:pic>
+        <p:nvPicPr>
+          <p:cNvPr id="1026" name="Picture 2" descr="曲がる｜矢印 - クリップアート / イラスト / 無料 / アイコン / シンボル / シルエット/マーク / 背景透明"/>
+          <p:cNvPicPr>
+            <a:picLocks noChangeAspect="1" noChangeArrowheads="1"/>
+          </p:cNvPicPr>
+          <p:nvPr/>
+        </p:nvPicPr>
+        <p:blipFill>
+          <a:blip r:embed="rId3" cstate="print">
+            <a:extLst>
+              <a:ext uri="{28A0092B-C50C-407E-A947-70E740481C1C}">
+                <a14:useLocalDpi xmlns:a14="http://schemas.microsoft.com/office/drawing/2010/main" val="0"/>
+              </a:ext>
+            </a:extLst>
+          </a:blip>
+          <a:srcRect/>
+          <a:stretch>
+            <a:fillRect/>
+          </a:stretch>
+        </p:blipFill>
+        <p:spPr bwMode="auto">
+          <a:xfrm rot="7575773">
+            <a:off x="7123066" y="1299444"/>
+            <a:ext cx="971222" cy="971222"/>
+          </a:xfrm>
+          <a:prstGeom prst="rect">
+            <a:avLst/>
+          </a:prstGeom>
+          <a:noFill/>
+          <a:extLst>
+            <a:ext uri="{909E8E84-426E-40DD-AFC4-6F175D3DCCD1}">
+              <a14:hiddenFill xmlns:a14="http://schemas.microsoft.com/office/drawing/2010/main">
+                <a:solidFill>
+                  <a:srgbClr val="FFFFFF"/>
+                </a:solidFill>
+              </a14:hiddenFill>
+            </a:ext>
+          </a:extLst>
+        </p:spPr>
+      </p:pic>
+      <p:pic>
+        <p:nvPicPr>
+          <p:cNvPr id="4" name="図 3"/>
+          <p:cNvPicPr>
+            <a:picLocks noChangeAspect="1"/>
+          </p:cNvPicPr>
+          <p:nvPr/>
+        </p:nvPicPr>
+        <p:blipFill>
+          <a:blip r:embed="rId4" cstate="print">
+            <a:extLst>
+              <a:ext uri="{28A0092B-C50C-407E-A947-70E740481C1C}">
+                <a14:useLocalDpi xmlns:a14="http://schemas.microsoft.com/office/drawing/2010/main" val="0"/>
+              </a:ext>
+            </a:extLst>
+          </a:blip>
+          <a:stretch>
+            <a:fillRect/>
+          </a:stretch>
+        </p:blipFill>
+        <p:spPr>
+          <a:xfrm>
+            <a:off x="10730121" y="3319578"/>
+            <a:ext cx="595207" cy="970529"/>
+          </a:xfrm>
+          <a:prstGeom prst="rect">
+            <a:avLst/>
+          </a:prstGeom>
+        </p:spPr>
+      </p:pic>
+      <p:sp>
+        <p:nvSpPr>
+          <p:cNvPr id="58" name="左矢印 57"/>
+          <p:cNvSpPr/>
+          <p:nvPr/>
+        </p:nvSpPr>
+        <p:spPr>
+          <a:xfrm>
+            <a:off x="2638425" y="1943740"/>
+            <a:ext cx="4374065" cy="369227"/>
+          </a:xfrm>
+          <a:prstGeom prst="leftArrow">
+            <a:avLst>
+              <a:gd name="adj1" fmla="val 50000"/>
+              <a:gd name="adj2" fmla="val 79172"/>
+            </a:avLst>
+          </a:prstGeom>
+          <a:solidFill>
+            <a:schemeClr val="accent2">
+              <a:lumMod val="40000"/>
+              <a:lumOff val="60000"/>
+            </a:schemeClr>
+          </a:solidFill>
+          <a:ln w="38100">
+            <a:solidFill>
+              <a:schemeClr val="accent2"/>
+            </a:solidFill>
+          </a:ln>
+        </p:spPr>
+        <p:style>
+          <a:lnRef idx="2">
+            <a:schemeClr val="accent1">
+              <a:shade val="50000"/>
+            </a:schemeClr>
+          </a:lnRef>
+          <a:fillRef idx="1">
+            <a:schemeClr val="accent1"/>
+          </a:fillRef>
+          <a:effectRef idx="0">
+            <a:schemeClr val="accent1"/>
+          </a:effectRef>
+          <a:fontRef idx="minor">
+            <a:schemeClr val="lt1"/>
+          </a:fontRef>
+        </p:style>
+        <p:txBody>
+          <a:bodyPr rtlCol="0" anchor="ctr"/>
+          <a:lstStyle/>
+          <a:p>
+            <a:pPr algn="ctr"/>
+            <a:endParaRPr kumimoji="1" lang="ja-JP" altLang="en-US"/>
+          </a:p>
+        </p:txBody>
+      </p:sp>
+      <p:sp>
+        <p:nvSpPr>
+          <p:cNvPr id="63" name="テキスト ボックス 62"/>
+          <p:cNvSpPr txBox="1"/>
+          <p:nvPr/>
+        </p:nvSpPr>
+        <p:spPr>
+          <a:xfrm>
+            <a:off x="3833222" y="1564965"/>
+            <a:ext cx="2012410" cy="461665"/>
+          </a:xfrm>
+          <a:prstGeom prst="rect">
+            <a:avLst/>
+          </a:prstGeom>
+          <a:noFill/>
+        </p:spPr>
+        <p:txBody>
+          <a:bodyPr wrap="none" rtlCol="0">
+            <a:spAutoFit/>
+          </a:bodyPr>
+          <a:lstStyle/>
+          <a:p>
+            <a:pPr algn="ctr"/>
+            <a:r>
+              <a:rPr lang="en-US" altLang="ja-JP" sz="2400" dirty="0" smtClean="0">
+                <a:solidFill>
+                  <a:srgbClr val="FF0000"/>
+                </a:solidFill>
+              </a:rPr>
+              <a:t>Rolling Update</a:t>
+            </a:r>
+            <a:endParaRPr kumimoji="1" lang="ja-JP" altLang="en-US" sz="2400" dirty="0">
+              <a:solidFill>
+                <a:srgbClr val="FF0000"/>
+              </a:solidFill>
+            </a:endParaRPr>
+          </a:p>
+        </p:txBody>
+      </p:sp>
+      <p:sp>
+        <p:nvSpPr>
+          <p:cNvPr id="61" name="左中かっこ 60"/>
+          <p:cNvSpPr/>
+          <p:nvPr/>
+        </p:nvSpPr>
+        <p:spPr>
+          <a:xfrm>
+            <a:off x="1561194" y="1248266"/>
+            <a:ext cx="659799" cy="5119866"/>
+          </a:xfrm>
+          <a:prstGeom prst="leftBrace">
+            <a:avLst>
+              <a:gd name="adj1" fmla="val 73030"/>
+              <a:gd name="adj2" fmla="val 50413"/>
+            </a:avLst>
+          </a:prstGeom>
+          <a:ln w="38100">
+            <a:solidFill>
+              <a:schemeClr val="accent2"/>
+            </a:solidFill>
+          </a:ln>
+        </p:spPr>
+        <p:style>
+          <a:lnRef idx="1">
+            <a:schemeClr val="accent1"/>
+          </a:lnRef>
+          <a:fillRef idx="0">
+            <a:schemeClr val="accent1"/>
+          </a:fillRef>
+          <a:effectRef idx="0">
+            <a:schemeClr val="accent1"/>
+          </a:effectRef>
+          <a:fontRef idx="minor">
+            <a:schemeClr val="tx1"/>
+          </a:fontRef>
+        </p:style>
+        <p:txBody>
+          <a:bodyPr rtlCol="0" anchor="ctr"/>
+          <a:lstStyle/>
+          <a:p>
+            <a:pPr algn="ctr"/>
+            <a:endParaRPr kumimoji="1" lang="ja-JP" altLang="en-US"/>
+          </a:p>
+        </p:txBody>
+      </p:sp>
+      <p:sp>
+        <p:nvSpPr>
+          <p:cNvPr id="65" name="テキスト ボックス 64"/>
+          <p:cNvSpPr txBox="1"/>
+          <p:nvPr/>
+        </p:nvSpPr>
+        <p:spPr>
+          <a:xfrm>
+            <a:off x="227269" y="3577366"/>
+            <a:ext cx="1098314" cy="461665"/>
+          </a:xfrm>
+          <a:prstGeom prst="rect">
+            <a:avLst/>
+          </a:prstGeom>
+          <a:noFill/>
+        </p:spPr>
+        <p:txBody>
+          <a:bodyPr wrap="none" rtlCol="0">
+            <a:spAutoFit/>
+          </a:bodyPr>
+          <a:lstStyle/>
+          <a:p>
+            <a:pPr algn="ctr"/>
+            <a:r>
+              <a:rPr lang="en-US" altLang="ja-JP" sz="2400" dirty="0" smtClean="0">
+                <a:solidFill>
+                  <a:srgbClr val="FF0000"/>
+                </a:solidFill>
+              </a:rPr>
+              <a:t>Parallel</a:t>
+            </a:r>
+            <a:endParaRPr kumimoji="1" lang="ja-JP" altLang="en-US" sz="2400" dirty="0">
+              <a:solidFill>
+                <a:srgbClr val="FF0000"/>
+              </a:solidFill>
+            </a:endParaRPr>
+          </a:p>
+        </p:txBody>
+      </p:sp>
+      <p:grpSp>
+        <p:nvGrpSpPr>
+          <p:cNvPr id="87" name="グループ化 86"/>
+          <p:cNvGrpSpPr/>
+          <p:nvPr/>
+        </p:nvGrpSpPr>
+        <p:grpSpPr>
+          <a:xfrm>
+            <a:off x="8061469" y="2016558"/>
+            <a:ext cx="2593324" cy="1163987"/>
+            <a:chOff x="8061469" y="2111808"/>
+            <a:chExt cx="2593324" cy="1163987"/>
+          </a:xfrm>
+        </p:grpSpPr>
+        <p:pic>
+          <p:nvPicPr>
+            <p:cNvPr id="68" name="図 67"/>
+            <p:cNvPicPr>
+              <a:picLocks noChangeAspect="1"/>
+            </p:cNvPicPr>
+            <p:nvPr/>
+          </p:nvPicPr>
+          <p:blipFill>
+            <a:blip r:embed="rId2"/>
+            <a:stretch>
+              <a:fillRect/>
+            </a:stretch>
+          </p:blipFill>
+          <p:spPr>
+            <a:xfrm>
+              <a:off x="8386567" y="2454243"/>
+              <a:ext cx="821553" cy="821552"/>
+            </a:xfrm>
+            <a:prstGeom prst="rect">
+              <a:avLst/>
+            </a:prstGeom>
+          </p:spPr>
+        </p:pic>
+        <p:pic>
+          <p:nvPicPr>
+            <p:cNvPr id="69" name="図 68"/>
+            <p:cNvPicPr>
+              <a:picLocks noChangeAspect="1"/>
+            </p:cNvPicPr>
+            <p:nvPr/>
+          </p:nvPicPr>
+          <p:blipFill>
+            <a:blip r:embed="rId5"/>
+            <a:stretch>
+              <a:fillRect/>
+            </a:stretch>
+          </p:blipFill>
+          <p:spPr>
+            <a:xfrm>
+              <a:off x="8677237" y="2111808"/>
+              <a:ext cx="684870" cy="684870"/>
+            </a:xfrm>
+            <a:prstGeom prst="rect">
+              <a:avLst/>
+            </a:prstGeom>
+          </p:spPr>
+        </p:pic>
+        <p:sp>
+          <p:nvSpPr>
+            <p:cNvPr id="70" name="テキスト ボックス 69"/>
+            <p:cNvSpPr txBox="1"/>
+            <p:nvPr/>
+          </p:nvSpPr>
+          <p:spPr>
+            <a:xfrm>
+              <a:off x="9245946" y="2662522"/>
+              <a:ext cx="1408847" cy="369332"/>
+            </a:xfrm>
+            <a:prstGeom prst="rect">
+              <a:avLst/>
+            </a:prstGeom>
+            <a:noFill/>
+          </p:spPr>
+          <p:txBody>
+            <a:bodyPr wrap="none" rtlCol="0">
+              <a:spAutoFit/>
+            </a:bodyPr>
+            <a:lstStyle/>
+            <a:p>
+              <a:r>
+                <a:rPr lang="en-US" altLang="ja-JP" dirty="0" err="1" smtClean="0"/>
+                <a:t>Maint</a:t>
+              </a:r>
+              <a:r>
+                <a:rPr lang="en-US" altLang="ja-JP" dirty="0" smtClean="0"/>
+                <a:t>. Mode</a:t>
+              </a:r>
+              <a:endParaRPr kumimoji="1" lang="ja-JP" altLang="en-US" dirty="0"/>
+            </a:p>
+          </p:txBody>
+        </p:sp>
+        <p:sp>
+          <p:nvSpPr>
+            <p:cNvPr id="71" name="テキスト ボックス 70"/>
+            <p:cNvSpPr txBox="1"/>
+            <p:nvPr/>
+          </p:nvSpPr>
+          <p:spPr>
+            <a:xfrm>
+              <a:off x="8061469" y="2141988"/>
+              <a:ext cx="646011" cy="307777"/>
+            </a:xfrm>
+            <a:prstGeom prst="rect">
+              <a:avLst/>
+            </a:prstGeom>
+            <a:noFill/>
+          </p:spPr>
+          <p:txBody>
+            <a:bodyPr wrap="none" rtlCol="0">
+              <a:spAutoFit/>
+            </a:bodyPr>
+            <a:lstStyle/>
+            <a:p>
+              <a:r>
+                <a:rPr lang="en-US" altLang="ja-JP" sz="1400" dirty="0" smtClean="0"/>
+                <a:t>Step.2</a:t>
+              </a:r>
+              <a:endParaRPr kumimoji="1" lang="ja-JP" altLang="en-US" sz="1400" dirty="0"/>
+            </a:p>
+          </p:txBody>
+        </p:sp>
+      </p:grpSp>
+      <p:grpSp>
+        <p:nvGrpSpPr>
+          <p:cNvPr id="80" name="グループ化 79"/>
+          <p:cNvGrpSpPr/>
+          <p:nvPr/>
+        </p:nvGrpSpPr>
+        <p:grpSpPr>
+          <a:xfrm>
+            <a:off x="8041127" y="890048"/>
+            <a:ext cx="2501737" cy="1153383"/>
+            <a:chOff x="8041127" y="1042448"/>
+            <a:chExt cx="2501737" cy="1153383"/>
+          </a:xfrm>
+        </p:grpSpPr>
+        <p:grpSp>
+          <p:nvGrpSpPr>
+            <p:cNvPr id="64" name="グループ化 63"/>
+            <p:cNvGrpSpPr/>
+            <p:nvPr/>
+          </p:nvGrpSpPr>
+          <p:grpSpPr>
+            <a:xfrm>
+              <a:off x="8041127" y="1042448"/>
+              <a:ext cx="2501737" cy="1153383"/>
+              <a:chOff x="8041127" y="1042448"/>
+              <a:chExt cx="2501737" cy="1153383"/>
+            </a:xfrm>
+          </p:grpSpPr>
+          <p:pic>
+            <p:nvPicPr>
+              <p:cNvPr id="57" name="図 56"/>
+              <p:cNvPicPr>
+                <a:picLocks noChangeAspect="1"/>
+              </p:cNvPicPr>
+              <p:nvPr/>
+            </p:nvPicPr>
+            <p:blipFill>
+              <a:blip r:embed="rId2"/>
+              <a:stretch>
+                <a:fillRect/>
+              </a:stretch>
+            </p:blipFill>
+            <p:spPr>
+              <a:xfrm>
+                <a:off x="8384475" y="1374279"/>
+                <a:ext cx="821553" cy="821552"/>
+              </a:xfrm>
+              <a:prstGeom prst="rect">
+                <a:avLst/>
+              </a:prstGeom>
+            </p:spPr>
+          </p:pic>
+          <p:sp>
+            <p:nvSpPr>
+              <p:cNvPr id="59" name="テキスト ボックス 58"/>
+              <p:cNvSpPr txBox="1"/>
+              <p:nvPr/>
+            </p:nvSpPr>
+            <p:spPr>
+              <a:xfrm>
+                <a:off x="9243854" y="1582558"/>
+                <a:ext cx="1299010" cy="369332"/>
+              </a:xfrm>
+              <a:prstGeom prst="rect">
+                <a:avLst/>
+              </a:prstGeom>
+              <a:noFill/>
+            </p:spPr>
+            <p:txBody>
+              <a:bodyPr wrap="none" rtlCol="0">
+                <a:spAutoFit/>
+              </a:bodyPr>
+              <a:lstStyle/>
+              <a:p>
+                <a:r>
+                  <a:rPr lang="en-US" altLang="ja-JP" dirty="0" smtClean="0"/>
+                  <a:t>VM Migrate</a:t>
+                </a:r>
+                <a:endParaRPr kumimoji="1" lang="ja-JP" altLang="en-US" dirty="0"/>
+              </a:p>
+            </p:txBody>
+          </p:sp>
+          <p:sp>
+            <p:nvSpPr>
+              <p:cNvPr id="60" name="テキスト ボックス 59"/>
+              <p:cNvSpPr txBox="1"/>
+              <p:nvPr/>
+            </p:nvSpPr>
+            <p:spPr>
+              <a:xfrm>
+                <a:off x="8041127" y="1042448"/>
+                <a:ext cx="646011" cy="307777"/>
+              </a:xfrm>
+              <a:prstGeom prst="rect">
+                <a:avLst/>
+              </a:prstGeom>
+              <a:noFill/>
+            </p:spPr>
+            <p:txBody>
+              <a:bodyPr wrap="none" rtlCol="0">
+                <a:spAutoFit/>
+              </a:bodyPr>
+              <a:lstStyle/>
+              <a:p>
+                <a:r>
+                  <a:rPr lang="en-US" altLang="ja-JP" sz="1400" dirty="0" smtClean="0"/>
+                  <a:t>Step.1</a:t>
+                </a:r>
+                <a:endParaRPr kumimoji="1" lang="ja-JP" altLang="en-US" sz="1400" dirty="0"/>
+              </a:p>
+            </p:txBody>
+          </p:sp>
+        </p:grpSp>
+        <p:pic>
+          <p:nvPicPr>
+            <p:cNvPr id="66" name="図 65"/>
+            <p:cNvPicPr>
+              <a:picLocks noChangeAspect="1"/>
+            </p:cNvPicPr>
+            <p:nvPr/>
+          </p:nvPicPr>
+          <p:blipFill>
+            <a:blip r:embed="rId6"/>
+            <a:stretch>
+              <a:fillRect/>
+            </a:stretch>
+          </p:blipFill>
+          <p:spPr>
+            <a:xfrm>
+              <a:off x="8879000" y="1046413"/>
+              <a:ext cx="299849" cy="299849"/>
+            </a:xfrm>
+            <a:prstGeom prst="rect">
+              <a:avLst/>
+            </a:prstGeom>
+          </p:spPr>
+        </p:pic>
+        <p:pic>
+          <p:nvPicPr>
+            <p:cNvPr id="73" name="図 72"/>
+            <p:cNvPicPr>
+              <a:picLocks noChangeAspect="1"/>
+            </p:cNvPicPr>
+            <p:nvPr/>
+          </p:nvPicPr>
+          <p:blipFill>
+            <a:blip r:embed="rId6"/>
+            <a:stretch>
+              <a:fillRect/>
+            </a:stretch>
+          </p:blipFill>
+          <p:spPr>
+            <a:xfrm>
+              <a:off x="9210090" y="1046413"/>
+              <a:ext cx="299849" cy="299849"/>
+            </a:xfrm>
+            <a:prstGeom prst="rect">
+              <a:avLst/>
+            </a:prstGeom>
+          </p:spPr>
+        </p:pic>
+        <p:sp>
+          <p:nvSpPr>
+            <p:cNvPr id="74" name="右矢印 73"/>
+            <p:cNvSpPr/>
+            <p:nvPr/>
+          </p:nvSpPr>
+          <p:spPr>
+            <a:xfrm>
+              <a:off x="9017580" y="1078690"/>
+              <a:ext cx="775604" cy="221847"/>
+            </a:xfrm>
+            <a:prstGeom prst="rightArrow">
+              <a:avLst/>
+            </a:prstGeom>
+            <a:solidFill>
+              <a:schemeClr val="bg1">
+                <a:lumMod val="95000"/>
+                <a:alpha val="52000"/>
+              </a:schemeClr>
+            </a:solidFill>
+            <a:ln w="12700">
+              <a:solidFill>
+                <a:schemeClr val="tx1">
+                  <a:alpha val="41000"/>
+                </a:schemeClr>
+              </a:solidFill>
+            </a:ln>
+          </p:spPr>
+          <p:style>
+            <a:lnRef idx="2">
+              <a:schemeClr val="accent1">
+                <a:shade val="50000"/>
+              </a:schemeClr>
+            </a:lnRef>
+            <a:fillRef idx="1">
+              <a:schemeClr val="accent1"/>
+            </a:fillRef>
+            <a:effectRef idx="0">
+              <a:schemeClr val="accent1"/>
+            </a:effectRef>
+            <a:fontRef idx="minor">
+              <a:schemeClr val="lt1"/>
+            </a:fontRef>
+          </p:style>
+          <p:txBody>
+            <a:bodyPr rtlCol="0" anchor="ctr"/>
+            <a:lstStyle/>
+            <a:p>
+              <a:pPr algn="ctr"/>
+              <a:endParaRPr kumimoji="1" lang="ja-JP" altLang="en-US"/>
+            </a:p>
+          </p:txBody>
+        </p:sp>
+      </p:grpSp>
+      <p:grpSp>
+        <p:nvGrpSpPr>
+          <p:cNvPr id="88" name="グループ化 87"/>
+          <p:cNvGrpSpPr/>
+          <p:nvPr/>
+        </p:nvGrpSpPr>
+        <p:grpSpPr>
+          <a:xfrm>
+            <a:off x="8056496" y="3166933"/>
+            <a:ext cx="2498939" cy="1126133"/>
+            <a:chOff x="8056496" y="3443158"/>
+            <a:chExt cx="2498939" cy="1126133"/>
+          </a:xfrm>
+        </p:grpSpPr>
+        <p:pic>
+          <p:nvPicPr>
+            <p:cNvPr id="85" name="図 84"/>
+            <p:cNvPicPr>
+              <a:picLocks noChangeAspect="1"/>
+            </p:cNvPicPr>
+            <p:nvPr/>
+          </p:nvPicPr>
+          <p:blipFill>
+            <a:blip r:embed="rId5"/>
+            <a:stretch>
+              <a:fillRect/>
+            </a:stretch>
+          </p:blipFill>
+          <p:spPr>
+            <a:xfrm>
+              <a:off x="8555667" y="4235949"/>
+              <a:ext cx="232431" cy="232431"/>
+            </a:xfrm>
+            <a:prstGeom prst="rect">
+              <a:avLst/>
+            </a:prstGeom>
+          </p:spPr>
+        </p:pic>
+        <p:pic>
+          <p:nvPicPr>
+            <p:cNvPr id="76" name="図 75"/>
+            <p:cNvPicPr>
+              <a:picLocks noChangeAspect="1"/>
+            </p:cNvPicPr>
+            <p:nvPr/>
+          </p:nvPicPr>
+          <p:blipFill>
+            <a:blip r:embed="rId2"/>
+            <a:stretch>
+              <a:fillRect/>
+            </a:stretch>
+          </p:blipFill>
+          <p:spPr>
+            <a:xfrm>
+              <a:off x="8380542" y="3747739"/>
+              <a:ext cx="821553" cy="821552"/>
+            </a:xfrm>
+            <a:prstGeom prst="rect">
+              <a:avLst/>
+            </a:prstGeom>
+          </p:spPr>
+        </p:pic>
+        <p:sp>
+          <p:nvSpPr>
+            <p:cNvPr id="78" name="テキスト ボックス 77"/>
+            <p:cNvSpPr txBox="1"/>
+            <p:nvPr/>
+          </p:nvSpPr>
+          <p:spPr>
+            <a:xfrm>
+              <a:off x="9240973" y="3963692"/>
+              <a:ext cx="1314462" cy="369332"/>
+            </a:xfrm>
+            <a:prstGeom prst="rect">
+              <a:avLst/>
+            </a:prstGeom>
+            <a:noFill/>
+          </p:spPr>
+          <p:txBody>
+            <a:bodyPr wrap="none" rtlCol="0">
+              <a:spAutoFit/>
+            </a:bodyPr>
+            <a:lstStyle/>
+            <a:p>
+              <a:r>
+                <a:rPr lang="en-US" altLang="ja-JP" dirty="0" err="1" smtClean="0"/>
+                <a:t>ESXi</a:t>
+              </a:r>
+              <a:r>
+                <a:rPr lang="en-US" altLang="ja-JP" dirty="0" smtClean="0"/>
+                <a:t> Update</a:t>
+              </a:r>
+              <a:endParaRPr kumimoji="1" lang="ja-JP" altLang="en-US" dirty="0"/>
+            </a:p>
+          </p:txBody>
+        </p:sp>
+        <p:sp>
+          <p:nvSpPr>
+            <p:cNvPr id="79" name="テキスト ボックス 78"/>
+            <p:cNvSpPr txBox="1"/>
+            <p:nvPr/>
+          </p:nvSpPr>
+          <p:spPr>
+            <a:xfrm>
+              <a:off x="8056496" y="3443158"/>
+              <a:ext cx="646011" cy="307777"/>
+            </a:xfrm>
+            <a:prstGeom prst="rect">
+              <a:avLst/>
+            </a:prstGeom>
+            <a:noFill/>
+          </p:spPr>
+          <p:txBody>
+            <a:bodyPr wrap="none" rtlCol="0">
+              <a:spAutoFit/>
+            </a:bodyPr>
+            <a:lstStyle/>
+            <a:p>
+              <a:r>
+                <a:rPr lang="en-US" altLang="ja-JP" sz="1400" dirty="0" smtClean="0"/>
+                <a:t>Step.3</a:t>
+              </a:r>
+              <a:endParaRPr kumimoji="1" lang="ja-JP" altLang="en-US" sz="1400" dirty="0"/>
+            </a:p>
+          </p:txBody>
+        </p:sp>
+        <p:pic>
+          <p:nvPicPr>
+            <p:cNvPr id="72" name="図 71"/>
+            <p:cNvPicPr>
+              <a:picLocks noChangeAspect="1"/>
+            </p:cNvPicPr>
+            <p:nvPr/>
+          </p:nvPicPr>
+          <p:blipFill>
+            <a:blip r:embed="rId7"/>
+            <a:stretch>
+              <a:fillRect/>
+            </a:stretch>
+          </p:blipFill>
+          <p:spPr>
+            <a:xfrm>
+              <a:off x="8784927" y="3510000"/>
+              <a:ext cx="485355" cy="485355"/>
+            </a:xfrm>
+            <a:prstGeom prst="rect">
+              <a:avLst/>
+            </a:prstGeom>
+          </p:spPr>
+        </p:pic>
+      </p:grpSp>
+      <p:grpSp>
+        <p:nvGrpSpPr>
+          <p:cNvPr id="89" name="グループ化 88"/>
+          <p:cNvGrpSpPr/>
+          <p:nvPr/>
+        </p:nvGrpSpPr>
+        <p:grpSpPr>
+          <a:xfrm>
+            <a:off x="8061469" y="4273470"/>
+            <a:ext cx="2606661" cy="1129130"/>
+            <a:chOff x="8061469" y="4273470"/>
+            <a:chExt cx="2606661" cy="1129130"/>
+          </a:xfrm>
+        </p:grpSpPr>
+        <p:pic>
+          <p:nvPicPr>
+            <p:cNvPr id="86" name="図 85"/>
+            <p:cNvPicPr>
+              <a:picLocks noChangeAspect="1"/>
+            </p:cNvPicPr>
+            <p:nvPr/>
+          </p:nvPicPr>
+          <p:blipFill>
+            <a:blip r:embed="rId5"/>
+            <a:stretch>
+              <a:fillRect/>
+            </a:stretch>
+          </p:blipFill>
+          <p:spPr>
+            <a:xfrm>
+              <a:off x="8558888" y="5064621"/>
+              <a:ext cx="232431" cy="232431"/>
+            </a:xfrm>
+            <a:prstGeom prst="rect">
+              <a:avLst/>
+            </a:prstGeom>
+          </p:spPr>
+        </p:pic>
+        <p:grpSp>
+          <p:nvGrpSpPr>
+            <p:cNvPr id="81" name="グループ化 80"/>
+            <p:cNvGrpSpPr/>
+            <p:nvPr/>
+          </p:nvGrpSpPr>
+          <p:grpSpPr>
+            <a:xfrm>
+              <a:off x="8061469" y="4278318"/>
+              <a:ext cx="2606661" cy="1124282"/>
+              <a:chOff x="8059377" y="1071549"/>
+              <a:chExt cx="2606661" cy="1124282"/>
+            </a:xfrm>
+          </p:grpSpPr>
+          <p:pic>
+            <p:nvPicPr>
+              <p:cNvPr id="82" name="図 81"/>
+              <p:cNvPicPr>
+                <a:picLocks noChangeAspect="1"/>
+              </p:cNvPicPr>
+              <p:nvPr/>
+            </p:nvPicPr>
+            <p:blipFill>
+              <a:blip r:embed="rId2"/>
+              <a:stretch>
+                <a:fillRect/>
+              </a:stretch>
+            </p:blipFill>
+            <p:spPr>
+              <a:xfrm>
+                <a:off x="8384475" y="1374279"/>
+                <a:ext cx="821553" cy="821552"/>
+              </a:xfrm>
+              <a:prstGeom prst="rect">
+                <a:avLst/>
+              </a:prstGeom>
+            </p:spPr>
+          </p:pic>
+          <p:sp>
+            <p:nvSpPr>
+              <p:cNvPr id="83" name="テキスト ボックス 82"/>
+              <p:cNvSpPr txBox="1"/>
+              <p:nvPr/>
+            </p:nvSpPr>
+            <p:spPr>
+              <a:xfrm>
+                <a:off x="9243854" y="1582558"/>
+                <a:ext cx="1422184" cy="369332"/>
+              </a:xfrm>
+              <a:prstGeom prst="rect">
+                <a:avLst/>
+              </a:prstGeom>
+              <a:noFill/>
+            </p:spPr>
+            <p:txBody>
+              <a:bodyPr wrap="none" rtlCol="0">
+                <a:spAutoFit/>
+              </a:bodyPr>
+              <a:lstStyle/>
+              <a:p>
+                <a:r>
+                  <a:rPr lang="en-US" altLang="ja-JP" dirty="0" smtClean="0"/>
+                  <a:t>Health Check</a:t>
+                </a:r>
+                <a:endParaRPr kumimoji="1" lang="ja-JP" altLang="en-US" dirty="0"/>
+              </a:p>
+            </p:txBody>
+          </p:sp>
+          <p:sp>
+            <p:nvSpPr>
+              <p:cNvPr id="84" name="テキスト ボックス 83"/>
+              <p:cNvSpPr txBox="1"/>
+              <p:nvPr/>
+            </p:nvSpPr>
+            <p:spPr>
+              <a:xfrm>
+                <a:off x="8059377" y="1071549"/>
+                <a:ext cx="646011" cy="307777"/>
+              </a:xfrm>
+              <a:prstGeom prst="rect">
+                <a:avLst/>
+              </a:prstGeom>
+              <a:noFill/>
+            </p:spPr>
+            <p:txBody>
+              <a:bodyPr wrap="none" rtlCol="0">
+                <a:spAutoFit/>
+              </a:bodyPr>
+              <a:lstStyle/>
+              <a:p>
+                <a:r>
+                  <a:rPr lang="en-US" altLang="ja-JP" sz="1400" dirty="0" smtClean="0"/>
+                  <a:t>Step.4</a:t>
+                </a:r>
+                <a:endParaRPr kumimoji="1" lang="ja-JP" altLang="en-US" sz="1400" dirty="0"/>
+              </a:p>
+            </p:txBody>
+          </p:sp>
+        </p:grpSp>
+        <p:pic>
+          <p:nvPicPr>
+            <p:cNvPr id="90" name="図 89"/>
+            <p:cNvPicPr>
+              <a:picLocks noChangeAspect="1"/>
+            </p:cNvPicPr>
+            <p:nvPr/>
+          </p:nvPicPr>
+          <p:blipFill>
+            <a:blip r:embed="rId8"/>
+            <a:stretch>
+              <a:fillRect/>
+            </a:stretch>
+          </p:blipFill>
+          <p:spPr>
+            <a:xfrm>
+              <a:off x="8753863" y="4273470"/>
+              <a:ext cx="561361" cy="561361"/>
+            </a:xfrm>
+            <a:prstGeom prst="rect">
+              <a:avLst/>
+            </a:prstGeom>
+          </p:spPr>
+        </p:pic>
+      </p:grpSp>
+      <p:grpSp>
+        <p:nvGrpSpPr>
+          <p:cNvPr id="94" name="グループ化 93"/>
+          <p:cNvGrpSpPr/>
+          <p:nvPr/>
+        </p:nvGrpSpPr>
+        <p:grpSpPr>
+          <a:xfrm>
+            <a:off x="8061469" y="5431773"/>
+            <a:ext cx="2378522" cy="1124282"/>
+            <a:chOff x="8059377" y="1071549"/>
+            <a:chExt cx="2378522" cy="1124282"/>
+          </a:xfrm>
+        </p:grpSpPr>
+        <p:pic>
+          <p:nvPicPr>
+            <p:cNvPr id="96" name="図 95"/>
+            <p:cNvPicPr>
+              <a:picLocks noChangeAspect="1"/>
+            </p:cNvPicPr>
+            <p:nvPr/>
+          </p:nvPicPr>
+          <p:blipFill>
+            <a:blip r:embed="rId2"/>
+            <a:stretch>
+              <a:fillRect/>
+            </a:stretch>
+          </p:blipFill>
+          <p:spPr>
+            <a:xfrm>
+              <a:off x="8384475" y="1374279"/>
+              <a:ext cx="821553" cy="821552"/>
+            </a:xfrm>
+            <a:prstGeom prst="rect">
+              <a:avLst/>
+            </a:prstGeom>
+          </p:spPr>
+        </p:pic>
+        <p:sp>
+          <p:nvSpPr>
+            <p:cNvPr id="97" name="テキスト ボックス 96"/>
+            <p:cNvSpPr txBox="1"/>
+            <p:nvPr/>
+          </p:nvSpPr>
+          <p:spPr>
+            <a:xfrm>
+              <a:off x="9243854" y="1582558"/>
+              <a:ext cx="1194045" cy="369332"/>
+            </a:xfrm>
+            <a:prstGeom prst="rect">
+              <a:avLst/>
+            </a:prstGeom>
+            <a:noFill/>
+          </p:spPr>
+          <p:txBody>
+            <a:bodyPr wrap="none" rtlCol="0">
+              <a:spAutoFit/>
+            </a:bodyPr>
+            <a:lstStyle/>
+            <a:p>
+              <a:r>
+                <a:rPr lang="en-US" altLang="ja-JP" dirty="0" err="1" smtClean="0"/>
+                <a:t>Maint</a:t>
+              </a:r>
+              <a:r>
+                <a:rPr lang="en-US" altLang="ja-JP" dirty="0" smtClean="0"/>
+                <a:t>. Exit</a:t>
+              </a:r>
+              <a:endParaRPr kumimoji="1" lang="ja-JP" altLang="en-US" dirty="0"/>
+            </a:p>
+          </p:txBody>
+        </p:sp>
+        <p:sp>
+          <p:nvSpPr>
+            <p:cNvPr id="98" name="テキスト ボックス 97"/>
+            <p:cNvSpPr txBox="1"/>
+            <p:nvPr/>
+          </p:nvSpPr>
+          <p:spPr>
+            <a:xfrm>
+              <a:off x="8059377" y="1071549"/>
+              <a:ext cx="646011" cy="307777"/>
+            </a:xfrm>
+            <a:prstGeom prst="rect">
+              <a:avLst/>
+            </a:prstGeom>
+            <a:noFill/>
+          </p:spPr>
+          <p:txBody>
+            <a:bodyPr wrap="none" rtlCol="0">
+              <a:spAutoFit/>
+            </a:bodyPr>
+            <a:lstStyle/>
+            <a:p>
+              <a:r>
+                <a:rPr lang="en-US" altLang="ja-JP" sz="1400" dirty="0" smtClean="0"/>
+                <a:t>Step.5</a:t>
+              </a:r>
+              <a:endParaRPr kumimoji="1" lang="ja-JP" altLang="en-US" sz="1400" dirty="0"/>
+            </a:p>
+          </p:txBody>
+        </p:sp>
+      </p:grpSp>
+      <p:sp>
+        <p:nvSpPr>
+          <p:cNvPr id="99" name="角丸四角形 98"/>
+          <p:cNvSpPr/>
+          <p:nvPr/>
+        </p:nvSpPr>
+        <p:spPr>
+          <a:xfrm>
+            <a:off x="2294026" y="4080834"/>
+            <a:ext cx="5088706" cy="2287298"/>
+          </a:xfrm>
+          <a:prstGeom prst="roundRect">
+            <a:avLst/>
+          </a:prstGeom>
+          <a:solidFill>
+            <a:schemeClr val="bg1">
+              <a:lumMod val="95000"/>
+              <a:alpha val="37000"/>
+            </a:schemeClr>
+          </a:solidFill>
+          <a:ln w="38100">
+            <a:solidFill>
+              <a:schemeClr val="tx1"/>
+            </a:solidFill>
+          </a:ln>
+        </p:spPr>
+        <p:style>
+          <a:lnRef idx="2">
+            <a:schemeClr val="accent1">
+              <a:shade val="50000"/>
+            </a:schemeClr>
+          </a:lnRef>
+          <a:fillRef idx="1">
+            <a:schemeClr val="accent1"/>
+          </a:fillRef>
+          <a:effectRef idx="0">
+            <a:schemeClr val="accent1"/>
+          </a:effectRef>
+          <a:fontRef idx="minor">
+            <a:schemeClr val="lt1"/>
+          </a:fontRef>
+        </p:style>
+        <p:txBody>
+          <a:bodyPr rtlCol="0" anchor="ctr"/>
+          <a:lstStyle/>
+          <a:p>
+            <a:pPr algn="ctr"/>
+            <a:endParaRPr kumimoji="1" lang="ja-JP" altLang="en-US"/>
+          </a:p>
+        </p:txBody>
+      </p:sp>
+      <p:pic>
+        <p:nvPicPr>
+          <p:cNvPr id="100" name="図 99"/>
+          <p:cNvPicPr>
+            <a:picLocks noChangeAspect="1"/>
+          </p:cNvPicPr>
+          <p:nvPr/>
+        </p:nvPicPr>
+        <p:blipFill>
+          <a:blip r:embed="rId2"/>
+          <a:stretch>
+            <a:fillRect/>
+          </a:stretch>
+        </p:blipFill>
+        <p:spPr>
+          <a:xfrm>
+            <a:off x="2462489" y="5290590"/>
+            <a:ext cx="821553" cy="821552"/>
+          </a:xfrm>
+          <a:prstGeom prst="rect">
+            <a:avLst/>
+          </a:prstGeom>
+        </p:spPr>
+      </p:pic>
+      <p:sp>
+        <p:nvSpPr>
+          <p:cNvPr id="101" name="テキスト ボックス 100"/>
+          <p:cNvSpPr txBox="1"/>
+          <p:nvPr/>
+        </p:nvSpPr>
+        <p:spPr>
+          <a:xfrm>
+            <a:off x="4448857" y="5470532"/>
+            <a:ext cx="685859" cy="461665"/>
+          </a:xfrm>
+          <a:prstGeom prst="rect">
+            <a:avLst/>
+          </a:prstGeom>
+          <a:noFill/>
+        </p:spPr>
+        <p:txBody>
+          <a:bodyPr wrap="square" rtlCol="0">
+            <a:spAutoFit/>
+          </a:bodyPr>
+          <a:lstStyle/>
+          <a:p>
+            <a:pPr algn="ctr"/>
+            <a:r>
+              <a:rPr lang="ja-JP" altLang="en-US" sz="2400" dirty="0" smtClean="0"/>
+              <a:t>・・・</a:t>
+            </a:r>
+            <a:endParaRPr kumimoji="1" lang="ja-JP" altLang="en-US" sz="2400" dirty="0"/>
+          </a:p>
+        </p:txBody>
+      </p:sp>
+      <p:pic>
+        <p:nvPicPr>
+          <p:cNvPr id="102" name="図 101"/>
+          <p:cNvPicPr>
+            <a:picLocks noChangeAspect="1"/>
+          </p:cNvPicPr>
+          <p:nvPr/>
+        </p:nvPicPr>
+        <p:blipFill>
+          <a:blip r:embed="rId2"/>
+          <a:stretch>
+            <a:fillRect/>
+          </a:stretch>
+        </p:blipFill>
+        <p:spPr>
+          <a:xfrm>
+            <a:off x="3086587" y="5290589"/>
+            <a:ext cx="821553" cy="821552"/>
+          </a:xfrm>
+          <a:prstGeom prst="rect">
+            <a:avLst/>
+          </a:prstGeom>
+        </p:spPr>
+      </p:pic>
+      <p:pic>
+        <p:nvPicPr>
+          <p:cNvPr id="103" name="図 102"/>
+          <p:cNvPicPr>
+            <a:picLocks noChangeAspect="1"/>
+          </p:cNvPicPr>
+          <p:nvPr/>
+        </p:nvPicPr>
+        <p:blipFill>
+          <a:blip r:embed="rId2"/>
+          <a:stretch>
+            <a:fillRect/>
+          </a:stretch>
+        </p:blipFill>
+        <p:spPr>
+          <a:xfrm>
+            <a:off x="3748613" y="5290589"/>
+            <a:ext cx="821553" cy="821552"/>
+          </a:xfrm>
+          <a:prstGeom prst="rect">
+            <a:avLst/>
+          </a:prstGeom>
+        </p:spPr>
+      </p:pic>
+      <p:pic>
+        <p:nvPicPr>
+          <p:cNvPr id="104" name="図 103"/>
+          <p:cNvPicPr>
+            <a:picLocks noChangeAspect="1"/>
+          </p:cNvPicPr>
+          <p:nvPr/>
+        </p:nvPicPr>
+        <p:blipFill>
+          <a:blip r:embed="rId2"/>
+          <a:stretch>
+            <a:fillRect/>
+          </a:stretch>
+        </p:blipFill>
+        <p:spPr>
+          <a:xfrm>
+            <a:off x="5034737" y="5290589"/>
+            <a:ext cx="821553" cy="821552"/>
+          </a:xfrm>
+          <a:prstGeom prst="rect">
+            <a:avLst/>
+          </a:prstGeom>
+        </p:spPr>
+      </p:pic>
+      <p:sp>
+        <p:nvSpPr>
+          <p:cNvPr id="105" name="テキスト ボックス 104"/>
+          <p:cNvSpPr txBox="1"/>
+          <p:nvPr/>
+        </p:nvSpPr>
+        <p:spPr>
+          <a:xfrm>
+            <a:off x="4278792" y="3769802"/>
+            <a:ext cx="1017971" cy="369332"/>
+          </a:xfrm>
+          <a:prstGeom prst="rect">
+            <a:avLst/>
+          </a:prstGeom>
+          <a:noFill/>
+        </p:spPr>
+        <p:txBody>
+          <a:bodyPr wrap="none" rtlCol="0">
+            <a:spAutoFit/>
+          </a:bodyPr>
+          <a:lstStyle/>
+          <a:p>
+            <a:r>
+              <a:rPr lang="en-US" altLang="ja-JP" dirty="0" smtClean="0"/>
+              <a:t>Cluster </a:t>
+            </a:r>
+            <a:r>
+              <a:rPr lang="en-US" altLang="ja-JP" dirty="0" smtClean="0"/>
+              <a:t>B</a:t>
+            </a:r>
+            <a:endParaRPr kumimoji="1" lang="ja-JP" altLang="en-US" dirty="0"/>
+          </a:p>
+        </p:txBody>
+      </p:sp>
+      <p:pic>
+        <p:nvPicPr>
+          <p:cNvPr id="106" name="図 105"/>
+          <p:cNvPicPr>
+            <a:picLocks noChangeAspect="1"/>
+          </p:cNvPicPr>
+          <p:nvPr/>
+        </p:nvPicPr>
+        <p:blipFill>
+          <a:blip r:embed="rId2"/>
+          <a:stretch>
+            <a:fillRect/>
+          </a:stretch>
+        </p:blipFill>
+        <p:spPr>
+          <a:xfrm>
+            <a:off x="5701486" y="5289406"/>
+            <a:ext cx="821553" cy="821552"/>
+          </a:xfrm>
+          <a:prstGeom prst="rect">
+            <a:avLst/>
+          </a:prstGeom>
+        </p:spPr>
+      </p:pic>
+      <p:pic>
+        <p:nvPicPr>
+          <p:cNvPr id="107" name="図 106"/>
+          <p:cNvPicPr>
+            <a:picLocks noChangeAspect="1"/>
+          </p:cNvPicPr>
+          <p:nvPr/>
+        </p:nvPicPr>
+        <p:blipFill>
+          <a:blip r:embed="rId2"/>
+          <a:stretch>
+            <a:fillRect/>
+          </a:stretch>
+        </p:blipFill>
+        <p:spPr>
+          <a:xfrm>
+            <a:off x="6368235" y="5288223"/>
+            <a:ext cx="821553" cy="821552"/>
+          </a:xfrm>
+          <a:prstGeom prst="rect">
+            <a:avLst/>
+          </a:prstGeom>
+        </p:spPr>
+      </p:pic>
+      <p:sp>
+        <p:nvSpPr>
+          <p:cNvPr id="108" name="左矢印 107"/>
+          <p:cNvSpPr/>
+          <p:nvPr/>
+        </p:nvSpPr>
+        <p:spPr>
+          <a:xfrm>
+            <a:off x="2637376" y="4776308"/>
+            <a:ext cx="4374065" cy="369227"/>
+          </a:xfrm>
+          <a:prstGeom prst="leftArrow">
+            <a:avLst>
+              <a:gd name="adj1" fmla="val 50000"/>
+              <a:gd name="adj2" fmla="val 79172"/>
+            </a:avLst>
+          </a:prstGeom>
+          <a:solidFill>
+            <a:schemeClr val="accent2">
+              <a:lumMod val="40000"/>
+              <a:lumOff val="60000"/>
+            </a:schemeClr>
+          </a:solidFill>
+          <a:ln w="38100">
+            <a:solidFill>
+              <a:schemeClr val="accent2"/>
+            </a:solidFill>
+          </a:ln>
+        </p:spPr>
+        <p:style>
+          <a:lnRef idx="2">
+            <a:schemeClr val="accent1">
+              <a:shade val="50000"/>
+            </a:schemeClr>
+          </a:lnRef>
+          <a:fillRef idx="1">
+            <a:schemeClr val="accent1"/>
+          </a:fillRef>
+          <a:effectRef idx="0">
+            <a:schemeClr val="accent1"/>
+          </a:effectRef>
+          <a:fontRef idx="minor">
+            <a:schemeClr val="lt1"/>
+          </a:fontRef>
+        </p:style>
+        <p:txBody>
+          <a:bodyPr rtlCol="0" anchor="ctr"/>
+          <a:lstStyle/>
+          <a:p>
+            <a:pPr algn="ctr"/>
+            <a:endParaRPr kumimoji="1" lang="ja-JP" altLang="en-US"/>
+          </a:p>
+        </p:txBody>
+      </p:sp>
+      <p:sp>
+        <p:nvSpPr>
+          <p:cNvPr id="109" name="テキスト ボックス 108"/>
+          <p:cNvSpPr txBox="1"/>
+          <p:nvPr/>
+        </p:nvSpPr>
+        <p:spPr>
+          <a:xfrm>
+            <a:off x="3832173" y="4397533"/>
+            <a:ext cx="2012410" cy="461665"/>
+          </a:xfrm>
+          <a:prstGeom prst="rect">
+            <a:avLst/>
+          </a:prstGeom>
+          <a:noFill/>
+        </p:spPr>
+        <p:txBody>
+          <a:bodyPr wrap="none" rtlCol="0">
+            <a:spAutoFit/>
+          </a:bodyPr>
+          <a:lstStyle/>
+          <a:p>
+            <a:pPr algn="ctr"/>
+            <a:r>
+              <a:rPr lang="en-US" altLang="ja-JP" sz="2400" dirty="0" smtClean="0">
+                <a:solidFill>
+                  <a:srgbClr val="FF0000"/>
+                </a:solidFill>
+              </a:rPr>
+              <a:t>Rolling Update</a:t>
+            </a:r>
+            <a:endParaRPr kumimoji="1" lang="ja-JP" altLang="en-US" sz="2400" dirty="0">
+              <a:solidFill>
+                <a:srgbClr val="FF0000"/>
+              </a:solidFill>
+            </a:endParaRPr>
+          </a:p>
+        </p:txBody>
+      </p:sp>
+    </p:spTree>
+    <p:extLst>
+      <p:ext uri="{BB962C8B-B14F-4D97-AF65-F5344CB8AC3E}">
+        <p14:creationId xmlns:p14="http://schemas.microsoft.com/office/powerpoint/2010/main" val="173800157"/>
+      </p:ext>
+    </p:extLst>
+  </p:cSld>
+  <p:clrMapOvr>
+    <a:masterClrMapping/>
+  </p:clrMapOvr>
+</p:sld>
+</file>
+
+<file path=ppt/slides/slide6.xml><?xml version="1.0" encoding="utf-8"?>
+<p:sld xmlns:a="http://schemas.openxmlformats.org/drawingml/2006/main" xmlns:r="http://schemas.openxmlformats.org/officeDocument/2006/relationships" xmlns:p="http://schemas.openxmlformats.org/presentationml/2006/main">
+  <p:cSld>
+    <p:spTree>
+      <p:nvGrpSpPr>
+        <p:cNvPr id="1" name=""/>
+        <p:cNvGrpSpPr/>
+        <p:nvPr/>
+      </p:nvGrpSpPr>
+      <p:grpSpPr>
+        <a:xfrm>
+          <a:off x="0" y="0"/>
+          <a:ext cx="0" cy="0"/>
+          <a:chOff x="0" y="0"/>
+          <a:chExt cx="0" cy="0"/>
+        </a:xfrm>
+      </p:grpSpPr>
+    </p:spTree>
+    <p:extLst>
+      <p:ext uri="{BB962C8B-B14F-4D97-AF65-F5344CB8AC3E}">
+        <p14:creationId xmlns:p14="http://schemas.microsoft.com/office/powerpoint/2010/main" val="1168859030"/>
       </p:ext>
     </p:extLst>
   </p:cSld>

--- a/ポートフォリオ資料.pptx
+++ b/ポートフォリオ資料.pptx
@@ -11,6 +11,7 @@
     <p:sldId id="259" r:id="rId5"/>
     <p:sldId id="260" r:id="rId6"/>
     <p:sldId id="261" r:id="rId7"/>
+    <p:sldId id="262" r:id="rId8"/>
   </p:sldIdLst>
   <p:sldSz cx="12192000" cy="6858000"/>
   <p:notesSz cx="6858000" cy="9144000"/>
@@ -9182,7 +9183,7 @@
         </p:nvSpPr>
         <p:spPr>
           <a:xfrm>
-            <a:off x="1894179" y="724743"/>
+            <a:off x="1937722" y="774611"/>
             <a:ext cx="9771761" cy="5990382"/>
           </a:xfrm>
           <a:prstGeom prst="roundRect">
@@ -10721,11 +10722,7 @@
           <a:p>
             <a:r>
               <a:rPr lang="en-US" altLang="ja-JP" dirty="0" smtClean="0"/>
-              <a:t>Cluster </a:t>
-            </a:r>
-            <a:r>
-              <a:rPr lang="en-US" altLang="ja-JP" dirty="0" smtClean="0"/>
-              <a:t>B</a:t>
+              <a:t>Cluster B</a:t>
             </a:r>
             <a:endParaRPr kumimoji="1" lang="ja-JP" altLang="en-US" dirty="0"/>
           </a:p>
@@ -10902,10 +10899,2923 @@
           <a:chExt cx="0" cy="0"/>
         </a:xfrm>
       </p:grpSpPr>
+      <p:sp>
+        <p:nvSpPr>
+          <p:cNvPr id="50" name="角丸四角形 49"/>
+          <p:cNvSpPr/>
+          <p:nvPr/>
+        </p:nvSpPr>
+        <p:spPr>
+          <a:xfrm>
+            <a:off x="5200650" y="-419100"/>
+            <a:ext cx="7226300" cy="7912100"/>
+          </a:xfrm>
+          <a:prstGeom prst="roundRect">
+            <a:avLst>
+              <a:gd name="adj" fmla="val 9765"/>
+            </a:avLst>
+          </a:prstGeom>
+          <a:solidFill>
+            <a:schemeClr val="bg1"/>
+          </a:solidFill>
+          <a:ln w="38100">
+            <a:solidFill>
+              <a:schemeClr val="tx1"/>
+            </a:solidFill>
+          </a:ln>
+        </p:spPr>
+        <p:style>
+          <a:lnRef idx="2">
+            <a:schemeClr val="accent1">
+              <a:shade val="50000"/>
+            </a:schemeClr>
+          </a:lnRef>
+          <a:fillRef idx="1">
+            <a:schemeClr val="accent1"/>
+          </a:fillRef>
+          <a:effectRef idx="0">
+            <a:schemeClr val="accent1"/>
+          </a:effectRef>
+          <a:fontRef idx="minor">
+            <a:schemeClr val="lt1"/>
+          </a:fontRef>
+        </p:style>
+        <p:txBody>
+          <a:bodyPr rtlCol="0" anchor="ctr"/>
+          <a:lstStyle/>
+          <a:p>
+            <a:pPr algn="ctr"/>
+            <a:endParaRPr kumimoji="1" lang="ja-JP" altLang="en-US"/>
+          </a:p>
+        </p:txBody>
+      </p:sp>
+      <p:sp>
+        <p:nvSpPr>
+          <p:cNvPr id="49" name="角丸四角形 48"/>
+          <p:cNvSpPr/>
+          <p:nvPr/>
+        </p:nvSpPr>
+        <p:spPr>
+          <a:xfrm>
+            <a:off x="10056113" y="277220"/>
+            <a:ext cx="1856486" cy="6750712"/>
+          </a:xfrm>
+          <a:prstGeom prst="roundRect">
+            <a:avLst>
+              <a:gd name="adj" fmla="val 5543"/>
+            </a:avLst>
+          </a:prstGeom>
+          <a:solidFill>
+            <a:schemeClr val="bg1"/>
+          </a:solidFill>
+          <a:ln w="38100">
+            <a:solidFill>
+              <a:schemeClr val="tx1"/>
+            </a:solidFill>
+          </a:ln>
+        </p:spPr>
+        <p:style>
+          <a:lnRef idx="2">
+            <a:schemeClr val="accent1">
+              <a:shade val="50000"/>
+            </a:schemeClr>
+          </a:lnRef>
+          <a:fillRef idx="1">
+            <a:schemeClr val="accent1"/>
+          </a:fillRef>
+          <a:effectRef idx="0">
+            <a:schemeClr val="accent1"/>
+          </a:effectRef>
+          <a:fontRef idx="minor">
+            <a:schemeClr val="lt1"/>
+          </a:fontRef>
+        </p:style>
+        <p:txBody>
+          <a:bodyPr rtlCol="0" anchor="ctr"/>
+          <a:lstStyle/>
+          <a:p>
+            <a:pPr algn="ctr"/>
+            <a:endParaRPr kumimoji="1" lang="ja-JP" altLang="en-US"/>
+          </a:p>
+        </p:txBody>
+      </p:sp>
+      <p:sp>
+        <p:nvSpPr>
+          <p:cNvPr id="48" name="角丸四角形 47"/>
+          <p:cNvSpPr/>
+          <p:nvPr/>
+        </p:nvSpPr>
+        <p:spPr>
+          <a:xfrm>
+            <a:off x="9903713" y="124820"/>
+            <a:ext cx="1856486" cy="6750712"/>
+          </a:xfrm>
+          <a:prstGeom prst="roundRect">
+            <a:avLst>
+              <a:gd name="adj" fmla="val 5543"/>
+            </a:avLst>
+          </a:prstGeom>
+          <a:solidFill>
+            <a:schemeClr val="bg1"/>
+          </a:solidFill>
+          <a:ln w="38100">
+            <a:solidFill>
+              <a:schemeClr val="tx1"/>
+            </a:solidFill>
+          </a:ln>
+        </p:spPr>
+        <p:style>
+          <a:lnRef idx="2">
+            <a:schemeClr val="accent1">
+              <a:shade val="50000"/>
+            </a:schemeClr>
+          </a:lnRef>
+          <a:fillRef idx="1">
+            <a:schemeClr val="accent1"/>
+          </a:fillRef>
+          <a:effectRef idx="0">
+            <a:schemeClr val="accent1"/>
+          </a:effectRef>
+          <a:fontRef idx="minor">
+            <a:schemeClr val="lt1"/>
+          </a:fontRef>
+        </p:style>
+        <p:txBody>
+          <a:bodyPr rtlCol="0" anchor="ctr"/>
+          <a:lstStyle/>
+          <a:p>
+            <a:pPr algn="ctr"/>
+            <a:endParaRPr kumimoji="1" lang="ja-JP" altLang="en-US"/>
+          </a:p>
+        </p:txBody>
+      </p:sp>
+      <p:sp>
+        <p:nvSpPr>
+          <p:cNvPr id="47" name="角丸四角形 46"/>
+          <p:cNvSpPr/>
+          <p:nvPr/>
+        </p:nvSpPr>
+        <p:spPr>
+          <a:xfrm>
+            <a:off x="9751313" y="-27580"/>
+            <a:ext cx="1856486" cy="6750712"/>
+          </a:xfrm>
+          <a:prstGeom prst="roundRect">
+            <a:avLst>
+              <a:gd name="adj" fmla="val 5543"/>
+            </a:avLst>
+          </a:prstGeom>
+          <a:solidFill>
+            <a:schemeClr val="bg1"/>
+          </a:solidFill>
+          <a:ln w="38100">
+            <a:solidFill>
+              <a:schemeClr val="tx1"/>
+            </a:solidFill>
+          </a:ln>
+        </p:spPr>
+        <p:style>
+          <a:lnRef idx="2">
+            <a:schemeClr val="accent1">
+              <a:shade val="50000"/>
+            </a:schemeClr>
+          </a:lnRef>
+          <a:fillRef idx="1">
+            <a:schemeClr val="accent1"/>
+          </a:fillRef>
+          <a:effectRef idx="0">
+            <a:schemeClr val="accent1"/>
+          </a:effectRef>
+          <a:fontRef idx="minor">
+            <a:schemeClr val="lt1"/>
+          </a:fontRef>
+        </p:style>
+        <p:txBody>
+          <a:bodyPr rtlCol="0" anchor="ctr"/>
+          <a:lstStyle/>
+          <a:p>
+            <a:pPr algn="ctr"/>
+            <a:endParaRPr kumimoji="1" lang="ja-JP" altLang="en-US"/>
+          </a:p>
+        </p:txBody>
+      </p:sp>
+      <p:pic>
+        <p:nvPicPr>
+          <p:cNvPr id="8" name="図 7"/>
+          <p:cNvPicPr>
+            <a:picLocks noChangeAspect="1"/>
+          </p:cNvPicPr>
+          <p:nvPr/>
+        </p:nvPicPr>
+        <p:blipFill>
+          <a:blip r:embed="rId2" cstate="print">
+            <a:extLst>
+              <a:ext uri="{28A0092B-C50C-407E-A947-70E740481C1C}">
+                <a14:useLocalDpi xmlns:a14="http://schemas.microsoft.com/office/drawing/2010/main" val="0"/>
+              </a:ext>
+            </a:extLst>
+          </a:blip>
+          <a:stretch>
+            <a:fillRect/>
+          </a:stretch>
+        </p:blipFill>
+        <p:spPr>
+          <a:xfrm>
+            <a:off x="1955770" y="2254432"/>
+            <a:ext cx="1154125" cy="1881886"/>
+          </a:xfrm>
+          <a:prstGeom prst="rect">
+            <a:avLst/>
+          </a:prstGeom>
+        </p:spPr>
+      </p:pic>
+      <p:sp>
+        <p:nvSpPr>
+          <p:cNvPr id="9" name="右矢印 8"/>
+          <p:cNvSpPr/>
+          <p:nvPr/>
+        </p:nvSpPr>
+        <p:spPr>
+          <a:xfrm>
+            <a:off x="3458410" y="2732131"/>
+            <a:ext cx="1021491" cy="934172"/>
+          </a:xfrm>
+          <a:prstGeom prst="rightArrow">
+            <a:avLst/>
+          </a:prstGeom>
+          <a:solidFill>
+            <a:schemeClr val="bg1">
+              <a:lumMod val="95000"/>
+            </a:schemeClr>
+          </a:solidFill>
+          <a:ln w="38100">
+            <a:solidFill>
+              <a:schemeClr val="tx1"/>
+            </a:solidFill>
+          </a:ln>
+        </p:spPr>
+        <p:style>
+          <a:lnRef idx="2">
+            <a:schemeClr val="accent1">
+              <a:shade val="50000"/>
+            </a:schemeClr>
+          </a:lnRef>
+          <a:fillRef idx="1">
+            <a:schemeClr val="accent1"/>
+          </a:fillRef>
+          <a:effectRef idx="0">
+            <a:schemeClr val="accent1"/>
+          </a:effectRef>
+          <a:fontRef idx="minor">
+            <a:schemeClr val="lt1"/>
+          </a:fontRef>
+        </p:style>
+        <p:txBody>
+          <a:bodyPr rtlCol="0" anchor="ctr"/>
+          <a:lstStyle/>
+          <a:p>
+            <a:pPr algn="ctr"/>
+            <a:endParaRPr kumimoji="1" lang="ja-JP" altLang="en-US"/>
+          </a:p>
+        </p:txBody>
+      </p:sp>
+      <p:grpSp>
+        <p:nvGrpSpPr>
+          <p:cNvPr id="46" name="グループ化 45"/>
+          <p:cNvGrpSpPr/>
+          <p:nvPr/>
+        </p:nvGrpSpPr>
+        <p:grpSpPr>
+          <a:xfrm>
+            <a:off x="5855127" y="2426804"/>
+            <a:ext cx="1430713" cy="1321832"/>
+            <a:chOff x="4126014" y="2349795"/>
+            <a:chExt cx="1430713" cy="1321832"/>
+          </a:xfrm>
+        </p:grpSpPr>
+        <p:pic>
+          <p:nvPicPr>
+            <p:cNvPr id="2" name="図 1"/>
+            <p:cNvPicPr>
+              <a:picLocks noChangeAspect="1"/>
+            </p:cNvPicPr>
+            <p:nvPr/>
+          </p:nvPicPr>
+          <p:blipFill>
+            <a:blip r:embed="rId3"/>
+            <a:stretch>
+              <a:fillRect/>
+            </a:stretch>
+          </p:blipFill>
+          <p:spPr>
+            <a:xfrm>
+              <a:off x="4365121" y="2719127"/>
+              <a:ext cx="952500" cy="952500"/>
+            </a:xfrm>
+            <a:prstGeom prst="rect">
+              <a:avLst/>
+            </a:prstGeom>
+          </p:spPr>
+        </p:pic>
+        <p:sp>
+          <p:nvSpPr>
+            <p:cNvPr id="3" name="テキスト ボックス 2"/>
+            <p:cNvSpPr txBox="1"/>
+            <p:nvPr/>
+          </p:nvSpPr>
+          <p:spPr>
+            <a:xfrm>
+              <a:off x="4126014" y="2349795"/>
+              <a:ext cx="1430713" cy="369332"/>
+            </a:xfrm>
+            <a:prstGeom prst="rect">
+              <a:avLst/>
+            </a:prstGeom>
+            <a:noFill/>
+          </p:spPr>
+          <p:txBody>
+            <a:bodyPr wrap="none" rtlCol="0">
+              <a:spAutoFit/>
+            </a:bodyPr>
+            <a:lstStyle/>
+            <a:p>
+              <a:r>
+                <a:rPr lang="en-US" altLang="ja-JP" dirty="0" smtClean="0"/>
+                <a:t>Template VM</a:t>
+              </a:r>
+              <a:endParaRPr kumimoji="1" lang="ja-JP" altLang="en-US" dirty="0"/>
+            </a:p>
+          </p:txBody>
+        </p:sp>
+      </p:grpSp>
+      <p:sp>
+        <p:nvSpPr>
+          <p:cNvPr id="20" name="角丸四角形 19"/>
+          <p:cNvSpPr/>
+          <p:nvPr/>
+        </p:nvSpPr>
+        <p:spPr>
+          <a:xfrm>
+            <a:off x="9598913" y="-179980"/>
+            <a:ext cx="1856486" cy="6750712"/>
+          </a:xfrm>
+          <a:prstGeom prst="roundRect">
+            <a:avLst>
+              <a:gd name="adj" fmla="val 5543"/>
+            </a:avLst>
+          </a:prstGeom>
+          <a:solidFill>
+            <a:schemeClr val="bg1"/>
+          </a:solidFill>
+          <a:ln w="38100">
+            <a:solidFill>
+              <a:schemeClr val="tx1"/>
+            </a:solidFill>
+          </a:ln>
+        </p:spPr>
+        <p:style>
+          <a:lnRef idx="2">
+            <a:schemeClr val="accent1">
+              <a:shade val="50000"/>
+            </a:schemeClr>
+          </a:lnRef>
+          <a:fillRef idx="1">
+            <a:schemeClr val="accent1"/>
+          </a:fillRef>
+          <a:effectRef idx="0">
+            <a:schemeClr val="accent1"/>
+          </a:effectRef>
+          <a:fontRef idx="minor">
+            <a:schemeClr val="lt1"/>
+          </a:fontRef>
+        </p:style>
+        <p:txBody>
+          <a:bodyPr rtlCol="0" anchor="ctr"/>
+          <a:lstStyle/>
+          <a:p>
+            <a:pPr algn="ctr"/>
+            <a:endParaRPr kumimoji="1" lang="ja-JP" altLang="en-US"/>
+          </a:p>
+        </p:txBody>
+      </p:sp>
+      <p:grpSp>
+        <p:nvGrpSpPr>
+          <p:cNvPr id="13" name="グループ化 12"/>
+          <p:cNvGrpSpPr/>
+          <p:nvPr/>
+        </p:nvGrpSpPr>
+        <p:grpSpPr>
+          <a:xfrm>
+            <a:off x="9935712" y="73319"/>
+            <a:ext cx="1143518" cy="1321832"/>
+            <a:chOff x="6491578" y="549570"/>
+            <a:chExt cx="1143518" cy="1321832"/>
+          </a:xfrm>
+        </p:grpSpPr>
+        <p:pic>
+          <p:nvPicPr>
+            <p:cNvPr id="7" name="図 6"/>
+            <p:cNvPicPr>
+              <a:picLocks noChangeAspect="1"/>
+            </p:cNvPicPr>
+            <p:nvPr/>
+          </p:nvPicPr>
+          <p:blipFill>
+            <a:blip r:embed="rId3"/>
+            <a:stretch>
+              <a:fillRect/>
+            </a:stretch>
+          </p:blipFill>
+          <p:spPr>
+            <a:xfrm>
+              <a:off x="6587087" y="918902"/>
+              <a:ext cx="952500" cy="952500"/>
+            </a:xfrm>
+            <a:prstGeom prst="rect">
+              <a:avLst/>
+            </a:prstGeom>
+          </p:spPr>
+        </p:pic>
+        <p:sp>
+          <p:nvSpPr>
+            <p:cNvPr id="10" name="テキスト ボックス 9"/>
+            <p:cNvSpPr txBox="1"/>
+            <p:nvPr/>
+          </p:nvSpPr>
+          <p:spPr>
+            <a:xfrm>
+              <a:off x="6491578" y="549570"/>
+              <a:ext cx="1143518" cy="369332"/>
+            </a:xfrm>
+            <a:prstGeom prst="rect">
+              <a:avLst/>
+            </a:prstGeom>
+            <a:noFill/>
+          </p:spPr>
+          <p:txBody>
+            <a:bodyPr wrap="none" rtlCol="0">
+              <a:spAutoFit/>
+            </a:bodyPr>
+            <a:lstStyle/>
+            <a:p>
+              <a:r>
+                <a:rPr lang="en-US" altLang="ja-JP" dirty="0" err="1" smtClean="0"/>
+                <a:t>vC</a:t>
+              </a:r>
+              <a:r>
+                <a:rPr lang="en-US" altLang="ja-JP" dirty="0" smtClean="0"/>
+                <a:t> Backup</a:t>
+              </a:r>
+              <a:endParaRPr kumimoji="1" lang="ja-JP" altLang="en-US" dirty="0"/>
+            </a:p>
+          </p:txBody>
+        </p:sp>
+      </p:grpSp>
+      <p:grpSp>
+        <p:nvGrpSpPr>
+          <p:cNvPr id="14" name="グループ化 13"/>
+          <p:cNvGrpSpPr/>
+          <p:nvPr/>
+        </p:nvGrpSpPr>
+        <p:grpSpPr>
+          <a:xfrm>
+            <a:off x="9935712" y="1684373"/>
+            <a:ext cx="1151277" cy="1321832"/>
+            <a:chOff x="6491578" y="549570"/>
+            <a:chExt cx="1151277" cy="1321832"/>
+          </a:xfrm>
+        </p:grpSpPr>
+        <p:pic>
+          <p:nvPicPr>
+            <p:cNvPr id="15" name="図 14"/>
+            <p:cNvPicPr>
+              <a:picLocks noChangeAspect="1"/>
+            </p:cNvPicPr>
+            <p:nvPr/>
+          </p:nvPicPr>
+          <p:blipFill>
+            <a:blip r:embed="rId3"/>
+            <a:stretch>
+              <a:fillRect/>
+            </a:stretch>
+          </p:blipFill>
+          <p:spPr>
+            <a:xfrm>
+              <a:off x="6587087" y="918902"/>
+              <a:ext cx="952500" cy="952500"/>
+            </a:xfrm>
+            <a:prstGeom prst="rect">
+              <a:avLst/>
+            </a:prstGeom>
+          </p:spPr>
+        </p:pic>
+        <p:sp>
+          <p:nvSpPr>
+            <p:cNvPr id="16" name="テキスト ボックス 15"/>
+            <p:cNvSpPr txBox="1"/>
+            <p:nvPr/>
+          </p:nvSpPr>
+          <p:spPr>
+            <a:xfrm>
+              <a:off x="6491578" y="549570"/>
+              <a:ext cx="1151277" cy="369332"/>
+            </a:xfrm>
+            <a:prstGeom prst="rect">
+              <a:avLst/>
+            </a:prstGeom>
+            <a:noFill/>
+          </p:spPr>
+          <p:txBody>
+            <a:bodyPr wrap="none" rtlCol="0">
+              <a:spAutoFit/>
+            </a:bodyPr>
+            <a:lstStyle/>
+            <a:p>
+              <a:r>
+                <a:rPr lang="en-US" altLang="ja-JP" dirty="0" err="1" smtClean="0"/>
+                <a:t>Ioping</a:t>
+              </a:r>
+              <a:r>
+                <a:rPr lang="en-US" altLang="ja-JP" dirty="0" smtClean="0"/>
+                <a:t> VM</a:t>
+              </a:r>
+              <a:endParaRPr kumimoji="1" lang="ja-JP" altLang="en-US" dirty="0"/>
+            </a:p>
+          </p:txBody>
+        </p:sp>
+      </p:grpSp>
+      <p:grpSp>
+        <p:nvGrpSpPr>
+          <p:cNvPr id="17" name="グループ化 16"/>
+          <p:cNvGrpSpPr/>
+          <p:nvPr/>
+        </p:nvGrpSpPr>
+        <p:grpSpPr>
+          <a:xfrm>
+            <a:off x="9935712" y="3295427"/>
+            <a:ext cx="1104148" cy="1321832"/>
+            <a:chOff x="6491578" y="549570"/>
+            <a:chExt cx="1104148" cy="1321832"/>
+          </a:xfrm>
+        </p:grpSpPr>
+        <p:pic>
+          <p:nvPicPr>
+            <p:cNvPr id="18" name="図 17"/>
+            <p:cNvPicPr>
+              <a:picLocks noChangeAspect="1"/>
+            </p:cNvPicPr>
+            <p:nvPr/>
+          </p:nvPicPr>
+          <p:blipFill>
+            <a:blip r:embed="rId3"/>
+            <a:stretch>
+              <a:fillRect/>
+            </a:stretch>
+          </p:blipFill>
+          <p:spPr>
+            <a:xfrm>
+              <a:off x="6587087" y="918902"/>
+              <a:ext cx="952500" cy="952500"/>
+            </a:xfrm>
+            <a:prstGeom prst="rect">
+              <a:avLst/>
+            </a:prstGeom>
+          </p:spPr>
+        </p:pic>
+        <p:sp>
+          <p:nvSpPr>
+            <p:cNvPr id="19" name="テキスト ボックス 18"/>
+            <p:cNvSpPr txBox="1"/>
+            <p:nvPr/>
+          </p:nvSpPr>
+          <p:spPr>
+            <a:xfrm>
+              <a:off x="6491578" y="549570"/>
+              <a:ext cx="1104148" cy="369332"/>
+            </a:xfrm>
+            <a:prstGeom prst="rect">
+              <a:avLst/>
+            </a:prstGeom>
+            <a:noFill/>
+          </p:spPr>
+          <p:txBody>
+            <a:bodyPr wrap="none" rtlCol="0">
+              <a:spAutoFit/>
+            </a:bodyPr>
+            <a:lstStyle/>
+            <a:p>
+              <a:r>
+                <a:rPr lang="en-US" altLang="ja-JP" dirty="0" err="1" smtClean="0"/>
+                <a:t>webproxy</a:t>
+              </a:r>
+              <a:endParaRPr kumimoji="1" lang="ja-JP" altLang="en-US" dirty="0"/>
+            </a:p>
+          </p:txBody>
+        </p:sp>
+      </p:grpSp>
+      <p:grpSp>
+        <p:nvGrpSpPr>
+          <p:cNvPr id="21" name="グループ化 20"/>
+          <p:cNvGrpSpPr/>
+          <p:nvPr/>
+        </p:nvGrpSpPr>
+        <p:grpSpPr>
+          <a:xfrm>
+            <a:off x="9955397" y="4906481"/>
+            <a:ext cx="1128835" cy="1321832"/>
+            <a:chOff x="6491578" y="549570"/>
+            <a:chExt cx="1128835" cy="1321832"/>
+          </a:xfrm>
+        </p:grpSpPr>
+        <p:pic>
+          <p:nvPicPr>
+            <p:cNvPr id="22" name="図 21"/>
+            <p:cNvPicPr>
+              <a:picLocks noChangeAspect="1"/>
+            </p:cNvPicPr>
+            <p:nvPr/>
+          </p:nvPicPr>
+          <p:blipFill>
+            <a:blip r:embed="rId3"/>
+            <a:stretch>
+              <a:fillRect/>
+            </a:stretch>
+          </p:blipFill>
+          <p:spPr>
+            <a:xfrm>
+              <a:off x="6587087" y="918902"/>
+              <a:ext cx="952500" cy="952500"/>
+            </a:xfrm>
+            <a:prstGeom prst="rect">
+              <a:avLst/>
+            </a:prstGeom>
+          </p:spPr>
+        </p:pic>
+        <p:sp>
+          <p:nvSpPr>
+            <p:cNvPr id="23" name="テキスト ボックス 22"/>
+            <p:cNvSpPr txBox="1"/>
+            <p:nvPr/>
+          </p:nvSpPr>
+          <p:spPr>
+            <a:xfrm>
+              <a:off x="6491578" y="549570"/>
+              <a:ext cx="1128835" cy="369332"/>
+            </a:xfrm>
+            <a:prstGeom prst="rect">
+              <a:avLst/>
+            </a:prstGeom>
+            <a:noFill/>
+          </p:spPr>
+          <p:txBody>
+            <a:bodyPr wrap="none" rtlCol="0">
+              <a:spAutoFit/>
+            </a:bodyPr>
+            <a:lstStyle/>
+            <a:p>
+              <a:r>
+                <a:rPr lang="en-US" altLang="ja-JP" dirty="0" smtClean="0"/>
+                <a:t>Check VM</a:t>
+              </a:r>
+              <a:endParaRPr kumimoji="1" lang="ja-JP" altLang="en-US" dirty="0"/>
+            </a:p>
+          </p:txBody>
+        </p:sp>
+      </p:grpSp>
+      <p:cxnSp>
+        <p:nvCxnSpPr>
+          <p:cNvPr id="25" name="直線矢印コネクタ 24"/>
+          <p:cNvCxnSpPr>
+            <a:endCxn id="7" idx="1"/>
+          </p:cNvCxnSpPr>
+          <p:nvPr/>
+        </p:nvCxnSpPr>
+        <p:spPr>
+          <a:xfrm flipV="1">
+            <a:off x="7341979" y="918901"/>
+            <a:ext cx="2689242" cy="2276476"/>
+          </a:xfrm>
+          <a:prstGeom prst="straightConnector1">
+            <a:avLst/>
+          </a:prstGeom>
+          <a:ln w="76200">
+            <a:solidFill>
+              <a:schemeClr val="tx1"/>
+            </a:solidFill>
+            <a:tailEnd type="triangle"/>
+          </a:ln>
+        </p:spPr>
+        <p:style>
+          <a:lnRef idx="1">
+            <a:schemeClr val="accent1"/>
+          </a:lnRef>
+          <a:fillRef idx="0">
+            <a:schemeClr val="accent1"/>
+          </a:fillRef>
+          <a:effectRef idx="0">
+            <a:schemeClr val="accent1"/>
+          </a:effectRef>
+          <a:fontRef idx="minor">
+            <a:schemeClr val="tx1"/>
+          </a:fontRef>
+        </p:style>
+      </p:cxnSp>
+      <p:cxnSp>
+        <p:nvCxnSpPr>
+          <p:cNvPr id="28" name="直線矢印コネクタ 27"/>
+          <p:cNvCxnSpPr>
+            <a:endCxn id="15" idx="1"/>
+          </p:cNvCxnSpPr>
+          <p:nvPr/>
+        </p:nvCxnSpPr>
+        <p:spPr>
+          <a:xfrm flipV="1">
+            <a:off x="7341979" y="2529955"/>
+            <a:ext cx="2689242" cy="665422"/>
+          </a:xfrm>
+          <a:prstGeom prst="straightConnector1">
+            <a:avLst/>
+          </a:prstGeom>
+          <a:ln w="76200">
+            <a:solidFill>
+              <a:schemeClr val="tx1"/>
+            </a:solidFill>
+            <a:tailEnd type="triangle"/>
+          </a:ln>
+        </p:spPr>
+        <p:style>
+          <a:lnRef idx="1">
+            <a:schemeClr val="accent1"/>
+          </a:lnRef>
+          <a:fillRef idx="0">
+            <a:schemeClr val="accent1"/>
+          </a:fillRef>
+          <a:effectRef idx="0">
+            <a:schemeClr val="accent1"/>
+          </a:effectRef>
+          <a:fontRef idx="minor">
+            <a:schemeClr val="tx1"/>
+          </a:fontRef>
+        </p:style>
+      </p:cxnSp>
+      <p:cxnSp>
+        <p:nvCxnSpPr>
+          <p:cNvPr id="31" name="直線矢印コネクタ 30"/>
+          <p:cNvCxnSpPr>
+            <a:endCxn id="18" idx="1"/>
+          </p:cNvCxnSpPr>
+          <p:nvPr/>
+        </p:nvCxnSpPr>
+        <p:spPr>
+          <a:xfrm>
+            <a:off x="7341979" y="3195377"/>
+            <a:ext cx="2689242" cy="945632"/>
+          </a:xfrm>
+          <a:prstGeom prst="straightConnector1">
+            <a:avLst/>
+          </a:prstGeom>
+          <a:ln w="76200">
+            <a:solidFill>
+              <a:schemeClr val="tx1"/>
+            </a:solidFill>
+            <a:tailEnd type="triangle"/>
+          </a:ln>
+        </p:spPr>
+        <p:style>
+          <a:lnRef idx="1">
+            <a:schemeClr val="accent1"/>
+          </a:lnRef>
+          <a:fillRef idx="0">
+            <a:schemeClr val="accent1"/>
+          </a:fillRef>
+          <a:effectRef idx="0">
+            <a:schemeClr val="accent1"/>
+          </a:effectRef>
+          <a:fontRef idx="minor">
+            <a:schemeClr val="tx1"/>
+          </a:fontRef>
+        </p:style>
+      </p:cxnSp>
+      <p:cxnSp>
+        <p:nvCxnSpPr>
+          <p:cNvPr id="34" name="直線矢印コネクタ 33"/>
+          <p:cNvCxnSpPr>
+            <a:endCxn id="22" idx="1"/>
+          </p:cNvCxnSpPr>
+          <p:nvPr/>
+        </p:nvCxnSpPr>
+        <p:spPr>
+          <a:xfrm>
+            <a:off x="7341979" y="3195377"/>
+            <a:ext cx="2708927" cy="2556686"/>
+          </a:xfrm>
+          <a:prstGeom prst="straightConnector1">
+            <a:avLst/>
+          </a:prstGeom>
+          <a:ln w="76200">
+            <a:solidFill>
+              <a:schemeClr val="tx1"/>
+            </a:solidFill>
+            <a:tailEnd type="triangle"/>
+          </a:ln>
+        </p:spPr>
+        <p:style>
+          <a:lnRef idx="1">
+            <a:schemeClr val="accent1"/>
+          </a:lnRef>
+          <a:fillRef idx="0">
+            <a:schemeClr val="accent1"/>
+          </a:fillRef>
+          <a:effectRef idx="0">
+            <a:schemeClr val="accent1"/>
+          </a:effectRef>
+          <a:fontRef idx="minor">
+            <a:schemeClr val="tx1"/>
+          </a:fontRef>
+        </p:style>
+      </p:cxnSp>
+      <p:pic>
+        <p:nvPicPr>
+          <p:cNvPr id="45" name="図 44"/>
+          <p:cNvPicPr>
+            <a:picLocks noChangeAspect="1"/>
+          </p:cNvPicPr>
+          <p:nvPr/>
+        </p:nvPicPr>
+        <p:blipFill>
+          <a:blip r:embed="rId4"/>
+          <a:stretch>
+            <a:fillRect/>
+          </a:stretch>
+        </p:blipFill>
+        <p:spPr>
+          <a:xfrm>
+            <a:off x="4627524" y="2613451"/>
+            <a:ext cx="1163849" cy="1163849"/>
+          </a:xfrm>
+          <a:prstGeom prst="rect">
+            <a:avLst/>
+          </a:prstGeom>
+        </p:spPr>
+      </p:pic>
+      <p:grpSp>
+        <p:nvGrpSpPr>
+          <p:cNvPr id="57" name="グループ化 56"/>
+          <p:cNvGrpSpPr/>
+          <p:nvPr/>
+        </p:nvGrpSpPr>
+        <p:grpSpPr>
+          <a:xfrm>
+            <a:off x="-1726320" y="1789046"/>
+            <a:ext cx="2377574" cy="2032131"/>
+            <a:chOff x="-3112200" y="1745169"/>
+            <a:chExt cx="2377574" cy="2032131"/>
+          </a:xfrm>
+        </p:grpSpPr>
+        <p:pic>
+          <p:nvPicPr>
+            <p:cNvPr id="52" name="図 51"/>
+            <p:cNvPicPr>
+              <a:picLocks noChangeAspect="1"/>
+            </p:cNvPicPr>
+            <p:nvPr/>
+          </p:nvPicPr>
+          <p:blipFill>
+            <a:blip r:embed="rId5"/>
+            <a:stretch>
+              <a:fillRect/>
+            </a:stretch>
+          </p:blipFill>
+          <p:spPr>
+            <a:xfrm>
+              <a:off x="-1923413" y="2824800"/>
+              <a:ext cx="952500" cy="952500"/>
+            </a:xfrm>
+            <a:prstGeom prst="rect">
+              <a:avLst/>
+            </a:prstGeom>
+          </p:spPr>
+        </p:pic>
+        <p:sp>
+          <p:nvSpPr>
+            <p:cNvPr id="56" name="テキスト ボックス 55"/>
+            <p:cNvSpPr txBox="1"/>
+            <p:nvPr/>
+          </p:nvSpPr>
+          <p:spPr>
+            <a:xfrm>
+              <a:off x="-3112200" y="1745169"/>
+              <a:ext cx="2377574" cy="584775"/>
+            </a:xfrm>
+            <a:prstGeom prst="rect">
+              <a:avLst/>
+            </a:prstGeom>
+            <a:noFill/>
+          </p:spPr>
+          <p:txBody>
+            <a:bodyPr wrap="none" rtlCol="0">
+              <a:spAutoFit/>
+            </a:bodyPr>
+            <a:lstStyle/>
+            <a:p>
+              <a:r>
+                <a:rPr lang="en-US" altLang="ja-JP" sz="3200" b="1" dirty="0" smtClean="0"/>
+                <a:t>UI Operation</a:t>
+              </a:r>
+              <a:endParaRPr kumimoji="1" lang="ja-JP" altLang="en-US" sz="3200" b="1" dirty="0"/>
+            </a:p>
+          </p:txBody>
+        </p:sp>
+      </p:grpSp>
+      <p:sp>
+        <p:nvSpPr>
+          <p:cNvPr id="58" name="右矢印 57"/>
+          <p:cNvSpPr/>
+          <p:nvPr/>
+        </p:nvSpPr>
+        <p:spPr>
+          <a:xfrm>
+            <a:off x="699224" y="2710014"/>
+            <a:ext cx="1021491" cy="934172"/>
+          </a:xfrm>
+          <a:prstGeom prst="rightArrow">
+            <a:avLst/>
+          </a:prstGeom>
+          <a:solidFill>
+            <a:schemeClr val="bg1">
+              <a:lumMod val="95000"/>
+            </a:schemeClr>
+          </a:solidFill>
+          <a:ln w="38100">
+            <a:solidFill>
+              <a:schemeClr val="tx1"/>
+            </a:solidFill>
+          </a:ln>
+        </p:spPr>
+        <p:style>
+          <a:lnRef idx="2">
+            <a:schemeClr val="accent1">
+              <a:shade val="50000"/>
+            </a:schemeClr>
+          </a:lnRef>
+          <a:fillRef idx="1">
+            <a:schemeClr val="accent1"/>
+          </a:fillRef>
+          <a:effectRef idx="0">
+            <a:schemeClr val="accent1"/>
+          </a:effectRef>
+          <a:fontRef idx="minor">
+            <a:schemeClr val="lt1"/>
+          </a:fontRef>
+        </p:style>
+        <p:txBody>
+          <a:bodyPr rtlCol="0" anchor="ctr"/>
+          <a:lstStyle/>
+          <a:p>
+            <a:pPr algn="ctr"/>
+            <a:endParaRPr kumimoji="1" lang="ja-JP" altLang="en-US"/>
+          </a:p>
+        </p:txBody>
+      </p:sp>
+      <p:pic>
+        <p:nvPicPr>
+          <p:cNvPr id="59" name="図 58"/>
+          <p:cNvPicPr>
+            <a:picLocks noChangeAspect="1"/>
+          </p:cNvPicPr>
+          <p:nvPr/>
+        </p:nvPicPr>
+        <p:blipFill>
+          <a:blip r:embed="rId6"/>
+          <a:stretch>
+            <a:fillRect/>
+          </a:stretch>
+        </p:blipFill>
+        <p:spPr>
+          <a:xfrm>
+            <a:off x="-2240513" y="2373821"/>
+            <a:ext cx="1655226" cy="1655226"/>
+          </a:xfrm>
+          <a:prstGeom prst="rect">
+            <a:avLst/>
+          </a:prstGeom>
+        </p:spPr>
+      </p:pic>
     </p:spTree>
     <p:extLst>
       <p:ext uri="{BB962C8B-B14F-4D97-AF65-F5344CB8AC3E}">
         <p14:creationId xmlns:p14="http://schemas.microsoft.com/office/powerpoint/2010/main" val="1168859030"/>
+      </p:ext>
+    </p:extLst>
+  </p:cSld>
+  <p:clrMapOvr>
+    <a:masterClrMapping/>
+  </p:clrMapOvr>
+</p:sld>
+</file>
+
+<file path=ppt/slides/slide7.xml><?xml version="1.0" encoding="utf-8"?>
+<p:sld xmlns:a="http://schemas.openxmlformats.org/drawingml/2006/main" xmlns:r="http://schemas.openxmlformats.org/officeDocument/2006/relationships" xmlns:p="http://schemas.openxmlformats.org/presentationml/2006/main">
+  <p:cSld>
+    <p:spTree>
+      <p:nvGrpSpPr>
+        <p:cNvPr id="1" name=""/>
+        <p:cNvGrpSpPr/>
+        <p:nvPr/>
+      </p:nvGrpSpPr>
+      <p:grpSpPr>
+        <a:xfrm>
+          <a:off x="0" y="0"/>
+          <a:ext cx="0" cy="0"/>
+          <a:chOff x="0" y="0"/>
+          <a:chExt cx="0" cy="0"/>
+        </a:xfrm>
+      </p:grpSpPr>
+      <p:sp>
+        <p:nvSpPr>
+          <p:cNvPr id="147" name="角丸四角形 146"/>
+          <p:cNvSpPr/>
+          <p:nvPr/>
+        </p:nvSpPr>
+        <p:spPr>
+          <a:xfrm>
+            <a:off x="500123" y="-230000"/>
+            <a:ext cx="11198392" cy="6819485"/>
+          </a:xfrm>
+          <a:prstGeom prst="roundRect">
+            <a:avLst>
+              <a:gd name="adj" fmla="val 8383"/>
+            </a:avLst>
+          </a:prstGeom>
+          <a:solidFill>
+            <a:schemeClr val="bg1"/>
+          </a:solidFill>
+          <a:ln w="38100">
+            <a:solidFill>
+              <a:schemeClr val="tx1"/>
+            </a:solidFill>
+          </a:ln>
+        </p:spPr>
+        <p:style>
+          <a:lnRef idx="2">
+            <a:schemeClr val="accent1">
+              <a:shade val="50000"/>
+            </a:schemeClr>
+          </a:lnRef>
+          <a:fillRef idx="1">
+            <a:schemeClr val="accent1"/>
+          </a:fillRef>
+          <a:effectRef idx="0">
+            <a:schemeClr val="accent1"/>
+          </a:effectRef>
+          <a:fontRef idx="minor">
+            <a:schemeClr val="lt1"/>
+          </a:fontRef>
+        </p:style>
+        <p:txBody>
+          <a:bodyPr rtlCol="0" anchor="ctr"/>
+          <a:lstStyle/>
+          <a:p>
+            <a:pPr algn="ctr"/>
+            <a:endParaRPr kumimoji="1" lang="ja-JP" altLang="en-US"/>
+          </a:p>
+        </p:txBody>
+      </p:sp>
+      <p:pic>
+        <p:nvPicPr>
+          <p:cNvPr id="4" name="図 3"/>
+          <p:cNvPicPr>
+            <a:picLocks noChangeAspect="1"/>
+          </p:cNvPicPr>
+          <p:nvPr/>
+        </p:nvPicPr>
+        <p:blipFill>
+          <a:blip r:embed="rId2" cstate="print">
+            <a:extLst>
+              <a:ext uri="{28A0092B-C50C-407E-A947-70E740481C1C}">
+                <a14:useLocalDpi xmlns:a14="http://schemas.microsoft.com/office/drawing/2010/main" val="0"/>
+              </a:ext>
+            </a:extLst>
+          </a:blip>
+          <a:stretch>
+            <a:fillRect/>
+          </a:stretch>
+        </p:blipFill>
+        <p:spPr>
+          <a:xfrm>
+            <a:off x="0" y="-940943"/>
+            <a:ext cx="1154125" cy="1881886"/>
+          </a:xfrm>
+          <a:prstGeom prst="rect">
+            <a:avLst/>
+          </a:prstGeom>
+        </p:spPr>
+      </p:pic>
+      <p:pic>
+        <p:nvPicPr>
+          <p:cNvPr id="5" name="図 4"/>
+          <p:cNvPicPr>
+            <a:picLocks noChangeAspect="1"/>
+          </p:cNvPicPr>
+          <p:nvPr/>
+        </p:nvPicPr>
+        <p:blipFill>
+          <a:blip r:embed="rId3"/>
+          <a:stretch>
+            <a:fillRect/>
+          </a:stretch>
+        </p:blipFill>
+        <p:spPr>
+          <a:xfrm>
+            <a:off x="5317724" y="347224"/>
+            <a:ext cx="1047750" cy="1047750"/>
+          </a:xfrm>
+          <a:prstGeom prst="rect">
+            <a:avLst/>
+          </a:prstGeom>
+        </p:spPr>
+      </p:pic>
+      <p:sp>
+        <p:nvSpPr>
+          <p:cNvPr id="6" name="テキスト ボックス 5"/>
+          <p:cNvSpPr txBox="1"/>
+          <p:nvPr/>
+        </p:nvSpPr>
+        <p:spPr>
+          <a:xfrm>
+            <a:off x="4845750" y="-22108"/>
+            <a:ext cx="1991699" cy="369332"/>
+          </a:xfrm>
+          <a:prstGeom prst="rect">
+            <a:avLst/>
+          </a:prstGeom>
+          <a:noFill/>
+        </p:spPr>
+        <p:txBody>
+          <a:bodyPr wrap="none" rtlCol="0">
+            <a:spAutoFit/>
+          </a:bodyPr>
+          <a:lstStyle/>
+          <a:p>
+            <a:r>
+              <a:rPr lang="en-US" altLang="ja-JP" dirty="0" smtClean="0"/>
+              <a:t>Delete </a:t>
+            </a:r>
+            <a:r>
+              <a:rPr lang="en-US" altLang="ja-JP" dirty="0"/>
+              <a:t>VM </a:t>
+            </a:r>
+            <a:r>
+              <a:rPr lang="en-US" altLang="ja-JP" dirty="0" smtClean="0"/>
+              <a:t>Monitor</a:t>
+            </a:r>
+            <a:endParaRPr kumimoji="1" lang="ja-JP" altLang="en-US" dirty="0"/>
+          </a:p>
+        </p:txBody>
+      </p:sp>
+      <p:pic>
+        <p:nvPicPr>
+          <p:cNvPr id="7" name="図 6"/>
+          <p:cNvPicPr>
+            <a:picLocks noChangeAspect="1"/>
+          </p:cNvPicPr>
+          <p:nvPr/>
+        </p:nvPicPr>
+        <p:blipFill>
+          <a:blip r:embed="rId4"/>
+          <a:stretch>
+            <a:fillRect/>
+          </a:stretch>
+        </p:blipFill>
+        <p:spPr>
+          <a:xfrm>
+            <a:off x="1842600" y="2065919"/>
+            <a:ext cx="952500" cy="952500"/>
+          </a:xfrm>
+          <a:prstGeom prst="rect">
+            <a:avLst/>
+          </a:prstGeom>
+        </p:spPr>
+      </p:pic>
+      <p:pic>
+        <p:nvPicPr>
+          <p:cNvPr id="8" name="図 7"/>
+          <p:cNvPicPr>
+            <a:picLocks noChangeAspect="1"/>
+          </p:cNvPicPr>
+          <p:nvPr/>
+        </p:nvPicPr>
+        <p:blipFill>
+          <a:blip r:embed="rId4"/>
+          <a:stretch>
+            <a:fillRect/>
+          </a:stretch>
+        </p:blipFill>
+        <p:spPr>
+          <a:xfrm>
+            <a:off x="3016850" y="2065919"/>
+            <a:ext cx="952500" cy="952500"/>
+          </a:xfrm>
+          <a:prstGeom prst="rect">
+            <a:avLst/>
+          </a:prstGeom>
+        </p:spPr>
+      </p:pic>
+      <p:pic>
+        <p:nvPicPr>
+          <p:cNvPr id="11" name="図 10"/>
+          <p:cNvPicPr>
+            <a:picLocks noChangeAspect="1"/>
+          </p:cNvPicPr>
+          <p:nvPr/>
+        </p:nvPicPr>
+        <p:blipFill>
+          <a:blip r:embed="rId4"/>
+          <a:stretch>
+            <a:fillRect/>
+          </a:stretch>
+        </p:blipFill>
+        <p:spPr>
+          <a:xfrm>
+            <a:off x="4191100" y="2065919"/>
+            <a:ext cx="952500" cy="952500"/>
+          </a:xfrm>
+          <a:prstGeom prst="rect">
+            <a:avLst/>
+          </a:prstGeom>
+        </p:spPr>
+      </p:pic>
+      <p:pic>
+        <p:nvPicPr>
+          <p:cNvPr id="12" name="図 11"/>
+          <p:cNvPicPr>
+            <a:picLocks noChangeAspect="1"/>
+          </p:cNvPicPr>
+          <p:nvPr/>
+        </p:nvPicPr>
+        <p:blipFill>
+          <a:blip r:embed="rId4"/>
+          <a:stretch>
+            <a:fillRect/>
+          </a:stretch>
+        </p:blipFill>
+        <p:spPr>
+          <a:xfrm>
+            <a:off x="5365350" y="2065919"/>
+            <a:ext cx="952500" cy="952500"/>
+          </a:xfrm>
+          <a:prstGeom prst="rect">
+            <a:avLst/>
+          </a:prstGeom>
+        </p:spPr>
+      </p:pic>
+      <p:pic>
+        <p:nvPicPr>
+          <p:cNvPr id="13" name="図 12"/>
+          <p:cNvPicPr>
+            <a:picLocks noChangeAspect="1"/>
+          </p:cNvPicPr>
+          <p:nvPr/>
+        </p:nvPicPr>
+        <p:blipFill>
+          <a:blip r:embed="rId4"/>
+          <a:stretch>
+            <a:fillRect/>
+          </a:stretch>
+        </p:blipFill>
+        <p:spPr>
+          <a:xfrm>
+            <a:off x="6539600" y="2065919"/>
+            <a:ext cx="952500" cy="952500"/>
+          </a:xfrm>
+          <a:prstGeom prst="rect">
+            <a:avLst/>
+          </a:prstGeom>
+        </p:spPr>
+      </p:pic>
+      <p:pic>
+        <p:nvPicPr>
+          <p:cNvPr id="14" name="図 13"/>
+          <p:cNvPicPr>
+            <a:picLocks noChangeAspect="1"/>
+          </p:cNvPicPr>
+          <p:nvPr/>
+        </p:nvPicPr>
+        <p:blipFill>
+          <a:blip r:embed="rId4"/>
+          <a:stretch>
+            <a:fillRect/>
+          </a:stretch>
+        </p:blipFill>
+        <p:spPr>
+          <a:xfrm>
+            <a:off x="7713850" y="2065919"/>
+            <a:ext cx="952500" cy="952500"/>
+          </a:xfrm>
+          <a:prstGeom prst="rect">
+            <a:avLst/>
+          </a:prstGeom>
+        </p:spPr>
+      </p:pic>
+      <p:pic>
+        <p:nvPicPr>
+          <p:cNvPr id="15" name="図 14"/>
+          <p:cNvPicPr>
+            <a:picLocks noChangeAspect="1"/>
+          </p:cNvPicPr>
+          <p:nvPr/>
+        </p:nvPicPr>
+        <p:blipFill>
+          <a:blip r:embed="rId4"/>
+          <a:stretch>
+            <a:fillRect/>
+          </a:stretch>
+        </p:blipFill>
+        <p:spPr>
+          <a:xfrm>
+            <a:off x="8888100" y="2065919"/>
+            <a:ext cx="952500" cy="952500"/>
+          </a:xfrm>
+          <a:prstGeom prst="rect">
+            <a:avLst/>
+          </a:prstGeom>
+        </p:spPr>
+      </p:pic>
+      <p:sp>
+        <p:nvSpPr>
+          <p:cNvPr id="16" name="テキスト ボックス 15"/>
+          <p:cNvSpPr txBox="1"/>
+          <p:nvPr/>
+        </p:nvSpPr>
+        <p:spPr>
+          <a:xfrm>
+            <a:off x="4085261" y="-22108"/>
+            <a:ext cx="776879" cy="369332"/>
+          </a:xfrm>
+          <a:prstGeom prst="rect">
+            <a:avLst/>
+          </a:prstGeom>
+          <a:noFill/>
+        </p:spPr>
+        <p:txBody>
+          <a:bodyPr wrap="none" rtlCol="0">
+            <a:spAutoFit/>
+          </a:bodyPr>
+          <a:lstStyle/>
+          <a:p>
+            <a:r>
+              <a:rPr lang="en-US" altLang="ja-JP" dirty="0" smtClean="0"/>
+              <a:t>Step.1</a:t>
+            </a:r>
+            <a:endParaRPr kumimoji="1" lang="ja-JP" altLang="en-US" dirty="0"/>
+          </a:p>
+        </p:txBody>
+      </p:sp>
+      <p:cxnSp>
+        <p:nvCxnSpPr>
+          <p:cNvPr id="17" name="直線矢印コネクタ 16"/>
+          <p:cNvCxnSpPr>
+            <a:stCxn id="5" idx="2"/>
+          </p:cNvCxnSpPr>
+          <p:nvPr/>
+        </p:nvCxnSpPr>
+        <p:spPr>
+          <a:xfrm flipH="1">
+            <a:off x="2257425" y="1394974"/>
+            <a:ext cx="3584174" cy="670945"/>
+          </a:xfrm>
+          <a:prstGeom prst="straightConnector1">
+            <a:avLst/>
+          </a:prstGeom>
+          <a:ln w="38100">
+            <a:solidFill>
+              <a:schemeClr val="tx1"/>
+            </a:solidFill>
+            <a:tailEnd type="triangle"/>
+          </a:ln>
+        </p:spPr>
+        <p:style>
+          <a:lnRef idx="1">
+            <a:schemeClr val="accent1"/>
+          </a:lnRef>
+          <a:fillRef idx="0">
+            <a:schemeClr val="accent1"/>
+          </a:fillRef>
+          <a:effectRef idx="0">
+            <a:schemeClr val="accent1"/>
+          </a:effectRef>
+          <a:fontRef idx="minor">
+            <a:schemeClr val="tx1"/>
+          </a:fontRef>
+        </p:style>
+      </p:cxnSp>
+      <p:cxnSp>
+        <p:nvCxnSpPr>
+          <p:cNvPr id="20" name="直線矢印コネクタ 19"/>
+          <p:cNvCxnSpPr/>
+          <p:nvPr/>
+        </p:nvCxnSpPr>
+        <p:spPr>
+          <a:xfrm flipH="1">
+            <a:off x="2257425" y="1382456"/>
+            <a:ext cx="3584174" cy="670945"/>
+          </a:xfrm>
+          <a:prstGeom prst="straightConnector1">
+            <a:avLst/>
+          </a:prstGeom>
+          <a:ln w="38100">
+            <a:solidFill>
+              <a:schemeClr val="tx1"/>
+            </a:solidFill>
+            <a:tailEnd type="triangle"/>
+          </a:ln>
+        </p:spPr>
+        <p:style>
+          <a:lnRef idx="1">
+            <a:schemeClr val="accent1"/>
+          </a:lnRef>
+          <a:fillRef idx="0">
+            <a:schemeClr val="accent1"/>
+          </a:fillRef>
+          <a:effectRef idx="0">
+            <a:schemeClr val="accent1"/>
+          </a:effectRef>
+          <a:fontRef idx="minor">
+            <a:schemeClr val="tx1"/>
+          </a:fontRef>
+        </p:style>
+      </p:cxnSp>
+      <p:cxnSp>
+        <p:nvCxnSpPr>
+          <p:cNvPr id="21" name="直線矢印コネクタ 20"/>
+          <p:cNvCxnSpPr>
+            <a:stCxn id="5" idx="2"/>
+            <a:endCxn id="8" idx="0"/>
+          </p:cNvCxnSpPr>
+          <p:nvPr/>
+        </p:nvCxnSpPr>
+        <p:spPr>
+          <a:xfrm flipH="1">
+            <a:off x="3493100" y="1394974"/>
+            <a:ext cx="2348499" cy="670945"/>
+          </a:xfrm>
+          <a:prstGeom prst="straightConnector1">
+            <a:avLst/>
+          </a:prstGeom>
+          <a:ln w="38100">
+            <a:solidFill>
+              <a:schemeClr val="tx1"/>
+            </a:solidFill>
+            <a:tailEnd type="triangle"/>
+          </a:ln>
+        </p:spPr>
+        <p:style>
+          <a:lnRef idx="1">
+            <a:schemeClr val="accent1"/>
+          </a:lnRef>
+          <a:fillRef idx="0">
+            <a:schemeClr val="accent1"/>
+          </a:fillRef>
+          <a:effectRef idx="0">
+            <a:schemeClr val="accent1"/>
+          </a:effectRef>
+          <a:fontRef idx="minor">
+            <a:schemeClr val="tx1"/>
+          </a:fontRef>
+        </p:style>
+      </p:cxnSp>
+      <p:cxnSp>
+        <p:nvCxnSpPr>
+          <p:cNvPr id="24" name="直線矢印コネクタ 23"/>
+          <p:cNvCxnSpPr>
+            <a:stCxn id="5" idx="2"/>
+            <a:endCxn id="11" idx="0"/>
+          </p:cNvCxnSpPr>
+          <p:nvPr/>
+        </p:nvCxnSpPr>
+        <p:spPr>
+          <a:xfrm flipH="1">
+            <a:off x="4667350" y="1394974"/>
+            <a:ext cx="1174249" cy="670945"/>
+          </a:xfrm>
+          <a:prstGeom prst="straightConnector1">
+            <a:avLst/>
+          </a:prstGeom>
+          <a:ln w="38100">
+            <a:solidFill>
+              <a:schemeClr val="tx1"/>
+            </a:solidFill>
+            <a:tailEnd type="triangle"/>
+          </a:ln>
+        </p:spPr>
+        <p:style>
+          <a:lnRef idx="1">
+            <a:schemeClr val="accent1"/>
+          </a:lnRef>
+          <a:fillRef idx="0">
+            <a:schemeClr val="accent1"/>
+          </a:fillRef>
+          <a:effectRef idx="0">
+            <a:schemeClr val="accent1"/>
+          </a:effectRef>
+          <a:fontRef idx="minor">
+            <a:schemeClr val="tx1"/>
+          </a:fontRef>
+        </p:style>
+      </p:cxnSp>
+      <p:cxnSp>
+        <p:nvCxnSpPr>
+          <p:cNvPr id="27" name="直線矢印コネクタ 26"/>
+          <p:cNvCxnSpPr>
+            <a:stCxn id="5" idx="2"/>
+            <a:endCxn id="12" idx="0"/>
+          </p:cNvCxnSpPr>
+          <p:nvPr/>
+        </p:nvCxnSpPr>
+        <p:spPr>
+          <a:xfrm>
+            <a:off x="5841599" y="1394974"/>
+            <a:ext cx="1" cy="670945"/>
+          </a:xfrm>
+          <a:prstGeom prst="straightConnector1">
+            <a:avLst/>
+          </a:prstGeom>
+          <a:ln w="38100">
+            <a:solidFill>
+              <a:schemeClr val="tx1"/>
+            </a:solidFill>
+            <a:tailEnd type="triangle"/>
+          </a:ln>
+        </p:spPr>
+        <p:style>
+          <a:lnRef idx="1">
+            <a:schemeClr val="accent1"/>
+          </a:lnRef>
+          <a:fillRef idx="0">
+            <a:schemeClr val="accent1"/>
+          </a:fillRef>
+          <a:effectRef idx="0">
+            <a:schemeClr val="accent1"/>
+          </a:effectRef>
+          <a:fontRef idx="minor">
+            <a:schemeClr val="tx1"/>
+          </a:fontRef>
+        </p:style>
+      </p:cxnSp>
+      <p:cxnSp>
+        <p:nvCxnSpPr>
+          <p:cNvPr id="30" name="直線矢印コネクタ 29"/>
+          <p:cNvCxnSpPr>
+            <a:stCxn id="5" idx="2"/>
+            <a:endCxn id="13" idx="0"/>
+          </p:cNvCxnSpPr>
+          <p:nvPr/>
+        </p:nvCxnSpPr>
+        <p:spPr>
+          <a:xfrm>
+            <a:off x="5841599" y="1394974"/>
+            <a:ext cx="1174251" cy="670945"/>
+          </a:xfrm>
+          <a:prstGeom prst="straightConnector1">
+            <a:avLst/>
+          </a:prstGeom>
+          <a:ln w="38100">
+            <a:solidFill>
+              <a:schemeClr val="tx1"/>
+            </a:solidFill>
+            <a:tailEnd type="triangle"/>
+          </a:ln>
+        </p:spPr>
+        <p:style>
+          <a:lnRef idx="1">
+            <a:schemeClr val="accent1"/>
+          </a:lnRef>
+          <a:fillRef idx="0">
+            <a:schemeClr val="accent1"/>
+          </a:fillRef>
+          <a:effectRef idx="0">
+            <a:schemeClr val="accent1"/>
+          </a:effectRef>
+          <a:fontRef idx="minor">
+            <a:schemeClr val="tx1"/>
+          </a:fontRef>
+        </p:style>
+      </p:cxnSp>
+      <p:cxnSp>
+        <p:nvCxnSpPr>
+          <p:cNvPr id="33" name="直線矢印コネクタ 32"/>
+          <p:cNvCxnSpPr>
+            <a:stCxn id="5" idx="2"/>
+            <a:endCxn id="14" idx="0"/>
+          </p:cNvCxnSpPr>
+          <p:nvPr/>
+        </p:nvCxnSpPr>
+        <p:spPr>
+          <a:xfrm>
+            <a:off x="5841599" y="1394974"/>
+            <a:ext cx="2348501" cy="670945"/>
+          </a:xfrm>
+          <a:prstGeom prst="straightConnector1">
+            <a:avLst/>
+          </a:prstGeom>
+          <a:ln w="38100">
+            <a:solidFill>
+              <a:schemeClr val="tx1"/>
+            </a:solidFill>
+            <a:tailEnd type="triangle"/>
+          </a:ln>
+        </p:spPr>
+        <p:style>
+          <a:lnRef idx="1">
+            <a:schemeClr val="accent1"/>
+          </a:lnRef>
+          <a:fillRef idx="0">
+            <a:schemeClr val="accent1"/>
+          </a:fillRef>
+          <a:effectRef idx="0">
+            <a:schemeClr val="accent1"/>
+          </a:effectRef>
+          <a:fontRef idx="minor">
+            <a:schemeClr val="tx1"/>
+          </a:fontRef>
+        </p:style>
+      </p:cxnSp>
+      <p:cxnSp>
+        <p:nvCxnSpPr>
+          <p:cNvPr id="36" name="直線矢印コネクタ 35"/>
+          <p:cNvCxnSpPr>
+            <a:stCxn id="5" idx="2"/>
+            <a:endCxn id="15" idx="0"/>
+          </p:cNvCxnSpPr>
+          <p:nvPr/>
+        </p:nvCxnSpPr>
+        <p:spPr>
+          <a:xfrm>
+            <a:off x="5841599" y="1394974"/>
+            <a:ext cx="3522751" cy="670945"/>
+          </a:xfrm>
+          <a:prstGeom prst="straightConnector1">
+            <a:avLst/>
+          </a:prstGeom>
+          <a:ln w="38100">
+            <a:solidFill>
+              <a:schemeClr val="tx1"/>
+            </a:solidFill>
+            <a:tailEnd type="triangle"/>
+          </a:ln>
+        </p:spPr>
+        <p:style>
+          <a:lnRef idx="1">
+            <a:schemeClr val="accent1"/>
+          </a:lnRef>
+          <a:fillRef idx="0">
+            <a:schemeClr val="accent1"/>
+          </a:fillRef>
+          <a:effectRef idx="0">
+            <a:schemeClr val="accent1"/>
+          </a:effectRef>
+          <a:fontRef idx="minor">
+            <a:schemeClr val="tx1"/>
+          </a:fontRef>
+        </p:style>
+      </p:cxnSp>
+      <p:pic>
+        <p:nvPicPr>
+          <p:cNvPr id="39" name="図 38"/>
+          <p:cNvPicPr>
+            <a:picLocks noChangeAspect="1"/>
+          </p:cNvPicPr>
+          <p:nvPr/>
+        </p:nvPicPr>
+        <p:blipFill>
+          <a:blip r:embed="rId5"/>
+          <a:stretch>
+            <a:fillRect/>
+          </a:stretch>
+        </p:blipFill>
+        <p:spPr>
+          <a:xfrm>
+            <a:off x="2980690" y="1598804"/>
+            <a:ext cx="544411" cy="544411"/>
+          </a:xfrm>
+          <a:prstGeom prst="rect">
+            <a:avLst/>
+          </a:prstGeom>
+        </p:spPr>
+      </p:pic>
+      <p:pic>
+        <p:nvPicPr>
+          <p:cNvPr id="40" name="図 39"/>
+          <p:cNvPicPr>
+            <a:picLocks noChangeAspect="1"/>
+          </p:cNvPicPr>
+          <p:nvPr/>
+        </p:nvPicPr>
+        <p:blipFill>
+          <a:blip r:embed="rId5"/>
+          <a:stretch>
+            <a:fillRect/>
+          </a:stretch>
+        </p:blipFill>
+        <p:spPr>
+          <a:xfrm>
+            <a:off x="3813056" y="1598804"/>
+            <a:ext cx="544411" cy="544411"/>
+          </a:xfrm>
+          <a:prstGeom prst="rect">
+            <a:avLst/>
+          </a:prstGeom>
+        </p:spPr>
+      </p:pic>
+      <p:pic>
+        <p:nvPicPr>
+          <p:cNvPr id="41" name="図 40"/>
+          <p:cNvPicPr>
+            <a:picLocks noChangeAspect="1"/>
+          </p:cNvPicPr>
+          <p:nvPr/>
+        </p:nvPicPr>
+        <p:blipFill>
+          <a:blip r:embed="rId5"/>
+          <a:stretch>
+            <a:fillRect/>
+          </a:stretch>
+        </p:blipFill>
+        <p:spPr>
+          <a:xfrm>
+            <a:off x="4744144" y="1598804"/>
+            <a:ext cx="544411" cy="544411"/>
+          </a:xfrm>
+          <a:prstGeom prst="rect">
+            <a:avLst/>
+          </a:prstGeom>
+        </p:spPr>
+      </p:pic>
+      <p:pic>
+        <p:nvPicPr>
+          <p:cNvPr id="42" name="図 41"/>
+          <p:cNvPicPr>
+            <a:picLocks noChangeAspect="1"/>
+          </p:cNvPicPr>
+          <p:nvPr/>
+        </p:nvPicPr>
+        <p:blipFill>
+          <a:blip r:embed="rId5"/>
+          <a:stretch>
+            <a:fillRect/>
+          </a:stretch>
+        </p:blipFill>
+        <p:spPr>
+          <a:xfrm>
+            <a:off x="5569392" y="1580599"/>
+            <a:ext cx="544411" cy="544411"/>
+          </a:xfrm>
+          <a:prstGeom prst="rect">
+            <a:avLst/>
+          </a:prstGeom>
+        </p:spPr>
+      </p:pic>
+      <p:pic>
+        <p:nvPicPr>
+          <p:cNvPr id="43" name="図 42"/>
+          <p:cNvPicPr>
+            <a:picLocks noChangeAspect="1"/>
+          </p:cNvPicPr>
+          <p:nvPr/>
+        </p:nvPicPr>
+        <p:blipFill>
+          <a:blip r:embed="rId5"/>
+          <a:stretch>
+            <a:fillRect/>
+          </a:stretch>
+        </p:blipFill>
+        <p:spPr>
+          <a:xfrm>
+            <a:off x="6386010" y="1593961"/>
+            <a:ext cx="544411" cy="544411"/>
+          </a:xfrm>
+          <a:prstGeom prst="rect">
+            <a:avLst/>
+          </a:prstGeom>
+        </p:spPr>
+      </p:pic>
+      <p:pic>
+        <p:nvPicPr>
+          <p:cNvPr id="44" name="図 43"/>
+          <p:cNvPicPr>
+            <a:picLocks noChangeAspect="1"/>
+          </p:cNvPicPr>
+          <p:nvPr/>
+        </p:nvPicPr>
+        <p:blipFill>
+          <a:blip r:embed="rId5"/>
+          <a:stretch>
+            <a:fillRect/>
+          </a:stretch>
+        </p:blipFill>
+        <p:spPr>
+          <a:xfrm>
+            <a:off x="7244285" y="1601226"/>
+            <a:ext cx="544411" cy="544411"/>
+          </a:xfrm>
+          <a:prstGeom prst="rect">
+            <a:avLst/>
+          </a:prstGeom>
+        </p:spPr>
+      </p:pic>
+      <p:pic>
+        <p:nvPicPr>
+          <p:cNvPr id="45" name="図 44"/>
+          <p:cNvPicPr>
+            <a:picLocks noChangeAspect="1"/>
+          </p:cNvPicPr>
+          <p:nvPr/>
+        </p:nvPicPr>
+        <p:blipFill>
+          <a:blip r:embed="rId5"/>
+          <a:stretch>
+            <a:fillRect/>
+          </a:stretch>
+        </p:blipFill>
+        <p:spPr>
+          <a:xfrm>
+            <a:off x="8122195" y="1601226"/>
+            <a:ext cx="544411" cy="544411"/>
+          </a:xfrm>
+          <a:prstGeom prst="rect">
+            <a:avLst/>
+          </a:prstGeom>
+        </p:spPr>
+      </p:pic>
+      <p:pic>
+        <p:nvPicPr>
+          <p:cNvPr id="46" name="図 45"/>
+          <p:cNvPicPr>
+            <a:picLocks noChangeAspect="1"/>
+          </p:cNvPicPr>
+          <p:nvPr/>
+        </p:nvPicPr>
+        <p:blipFill>
+          <a:blip r:embed="rId6"/>
+          <a:stretch>
+            <a:fillRect/>
+          </a:stretch>
+        </p:blipFill>
+        <p:spPr>
+          <a:xfrm>
+            <a:off x="7210295" y="292698"/>
+            <a:ext cx="1156802" cy="1156802"/>
+          </a:xfrm>
+          <a:prstGeom prst="rect">
+            <a:avLst/>
+          </a:prstGeom>
+        </p:spPr>
+      </p:pic>
+      <p:sp>
+        <p:nvSpPr>
+          <p:cNvPr id="50" name="テキスト ボックス 49"/>
+          <p:cNvSpPr txBox="1"/>
+          <p:nvPr/>
+        </p:nvSpPr>
+        <p:spPr>
+          <a:xfrm>
+            <a:off x="9111560" y="678317"/>
+            <a:ext cx="1955985" cy="369332"/>
+          </a:xfrm>
+          <a:prstGeom prst="rect">
+            <a:avLst/>
+          </a:prstGeom>
+          <a:noFill/>
+        </p:spPr>
+        <p:txBody>
+          <a:bodyPr wrap="none" rtlCol="0">
+            <a:spAutoFit/>
+          </a:bodyPr>
+          <a:lstStyle/>
+          <a:p>
+            <a:r>
+              <a:rPr lang="en-US" altLang="ja-JP" dirty="0" smtClean="0"/>
+              <a:t>Delete DNS Record</a:t>
+            </a:r>
+            <a:endParaRPr kumimoji="1" lang="ja-JP" altLang="en-US" dirty="0"/>
+          </a:p>
+        </p:txBody>
+      </p:sp>
+      <p:sp>
+        <p:nvSpPr>
+          <p:cNvPr id="51" name="テキスト ボックス 50"/>
+          <p:cNvSpPr txBox="1"/>
+          <p:nvPr/>
+        </p:nvSpPr>
+        <p:spPr>
+          <a:xfrm>
+            <a:off x="8351071" y="678317"/>
+            <a:ext cx="776879" cy="369332"/>
+          </a:xfrm>
+          <a:prstGeom prst="rect">
+            <a:avLst/>
+          </a:prstGeom>
+          <a:noFill/>
+        </p:spPr>
+        <p:txBody>
+          <a:bodyPr wrap="none" rtlCol="0">
+            <a:spAutoFit/>
+          </a:bodyPr>
+          <a:lstStyle/>
+          <a:p>
+            <a:r>
+              <a:rPr lang="en-US" altLang="ja-JP" dirty="0" smtClean="0"/>
+              <a:t>Step.2</a:t>
+            </a:r>
+            <a:endParaRPr kumimoji="1" lang="ja-JP" altLang="en-US" dirty="0"/>
+          </a:p>
+        </p:txBody>
+      </p:sp>
+      <p:cxnSp>
+        <p:nvCxnSpPr>
+          <p:cNvPr id="54" name="直線矢印コネクタ 53"/>
+          <p:cNvCxnSpPr>
+            <a:stCxn id="7" idx="2"/>
+            <a:endCxn id="62" idx="0"/>
+          </p:cNvCxnSpPr>
+          <p:nvPr/>
+        </p:nvCxnSpPr>
+        <p:spPr>
+          <a:xfrm>
+            <a:off x="2318850" y="3018419"/>
+            <a:ext cx="3522749" cy="456200"/>
+          </a:xfrm>
+          <a:prstGeom prst="straightConnector1">
+            <a:avLst/>
+          </a:prstGeom>
+          <a:ln w="38100">
+            <a:solidFill>
+              <a:schemeClr val="tx1"/>
+            </a:solidFill>
+            <a:tailEnd type="triangle"/>
+          </a:ln>
+        </p:spPr>
+        <p:style>
+          <a:lnRef idx="1">
+            <a:schemeClr val="accent1"/>
+          </a:lnRef>
+          <a:fillRef idx="0">
+            <a:schemeClr val="accent1"/>
+          </a:fillRef>
+          <a:effectRef idx="0">
+            <a:schemeClr val="accent1"/>
+          </a:effectRef>
+          <a:fontRef idx="minor">
+            <a:schemeClr val="tx1"/>
+          </a:fontRef>
+        </p:style>
+      </p:cxnSp>
+      <p:cxnSp>
+        <p:nvCxnSpPr>
+          <p:cNvPr id="57" name="直線矢印コネクタ 56"/>
+          <p:cNvCxnSpPr>
+            <a:stCxn id="8" idx="2"/>
+            <a:endCxn id="62" idx="0"/>
+          </p:cNvCxnSpPr>
+          <p:nvPr/>
+        </p:nvCxnSpPr>
+        <p:spPr>
+          <a:xfrm>
+            <a:off x="3493100" y="3018419"/>
+            <a:ext cx="2348499" cy="456200"/>
+          </a:xfrm>
+          <a:prstGeom prst="straightConnector1">
+            <a:avLst/>
+          </a:prstGeom>
+          <a:ln w="38100">
+            <a:solidFill>
+              <a:schemeClr val="tx1"/>
+            </a:solidFill>
+            <a:tailEnd type="triangle"/>
+          </a:ln>
+        </p:spPr>
+        <p:style>
+          <a:lnRef idx="1">
+            <a:schemeClr val="accent1"/>
+          </a:lnRef>
+          <a:fillRef idx="0">
+            <a:schemeClr val="accent1"/>
+          </a:fillRef>
+          <a:effectRef idx="0">
+            <a:schemeClr val="accent1"/>
+          </a:effectRef>
+          <a:fontRef idx="minor">
+            <a:schemeClr val="tx1"/>
+          </a:fontRef>
+        </p:style>
+      </p:cxnSp>
+      <p:pic>
+        <p:nvPicPr>
+          <p:cNvPr id="62" name="図 61"/>
+          <p:cNvPicPr>
+            <a:picLocks noChangeAspect="1"/>
+          </p:cNvPicPr>
+          <p:nvPr/>
+        </p:nvPicPr>
+        <p:blipFill>
+          <a:blip r:embed="rId7"/>
+          <a:stretch>
+            <a:fillRect/>
+          </a:stretch>
+        </p:blipFill>
+        <p:spPr>
+          <a:xfrm>
+            <a:off x="5371103" y="3474619"/>
+            <a:ext cx="940992" cy="940992"/>
+          </a:xfrm>
+          <a:prstGeom prst="rect">
+            <a:avLst/>
+          </a:prstGeom>
+        </p:spPr>
+      </p:pic>
+      <p:cxnSp>
+        <p:nvCxnSpPr>
+          <p:cNvPr id="65" name="直線矢印コネクタ 64"/>
+          <p:cNvCxnSpPr>
+            <a:endCxn id="62" idx="0"/>
+          </p:cNvCxnSpPr>
+          <p:nvPr/>
+        </p:nvCxnSpPr>
+        <p:spPr>
+          <a:xfrm>
+            <a:off x="4597328" y="2989299"/>
+            <a:ext cx="1244271" cy="485320"/>
+          </a:xfrm>
+          <a:prstGeom prst="straightConnector1">
+            <a:avLst/>
+          </a:prstGeom>
+          <a:ln w="38100">
+            <a:solidFill>
+              <a:schemeClr val="tx1"/>
+            </a:solidFill>
+            <a:tailEnd type="triangle"/>
+          </a:ln>
+        </p:spPr>
+        <p:style>
+          <a:lnRef idx="1">
+            <a:schemeClr val="accent1"/>
+          </a:lnRef>
+          <a:fillRef idx="0">
+            <a:schemeClr val="accent1"/>
+          </a:fillRef>
+          <a:effectRef idx="0">
+            <a:schemeClr val="accent1"/>
+          </a:effectRef>
+          <a:fontRef idx="minor">
+            <a:schemeClr val="tx1"/>
+          </a:fontRef>
+        </p:style>
+      </p:cxnSp>
+      <p:cxnSp>
+        <p:nvCxnSpPr>
+          <p:cNvPr id="66" name="直線矢印コネクタ 65"/>
+          <p:cNvCxnSpPr>
+            <a:stCxn id="12" idx="2"/>
+            <a:endCxn id="62" idx="0"/>
+          </p:cNvCxnSpPr>
+          <p:nvPr/>
+        </p:nvCxnSpPr>
+        <p:spPr>
+          <a:xfrm flipH="1">
+            <a:off x="5841599" y="3018419"/>
+            <a:ext cx="1" cy="456200"/>
+          </a:xfrm>
+          <a:prstGeom prst="straightConnector1">
+            <a:avLst/>
+          </a:prstGeom>
+          <a:ln w="38100">
+            <a:solidFill>
+              <a:schemeClr val="tx1"/>
+            </a:solidFill>
+            <a:tailEnd type="triangle"/>
+          </a:ln>
+        </p:spPr>
+        <p:style>
+          <a:lnRef idx="1">
+            <a:schemeClr val="accent1"/>
+          </a:lnRef>
+          <a:fillRef idx="0">
+            <a:schemeClr val="accent1"/>
+          </a:fillRef>
+          <a:effectRef idx="0">
+            <a:schemeClr val="accent1"/>
+          </a:effectRef>
+          <a:fontRef idx="minor">
+            <a:schemeClr val="tx1"/>
+          </a:fontRef>
+        </p:style>
+      </p:cxnSp>
+      <p:cxnSp>
+        <p:nvCxnSpPr>
+          <p:cNvPr id="67" name="直線矢印コネクタ 66"/>
+          <p:cNvCxnSpPr>
+            <a:stCxn id="13" idx="2"/>
+            <a:endCxn id="62" idx="0"/>
+          </p:cNvCxnSpPr>
+          <p:nvPr/>
+        </p:nvCxnSpPr>
+        <p:spPr>
+          <a:xfrm flipH="1">
+            <a:off x="5841599" y="3018419"/>
+            <a:ext cx="1174251" cy="456200"/>
+          </a:xfrm>
+          <a:prstGeom prst="straightConnector1">
+            <a:avLst/>
+          </a:prstGeom>
+          <a:ln w="38100">
+            <a:solidFill>
+              <a:schemeClr val="tx1"/>
+            </a:solidFill>
+            <a:tailEnd type="triangle"/>
+          </a:ln>
+        </p:spPr>
+        <p:style>
+          <a:lnRef idx="1">
+            <a:schemeClr val="accent1"/>
+          </a:lnRef>
+          <a:fillRef idx="0">
+            <a:schemeClr val="accent1"/>
+          </a:fillRef>
+          <a:effectRef idx="0">
+            <a:schemeClr val="accent1"/>
+          </a:effectRef>
+          <a:fontRef idx="minor">
+            <a:schemeClr val="tx1"/>
+          </a:fontRef>
+        </p:style>
+      </p:cxnSp>
+      <p:cxnSp>
+        <p:nvCxnSpPr>
+          <p:cNvPr id="68" name="直線矢印コネクタ 67"/>
+          <p:cNvCxnSpPr>
+            <a:stCxn id="14" idx="2"/>
+            <a:endCxn id="62" idx="0"/>
+          </p:cNvCxnSpPr>
+          <p:nvPr/>
+        </p:nvCxnSpPr>
+        <p:spPr>
+          <a:xfrm flipH="1">
+            <a:off x="5841599" y="3018419"/>
+            <a:ext cx="2348501" cy="456200"/>
+          </a:xfrm>
+          <a:prstGeom prst="straightConnector1">
+            <a:avLst/>
+          </a:prstGeom>
+          <a:ln w="38100">
+            <a:solidFill>
+              <a:schemeClr val="tx1"/>
+            </a:solidFill>
+            <a:tailEnd type="triangle"/>
+          </a:ln>
+        </p:spPr>
+        <p:style>
+          <a:lnRef idx="1">
+            <a:schemeClr val="accent1"/>
+          </a:lnRef>
+          <a:fillRef idx="0">
+            <a:schemeClr val="accent1"/>
+          </a:fillRef>
+          <a:effectRef idx="0">
+            <a:schemeClr val="accent1"/>
+          </a:effectRef>
+          <a:fontRef idx="minor">
+            <a:schemeClr val="tx1"/>
+          </a:fontRef>
+        </p:style>
+      </p:cxnSp>
+      <p:cxnSp>
+        <p:nvCxnSpPr>
+          <p:cNvPr id="69" name="直線矢印コネクタ 68"/>
+          <p:cNvCxnSpPr>
+            <a:stCxn id="15" idx="2"/>
+            <a:endCxn id="62" idx="0"/>
+          </p:cNvCxnSpPr>
+          <p:nvPr/>
+        </p:nvCxnSpPr>
+        <p:spPr>
+          <a:xfrm flipH="1">
+            <a:off x="5841599" y="3018419"/>
+            <a:ext cx="3522751" cy="456200"/>
+          </a:xfrm>
+          <a:prstGeom prst="straightConnector1">
+            <a:avLst/>
+          </a:prstGeom>
+          <a:ln w="38100">
+            <a:solidFill>
+              <a:schemeClr val="tx1"/>
+            </a:solidFill>
+            <a:tailEnd type="triangle"/>
+          </a:ln>
+        </p:spPr>
+        <p:style>
+          <a:lnRef idx="1">
+            <a:schemeClr val="accent1"/>
+          </a:lnRef>
+          <a:fillRef idx="0">
+            <a:schemeClr val="accent1"/>
+          </a:fillRef>
+          <a:effectRef idx="0">
+            <a:schemeClr val="accent1"/>
+          </a:effectRef>
+          <a:fontRef idx="minor">
+            <a:schemeClr val="tx1"/>
+          </a:fontRef>
+        </p:style>
+      </p:cxnSp>
+      <p:sp>
+        <p:nvSpPr>
+          <p:cNvPr id="83" name="テキスト ボックス 82"/>
+          <p:cNvSpPr txBox="1"/>
+          <p:nvPr/>
+        </p:nvSpPr>
+        <p:spPr>
+          <a:xfrm>
+            <a:off x="7144202" y="3964508"/>
+            <a:ext cx="1181221" cy="369332"/>
+          </a:xfrm>
+          <a:prstGeom prst="rect">
+            <a:avLst/>
+          </a:prstGeom>
+          <a:noFill/>
+        </p:spPr>
+        <p:txBody>
+          <a:bodyPr wrap="none" rtlCol="0">
+            <a:spAutoFit/>
+          </a:bodyPr>
+          <a:lstStyle/>
+          <a:p>
+            <a:r>
+              <a:rPr lang="en-US" altLang="ja-JP" dirty="0" smtClean="0"/>
+              <a:t>Delete VM</a:t>
+            </a:r>
+            <a:endParaRPr kumimoji="1" lang="ja-JP" altLang="en-US" dirty="0"/>
+          </a:p>
+        </p:txBody>
+      </p:sp>
+      <p:sp>
+        <p:nvSpPr>
+          <p:cNvPr id="84" name="テキスト ボックス 83"/>
+          <p:cNvSpPr txBox="1"/>
+          <p:nvPr/>
+        </p:nvSpPr>
+        <p:spPr>
+          <a:xfrm>
+            <a:off x="6383713" y="3964508"/>
+            <a:ext cx="776879" cy="369332"/>
+          </a:xfrm>
+          <a:prstGeom prst="rect">
+            <a:avLst/>
+          </a:prstGeom>
+          <a:noFill/>
+        </p:spPr>
+        <p:txBody>
+          <a:bodyPr wrap="none" rtlCol="0">
+            <a:spAutoFit/>
+          </a:bodyPr>
+          <a:lstStyle/>
+          <a:p>
+            <a:r>
+              <a:rPr lang="en-US" altLang="ja-JP" dirty="0" smtClean="0"/>
+              <a:t>Step.3</a:t>
+            </a:r>
+            <a:endParaRPr kumimoji="1" lang="ja-JP" altLang="en-US" dirty="0"/>
+          </a:p>
+        </p:txBody>
+      </p:sp>
+      <p:grpSp>
+        <p:nvGrpSpPr>
+          <p:cNvPr id="96" name="グループ化 95"/>
+          <p:cNvGrpSpPr/>
+          <p:nvPr/>
+        </p:nvGrpSpPr>
+        <p:grpSpPr>
+          <a:xfrm>
+            <a:off x="1518292" y="5049663"/>
+            <a:ext cx="8646610" cy="1174249"/>
+            <a:chOff x="1552375" y="5097288"/>
+            <a:chExt cx="8646610" cy="1174249"/>
+          </a:xfrm>
+        </p:grpSpPr>
+        <p:pic>
+          <p:nvPicPr>
+            <p:cNvPr id="85" name="図 84"/>
+            <p:cNvPicPr>
+              <a:picLocks noChangeAspect="1"/>
+            </p:cNvPicPr>
+            <p:nvPr/>
+          </p:nvPicPr>
+          <p:blipFill>
+            <a:blip r:embed="rId8"/>
+            <a:stretch>
+              <a:fillRect/>
+            </a:stretch>
+          </p:blipFill>
+          <p:spPr>
+            <a:xfrm>
+              <a:off x="1552375" y="5097288"/>
+              <a:ext cx="1174250" cy="1174249"/>
+            </a:xfrm>
+            <a:prstGeom prst="rect">
+              <a:avLst/>
+            </a:prstGeom>
+          </p:spPr>
+        </p:pic>
+        <p:pic>
+          <p:nvPicPr>
+            <p:cNvPr id="86" name="図 85"/>
+            <p:cNvPicPr>
+              <a:picLocks noChangeAspect="1"/>
+            </p:cNvPicPr>
+            <p:nvPr/>
+          </p:nvPicPr>
+          <p:blipFill>
+            <a:blip r:embed="rId8"/>
+            <a:stretch>
+              <a:fillRect/>
+            </a:stretch>
+          </p:blipFill>
+          <p:spPr>
+            <a:xfrm>
+              <a:off x="2486420" y="5097288"/>
+              <a:ext cx="1174250" cy="1174249"/>
+            </a:xfrm>
+            <a:prstGeom prst="rect">
+              <a:avLst/>
+            </a:prstGeom>
+          </p:spPr>
+        </p:pic>
+        <p:pic>
+          <p:nvPicPr>
+            <p:cNvPr id="87" name="図 86"/>
+            <p:cNvPicPr>
+              <a:picLocks noChangeAspect="1"/>
+            </p:cNvPicPr>
+            <p:nvPr/>
+          </p:nvPicPr>
+          <p:blipFill>
+            <a:blip r:embed="rId8"/>
+            <a:stretch>
+              <a:fillRect/>
+            </a:stretch>
+          </p:blipFill>
+          <p:spPr>
+            <a:xfrm>
+              <a:off x="3420465" y="5097288"/>
+              <a:ext cx="1174250" cy="1174249"/>
+            </a:xfrm>
+            <a:prstGeom prst="rect">
+              <a:avLst/>
+            </a:prstGeom>
+          </p:spPr>
+        </p:pic>
+        <p:pic>
+          <p:nvPicPr>
+            <p:cNvPr id="88" name="図 87"/>
+            <p:cNvPicPr>
+              <a:picLocks noChangeAspect="1"/>
+            </p:cNvPicPr>
+            <p:nvPr/>
+          </p:nvPicPr>
+          <p:blipFill>
+            <a:blip r:embed="rId8"/>
+            <a:stretch>
+              <a:fillRect/>
+            </a:stretch>
+          </p:blipFill>
+          <p:spPr>
+            <a:xfrm>
+              <a:off x="4354510" y="5097288"/>
+              <a:ext cx="1174250" cy="1174249"/>
+            </a:xfrm>
+            <a:prstGeom prst="rect">
+              <a:avLst/>
+            </a:prstGeom>
+          </p:spPr>
+        </p:pic>
+        <p:pic>
+          <p:nvPicPr>
+            <p:cNvPr id="89" name="図 88"/>
+            <p:cNvPicPr>
+              <a:picLocks noChangeAspect="1"/>
+            </p:cNvPicPr>
+            <p:nvPr/>
+          </p:nvPicPr>
+          <p:blipFill>
+            <a:blip r:embed="rId8"/>
+            <a:stretch>
+              <a:fillRect/>
+            </a:stretch>
+          </p:blipFill>
+          <p:spPr>
+            <a:xfrm>
+              <a:off x="5288555" y="5097288"/>
+              <a:ext cx="1174250" cy="1174249"/>
+            </a:xfrm>
+            <a:prstGeom prst="rect">
+              <a:avLst/>
+            </a:prstGeom>
+          </p:spPr>
+        </p:pic>
+        <p:pic>
+          <p:nvPicPr>
+            <p:cNvPr id="90" name="図 89"/>
+            <p:cNvPicPr>
+              <a:picLocks noChangeAspect="1"/>
+            </p:cNvPicPr>
+            <p:nvPr/>
+          </p:nvPicPr>
+          <p:blipFill>
+            <a:blip r:embed="rId8"/>
+            <a:stretch>
+              <a:fillRect/>
+            </a:stretch>
+          </p:blipFill>
+          <p:spPr>
+            <a:xfrm>
+              <a:off x="6222600" y="5097288"/>
+              <a:ext cx="1174250" cy="1174249"/>
+            </a:xfrm>
+            <a:prstGeom prst="rect">
+              <a:avLst/>
+            </a:prstGeom>
+          </p:spPr>
+        </p:pic>
+        <p:pic>
+          <p:nvPicPr>
+            <p:cNvPr id="91" name="図 90"/>
+            <p:cNvPicPr>
+              <a:picLocks noChangeAspect="1"/>
+            </p:cNvPicPr>
+            <p:nvPr/>
+          </p:nvPicPr>
+          <p:blipFill>
+            <a:blip r:embed="rId8"/>
+            <a:stretch>
+              <a:fillRect/>
+            </a:stretch>
+          </p:blipFill>
+          <p:spPr>
+            <a:xfrm>
+              <a:off x="7156645" y="5097288"/>
+              <a:ext cx="1174250" cy="1174249"/>
+            </a:xfrm>
+            <a:prstGeom prst="rect">
+              <a:avLst/>
+            </a:prstGeom>
+          </p:spPr>
+        </p:pic>
+        <p:pic>
+          <p:nvPicPr>
+            <p:cNvPr id="92" name="図 91"/>
+            <p:cNvPicPr>
+              <a:picLocks noChangeAspect="1"/>
+            </p:cNvPicPr>
+            <p:nvPr/>
+          </p:nvPicPr>
+          <p:blipFill>
+            <a:blip r:embed="rId8"/>
+            <a:stretch>
+              <a:fillRect/>
+            </a:stretch>
+          </p:blipFill>
+          <p:spPr>
+            <a:xfrm>
+              <a:off x="8090690" y="5097288"/>
+              <a:ext cx="1174250" cy="1174249"/>
+            </a:xfrm>
+            <a:prstGeom prst="rect">
+              <a:avLst/>
+            </a:prstGeom>
+          </p:spPr>
+        </p:pic>
+        <p:pic>
+          <p:nvPicPr>
+            <p:cNvPr id="93" name="図 92"/>
+            <p:cNvPicPr>
+              <a:picLocks noChangeAspect="1"/>
+            </p:cNvPicPr>
+            <p:nvPr/>
+          </p:nvPicPr>
+          <p:blipFill>
+            <a:blip r:embed="rId8"/>
+            <a:stretch>
+              <a:fillRect/>
+            </a:stretch>
+          </p:blipFill>
+          <p:spPr>
+            <a:xfrm>
+              <a:off x="9024735" y="5097288"/>
+              <a:ext cx="1174250" cy="1174249"/>
+            </a:xfrm>
+            <a:prstGeom prst="rect">
+              <a:avLst/>
+            </a:prstGeom>
+          </p:spPr>
+        </p:pic>
+      </p:grpSp>
+      <p:pic>
+        <p:nvPicPr>
+          <p:cNvPr id="97" name="図 96"/>
+          <p:cNvPicPr>
+            <a:picLocks noChangeAspect="1"/>
+          </p:cNvPicPr>
+          <p:nvPr/>
+        </p:nvPicPr>
+        <p:blipFill>
+          <a:blip r:embed="rId9"/>
+          <a:stretch>
+            <a:fillRect/>
+          </a:stretch>
+        </p:blipFill>
+        <p:spPr>
+          <a:xfrm>
+            <a:off x="2240855" y="4838181"/>
+            <a:ext cx="422964" cy="422964"/>
+          </a:xfrm>
+          <a:prstGeom prst="rect">
+            <a:avLst/>
+          </a:prstGeom>
+        </p:spPr>
+      </p:pic>
+      <p:sp>
+        <p:nvSpPr>
+          <p:cNvPr id="106" name="テキスト ボックス 105"/>
+          <p:cNvSpPr txBox="1"/>
+          <p:nvPr/>
+        </p:nvSpPr>
+        <p:spPr>
+          <a:xfrm>
+            <a:off x="9260149" y="4427119"/>
+            <a:ext cx="1122230" cy="369332"/>
+          </a:xfrm>
+          <a:prstGeom prst="rect">
+            <a:avLst/>
+          </a:prstGeom>
+          <a:noFill/>
+        </p:spPr>
+        <p:txBody>
+          <a:bodyPr wrap="none" rtlCol="0">
+            <a:spAutoFit/>
+          </a:bodyPr>
+          <a:lstStyle/>
+          <a:p>
+            <a:r>
+              <a:rPr kumimoji="1" lang="en-US" altLang="ja-JP" dirty="0" smtClean="0"/>
+              <a:t>Power Off</a:t>
+            </a:r>
+            <a:endParaRPr kumimoji="1" lang="ja-JP" altLang="en-US" dirty="0"/>
+          </a:p>
+        </p:txBody>
+      </p:sp>
+      <p:sp>
+        <p:nvSpPr>
+          <p:cNvPr id="107" name="テキスト ボックス 106"/>
+          <p:cNvSpPr txBox="1"/>
+          <p:nvPr/>
+        </p:nvSpPr>
+        <p:spPr>
+          <a:xfrm>
+            <a:off x="8499660" y="4427119"/>
+            <a:ext cx="776879" cy="369332"/>
+          </a:xfrm>
+          <a:prstGeom prst="rect">
+            <a:avLst/>
+          </a:prstGeom>
+          <a:noFill/>
+        </p:spPr>
+        <p:txBody>
+          <a:bodyPr wrap="none" rtlCol="0">
+            <a:spAutoFit/>
+          </a:bodyPr>
+          <a:lstStyle/>
+          <a:p>
+            <a:r>
+              <a:rPr lang="en-US" altLang="ja-JP" dirty="0" smtClean="0"/>
+              <a:t>Step.5</a:t>
+            </a:r>
+            <a:endParaRPr kumimoji="1" lang="ja-JP" altLang="en-US" dirty="0"/>
+          </a:p>
+        </p:txBody>
+      </p:sp>
+      <p:pic>
+        <p:nvPicPr>
+          <p:cNvPr id="134" name="図 133"/>
+          <p:cNvPicPr>
+            <a:picLocks noChangeAspect="1"/>
+          </p:cNvPicPr>
+          <p:nvPr/>
+        </p:nvPicPr>
+        <p:blipFill>
+          <a:blip r:embed="rId9"/>
+          <a:stretch>
+            <a:fillRect/>
+          </a:stretch>
+        </p:blipFill>
+        <p:spPr>
+          <a:xfrm>
+            <a:off x="3174900" y="4838181"/>
+            <a:ext cx="422964" cy="422964"/>
+          </a:xfrm>
+          <a:prstGeom prst="rect">
+            <a:avLst/>
+          </a:prstGeom>
+        </p:spPr>
+      </p:pic>
+      <p:pic>
+        <p:nvPicPr>
+          <p:cNvPr id="135" name="図 134"/>
+          <p:cNvPicPr>
+            <a:picLocks noChangeAspect="1"/>
+          </p:cNvPicPr>
+          <p:nvPr/>
+        </p:nvPicPr>
+        <p:blipFill>
+          <a:blip r:embed="rId9"/>
+          <a:stretch>
+            <a:fillRect/>
+          </a:stretch>
+        </p:blipFill>
+        <p:spPr>
+          <a:xfrm>
+            <a:off x="4108945" y="4838181"/>
+            <a:ext cx="422964" cy="422964"/>
+          </a:xfrm>
+          <a:prstGeom prst="rect">
+            <a:avLst/>
+          </a:prstGeom>
+        </p:spPr>
+      </p:pic>
+      <p:pic>
+        <p:nvPicPr>
+          <p:cNvPr id="136" name="図 135"/>
+          <p:cNvPicPr>
+            <a:picLocks noChangeAspect="1"/>
+          </p:cNvPicPr>
+          <p:nvPr/>
+        </p:nvPicPr>
+        <p:blipFill>
+          <a:blip r:embed="rId9"/>
+          <a:stretch>
+            <a:fillRect/>
+          </a:stretch>
+        </p:blipFill>
+        <p:spPr>
+          <a:xfrm>
+            <a:off x="5042990" y="4838181"/>
+            <a:ext cx="422964" cy="422964"/>
+          </a:xfrm>
+          <a:prstGeom prst="rect">
+            <a:avLst/>
+          </a:prstGeom>
+        </p:spPr>
+      </p:pic>
+      <p:pic>
+        <p:nvPicPr>
+          <p:cNvPr id="137" name="図 136"/>
+          <p:cNvPicPr>
+            <a:picLocks noChangeAspect="1"/>
+          </p:cNvPicPr>
+          <p:nvPr/>
+        </p:nvPicPr>
+        <p:blipFill>
+          <a:blip r:embed="rId9"/>
+          <a:stretch>
+            <a:fillRect/>
+          </a:stretch>
+        </p:blipFill>
+        <p:spPr>
+          <a:xfrm>
+            <a:off x="5977035" y="4838181"/>
+            <a:ext cx="422964" cy="422964"/>
+          </a:xfrm>
+          <a:prstGeom prst="rect">
+            <a:avLst/>
+          </a:prstGeom>
+        </p:spPr>
+      </p:pic>
+      <p:pic>
+        <p:nvPicPr>
+          <p:cNvPr id="138" name="図 137"/>
+          <p:cNvPicPr>
+            <a:picLocks noChangeAspect="1"/>
+          </p:cNvPicPr>
+          <p:nvPr/>
+        </p:nvPicPr>
+        <p:blipFill>
+          <a:blip r:embed="rId9"/>
+          <a:stretch>
+            <a:fillRect/>
+          </a:stretch>
+        </p:blipFill>
+        <p:spPr>
+          <a:xfrm>
+            <a:off x="6911080" y="4838181"/>
+            <a:ext cx="422964" cy="422964"/>
+          </a:xfrm>
+          <a:prstGeom prst="rect">
+            <a:avLst/>
+          </a:prstGeom>
+        </p:spPr>
+      </p:pic>
+      <p:pic>
+        <p:nvPicPr>
+          <p:cNvPr id="139" name="図 138"/>
+          <p:cNvPicPr>
+            <a:picLocks noChangeAspect="1"/>
+          </p:cNvPicPr>
+          <p:nvPr/>
+        </p:nvPicPr>
+        <p:blipFill>
+          <a:blip r:embed="rId9"/>
+          <a:stretch>
+            <a:fillRect/>
+          </a:stretch>
+        </p:blipFill>
+        <p:spPr>
+          <a:xfrm>
+            <a:off x="7845125" y="4838181"/>
+            <a:ext cx="422964" cy="422964"/>
+          </a:xfrm>
+          <a:prstGeom prst="rect">
+            <a:avLst/>
+          </a:prstGeom>
+        </p:spPr>
+      </p:pic>
+      <p:pic>
+        <p:nvPicPr>
+          <p:cNvPr id="140" name="図 139"/>
+          <p:cNvPicPr>
+            <a:picLocks noChangeAspect="1"/>
+          </p:cNvPicPr>
+          <p:nvPr/>
+        </p:nvPicPr>
+        <p:blipFill>
+          <a:blip r:embed="rId9"/>
+          <a:stretch>
+            <a:fillRect/>
+          </a:stretch>
+        </p:blipFill>
+        <p:spPr>
+          <a:xfrm>
+            <a:off x="8779170" y="4838181"/>
+            <a:ext cx="422964" cy="422964"/>
+          </a:xfrm>
+          <a:prstGeom prst="rect">
+            <a:avLst/>
+          </a:prstGeom>
+        </p:spPr>
+      </p:pic>
+      <p:pic>
+        <p:nvPicPr>
+          <p:cNvPr id="141" name="図 140"/>
+          <p:cNvPicPr>
+            <a:picLocks noChangeAspect="1"/>
+          </p:cNvPicPr>
+          <p:nvPr/>
+        </p:nvPicPr>
+        <p:blipFill>
+          <a:blip r:embed="rId9"/>
+          <a:stretch>
+            <a:fillRect/>
+          </a:stretch>
+        </p:blipFill>
+        <p:spPr>
+          <a:xfrm>
+            <a:off x="9713215" y="4838181"/>
+            <a:ext cx="422964" cy="422964"/>
+          </a:xfrm>
+          <a:prstGeom prst="rect">
+            <a:avLst/>
+          </a:prstGeom>
+        </p:spPr>
+      </p:pic>
+      <p:pic>
+        <p:nvPicPr>
+          <p:cNvPr id="142" name="図 141"/>
+          <p:cNvPicPr>
+            <a:picLocks noChangeAspect="1"/>
+          </p:cNvPicPr>
+          <p:nvPr/>
+        </p:nvPicPr>
+        <p:blipFill>
+          <a:blip r:embed="rId10"/>
+          <a:stretch>
+            <a:fillRect/>
+          </a:stretch>
+        </p:blipFill>
+        <p:spPr>
+          <a:xfrm>
+            <a:off x="1633795" y="3640963"/>
+            <a:ext cx="952500" cy="952500"/>
+          </a:xfrm>
+          <a:prstGeom prst="rect">
+            <a:avLst/>
+          </a:prstGeom>
+        </p:spPr>
+      </p:pic>
+      <p:sp>
+        <p:nvSpPr>
+          <p:cNvPr id="143" name="テキスト ボックス 142"/>
+          <p:cNvSpPr txBox="1"/>
+          <p:nvPr/>
+        </p:nvSpPr>
+        <p:spPr>
+          <a:xfrm>
+            <a:off x="3301596" y="3912497"/>
+            <a:ext cx="1596719" cy="369332"/>
+          </a:xfrm>
+          <a:prstGeom prst="rect">
+            <a:avLst/>
+          </a:prstGeom>
+          <a:noFill/>
+        </p:spPr>
+        <p:txBody>
+          <a:bodyPr wrap="none" rtlCol="0">
+            <a:spAutoFit/>
+          </a:bodyPr>
+          <a:lstStyle/>
+          <a:p>
+            <a:r>
+              <a:rPr lang="en-US" altLang="ja-JP" dirty="0" smtClean="0"/>
+              <a:t>Delete Settings</a:t>
+            </a:r>
+            <a:endParaRPr kumimoji="1" lang="ja-JP" altLang="en-US" dirty="0"/>
+          </a:p>
+        </p:txBody>
+      </p:sp>
+      <p:sp>
+        <p:nvSpPr>
+          <p:cNvPr id="144" name="テキスト ボックス 143"/>
+          <p:cNvSpPr txBox="1"/>
+          <p:nvPr/>
+        </p:nvSpPr>
+        <p:spPr>
+          <a:xfrm>
+            <a:off x="2541107" y="3912497"/>
+            <a:ext cx="776879" cy="369332"/>
+          </a:xfrm>
+          <a:prstGeom prst="rect">
+            <a:avLst/>
+          </a:prstGeom>
+          <a:noFill/>
+        </p:spPr>
+        <p:txBody>
+          <a:bodyPr wrap="none" rtlCol="0">
+            <a:spAutoFit/>
+          </a:bodyPr>
+          <a:lstStyle/>
+          <a:p>
+            <a:r>
+              <a:rPr lang="en-US" altLang="ja-JP" dirty="0" smtClean="0"/>
+              <a:t>Step.4</a:t>
+            </a:r>
+            <a:endParaRPr kumimoji="1" lang="ja-JP" altLang="en-US" dirty="0"/>
+          </a:p>
+        </p:txBody>
+      </p:sp>
+      <p:sp>
+        <p:nvSpPr>
+          <p:cNvPr id="148" name="テキスト ボックス 147"/>
+          <p:cNvSpPr txBox="1"/>
+          <p:nvPr/>
+        </p:nvSpPr>
+        <p:spPr>
+          <a:xfrm>
+            <a:off x="1518292" y="-825673"/>
+            <a:ext cx="7044557" cy="523220"/>
+          </a:xfrm>
+          <a:prstGeom prst="rect">
+            <a:avLst/>
+          </a:prstGeom>
+          <a:noFill/>
+        </p:spPr>
+        <p:txBody>
+          <a:bodyPr wrap="none" rtlCol="0">
+            <a:spAutoFit/>
+          </a:bodyPr>
+          <a:lstStyle/>
+          <a:p>
+            <a:r>
+              <a:rPr lang="en-US" altLang="ja-JP" sz="2800" dirty="0" err="1"/>
+              <a:t>vCenter</a:t>
+            </a:r>
+            <a:r>
+              <a:rPr lang="en-US" altLang="ja-JP" sz="2800" dirty="0"/>
+              <a:t> Decommissioning Automation Pipeline</a:t>
+            </a:r>
+            <a:endParaRPr kumimoji="1" lang="ja-JP" altLang="en-US" sz="2800" dirty="0"/>
+          </a:p>
+        </p:txBody>
+      </p:sp>
+    </p:spTree>
+    <p:extLst>
+      <p:ext uri="{BB962C8B-B14F-4D97-AF65-F5344CB8AC3E}">
+        <p14:creationId xmlns:p14="http://schemas.microsoft.com/office/powerpoint/2010/main" val="160493991"/>
       </p:ext>
     </p:extLst>
   </p:cSld>
